--- a/examples/aurora-synthetic/output/paimon-a1/aurora-synthetic-paimon-cape-gradient-visual-signature.pptx
+++ b/examples/aurora-synthetic/output/paimon-a1/aurora-synthetic-paimon-cape-gradient-visual-signature.pptx
@@ -2,13 +2,13 @@
 <file path=ppt/presentation.xml><?xml version="1.0" encoding="utf-8"?>
 <p:presentation xmlns:p="http://schemas.openxmlformats.org/presentationml/2006/main">
   <p:sldMasterIdLst>
-    <p:sldMasterId xmlns:r="http://schemas.openxmlformats.org/officeDocument/2006/relationships" id="2147483648" r:id="R805696ded1a344e2"/>
+    <p:sldMasterId xmlns:r="http://schemas.openxmlformats.org/officeDocument/2006/relationships" id="2147483648" r:id="Rfec3223c92214bb1"/>
   </p:sldMasterIdLst>
   <p:notesMasterIdLst>
-    <p:notesMasterId xmlns:r="http://schemas.openxmlformats.org/officeDocument/2006/relationships" r:id="Rdf1981b621914229"/>
+    <p:notesMasterId xmlns:r="http://schemas.openxmlformats.org/officeDocument/2006/relationships" r:id="Rf9c328fcccca4f4a"/>
   </p:notesMasterIdLst>
   <p:sldIdLst>
-    <p:sldId xmlns:r="http://schemas.openxmlformats.org/officeDocument/2006/relationships" id="256" r:id="Rce9d0d5a5c974924"/>
+    <p:sldId xmlns:r="http://schemas.openxmlformats.org/officeDocument/2006/relationships" id="256" r:id="R622c2f03a5b040f4"/>
   </p:sldIdLst>
   <p:sldSz cx="30279975" cy="21383625"/>
   <p:notesSz cx="6858000" cy="9144000"/>
@@ -530,7 +530,7 @@
   </p:cSld>
   <p:clrMap bg1="lt1" tx1="dk1" bg2="lt2" tx2="dk2" accent1="accent1" accent2="accent2" accent3="accent3" accent4="accent4" accent5="accent5" accent6="accent6" hlink="hlink" folHlink="folHlink"/>
   <p:sldLayoutIdLst>
-    <p:sldLayoutId xmlns:r="http://schemas.openxmlformats.org/officeDocument/2006/relationships" id="2147483649" r:id="R7489837318dc4942"/>
+    <p:sldLayoutId xmlns:r="http://schemas.openxmlformats.org/officeDocument/2006/relationships" id="2147483649" r:id="R11b0e1cb7f8043bc"/>
   </p:sldLayoutIdLst>
   <p:txStyles>
     <p:titleStyle>
@@ -1078,10 +1078,10 @@
       </p:grpSpPr>
       <p:sp>
         <p:nvSpPr>
-          <p:cNvPr id="183" name="header-band">
-            <a:extLst xmlns:a="http://schemas.openxmlformats.org/drawingml/2006/main">
-              <a:ext uri="{FF2B5EF4-FFF2-40B4-BE49-F238E27FC236}">
-                <a16:creationId xmlns:a16="http://schemas.microsoft.com/office/drawing/2014/main" id="{91C87CD6-CF16-48FD-9ED9-0683B2342427}"/>
+          <p:cNvPr id="185" name="header-band">
+            <a:extLst xmlns:a="http://schemas.openxmlformats.org/drawingml/2006/main">
+              <a:ext uri="{FF2B5EF4-FFF2-40B4-BE49-F238E27FC236}">
+                <a16:creationId xmlns:a16="http://schemas.microsoft.com/office/drawing/2014/main" id="{4BCFCFFA-D9FB-4BAB-8A00-39E3CE404258}"/>
               </a:ext>
             </a:extLst>
           </p:cNvPr>
@@ -1114,7 +1114,7 @@
           <p:cNvPr id="2" name="top-cape-gradient-1">
             <a:extLst xmlns:a="http://schemas.openxmlformats.org/drawingml/2006/main">
               <a:ext uri="{FF2B5EF4-FFF2-40B4-BE49-F238E27FC236}">
-                <a16:creationId xmlns:a16="http://schemas.microsoft.com/office/drawing/2014/main" id="{CCDE704B-CD36-4827-B281-4345BC2B2A88}"/>
+                <a16:creationId xmlns:a16="http://schemas.microsoft.com/office/drawing/2014/main" id="{8EEAE536-6F06-43DC-88FA-330A5C6001DB}"/>
               </a:ext>
             </a:extLst>
           </p:cNvPr>
@@ -1147,7 +1147,7 @@
           <p:cNvPr id="3" name="top-cape-gradient-2">
             <a:extLst xmlns:a="http://schemas.openxmlformats.org/drawingml/2006/main">
               <a:ext uri="{FF2B5EF4-FFF2-40B4-BE49-F238E27FC236}">
-                <a16:creationId xmlns:a16="http://schemas.microsoft.com/office/drawing/2014/main" id="{288F5354-3DED-4305-801B-F94C3149B38E}"/>
+                <a16:creationId xmlns:a16="http://schemas.microsoft.com/office/drawing/2014/main" id="{8FEF2BB6-910B-4443-B591-FF49230E49DC}"/>
               </a:ext>
             </a:extLst>
           </p:cNvPr>
@@ -1180,7 +1180,7 @@
           <p:cNvPr id="4" name="top-cape-gradient-3">
             <a:extLst xmlns:a="http://schemas.openxmlformats.org/drawingml/2006/main">
               <a:ext uri="{FF2B5EF4-FFF2-40B4-BE49-F238E27FC236}">
-                <a16:creationId xmlns:a16="http://schemas.microsoft.com/office/drawing/2014/main" id="{84302EDF-1360-4086-ABAA-10D6C480571C}"/>
+                <a16:creationId xmlns:a16="http://schemas.microsoft.com/office/drawing/2014/main" id="{796CF093-720C-4B00-8351-BC4713F39723}"/>
               </a:ext>
             </a:extLst>
           </p:cNvPr>
@@ -1213,7 +1213,7 @@
           <p:cNvPr id="5" name="top-cape-gradient-4">
             <a:extLst xmlns:a="http://schemas.openxmlformats.org/drawingml/2006/main">
               <a:ext uri="{FF2B5EF4-FFF2-40B4-BE49-F238E27FC236}">
-                <a16:creationId xmlns:a16="http://schemas.microsoft.com/office/drawing/2014/main" id="{7C546D9E-949B-4610-9D0E-EF3DAB9DF75F}"/>
+                <a16:creationId xmlns:a16="http://schemas.microsoft.com/office/drawing/2014/main" id="{BCF4955D-159B-4651-84BD-C29807736C7B}"/>
               </a:ext>
             </a:extLst>
           </p:cNvPr>
@@ -1246,7 +1246,7 @@
           <p:cNvPr id="6" name="top-cape-gradient-5">
             <a:extLst xmlns:a="http://schemas.openxmlformats.org/drawingml/2006/main">
               <a:ext uri="{FF2B5EF4-FFF2-40B4-BE49-F238E27FC236}">
-                <a16:creationId xmlns:a16="http://schemas.microsoft.com/office/drawing/2014/main" id="{8FD5FD4F-C4A8-4A89-8523-635F884A3360}"/>
+                <a16:creationId xmlns:a16="http://schemas.microsoft.com/office/drawing/2014/main" id="{A61364DF-AF16-4484-9E34-C98AA68BE93F}"/>
               </a:ext>
             </a:extLst>
           </p:cNvPr>
@@ -1279,7 +1279,7 @@
           <p:cNvPr id="7" name="top-cape-gradient-6">
             <a:extLst xmlns:a="http://schemas.openxmlformats.org/drawingml/2006/main">
               <a:ext uri="{FF2B5EF4-FFF2-40B4-BE49-F238E27FC236}">
-                <a16:creationId xmlns:a16="http://schemas.microsoft.com/office/drawing/2014/main" id="{FC08EDFC-6434-4A02-BDF9-69F88147D87D}"/>
+                <a16:creationId xmlns:a16="http://schemas.microsoft.com/office/drawing/2014/main" id="{57A1797A-DE24-46B3-A7F1-A38645C810A8}"/>
               </a:ext>
             </a:extLst>
           </p:cNvPr>
@@ -1312,7 +1312,7 @@
           <p:cNvPr id="8" name="top-cape-gradient-7">
             <a:extLst xmlns:a="http://schemas.openxmlformats.org/drawingml/2006/main">
               <a:ext uri="{FF2B5EF4-FFF2-40B4-BE49-F238E27FC236}">
-                <a16:creationId xmlns:a16="http://schemas.microsoft.com/office/drawing/2014/main" id="{64EA6DFD-5964-4110-85C0-2E98300B960C}"/>
+                <a16:creationId xmlns:a16="http://schemas.microsoft.com/office/drawing/2014/main" id="{A42409EB-5745-446A-AA25-211844B3E474}"/>
               </a:ext>
             </a:extLst>
           </p:cNvPr>
@@ -1345,7 +1345,7 @@
           <p:cNvPr id="9" name="top-cape-gradient-8">
             <a:extLst xmlns:a="http://schemas.openxmlformats.org/drawingml/2006/main">
               <a:ext uri="{FF2B5EF4-FFF2-40B4-BE49-F238E27FC236}">
-                <a16:creationId xmlns:a16="http://schemas.microsoft.com/office/drawing/2014/main" id="{44DE0046-F45C-4216-98FC-F0611462B21E}"/>
+                <a16:creationId xmlns:a16="http://schemas.microsoft.com/office/drawing/2014/main" id="{F1DD475C-C762-4F9C-B0F2-C75427235866}"/>
               </a:ext>
             </a:extLst>
           </p:cNvPr>
@@ -1378,7 +1378,7 @@
           <p:cNvPr id="10" name="top-cape-gradient-9">
             <a:extLst xmlns:a="http://schemas.openxmlformats.org/drawingml/2006/main">
               <a:ext uri="{FF2B5EF4-FFF2-40B4-BE49-F238E27FC236}">
-                <a16:creationId xmlns:a16="http://schemas.microsoft.com/office/drawing/2014/main" id="{294A44D4-E380-440B-BD98-FC21D8A86C27}"/>
+                <a16:creationId xmlns:a16="http://schemas.microsoft.com/office/drawing/2014/main" id="{696A771A-9A63-4BD4-8D26-B886535C17B1}"/>
               </a:ext>
             </a:extLst>
           </p:cNvPr>
@@ -1411,7 +1411,7 @@
           <p:cNvPr id="11" name="top-cape-gradient-10">
             <a:extLst xmlns:a="http://schemas.openxmlformats.org/drawingml/2006/main">
               <a:ext uri="{FF2B5EF4-FFF2-40B4-BE49-F238E27FC236}">
-                <a16:creationId xmlns:a16="http://schemas.microsoft.com/office/drawing/2014/main" id="{4649A730-CF53-4E15-A992-E5DA0530C137}"/>
+                <a16:creationId xmlns:a16="http://schemas.microsoft.com/office/drawing/2014/main" id="{0E49C73F-070C-48EC-93F7-C7215C78E283}"/>
               </a:ext>
             </a:extLst>
           </p:cNvPr>
@@ -1444,7 +1444,7 @@
           <p:cNvPr id="12" name="top-cape-gradient-11">
             <a:extLst xmlns:a="http://schemas.openxmlformats.org/drawingml/2006/main">
               <a:ext uri="{FF2B5EF4-FFF2-40B4-BE49-F238E27FC236}">
-                <a16:creationId xmlns:a16="http://schemas.microsoft.com/office/drawing/2014/main" id="{4E217235-C993-4D34-BE0F-D043236FE1FD}"/>
+                <a16:creationId xmlns:a16="http://schemas.microsoft.com/office/drawing/2014/main" id="{721BC83F-AF74-44EA-BC55-EFE31F1CD342}"/>
               </a:ext>
             </a:extLst>
           </p:cNvPr>
@@ -1477,7 +1477,7 @@
           <p:cNvPr id="13" name="top-cape-gradient-12">
             <a:extLst xmlns:a="http://schemas.openxmlformats.org/drawingml/2006/main">
               <a:ext uri="{FF2B5EF4-FFF2-40B4-BE49-F238E27FC236}">
-                <a16:creationId xmlns:a16="http://schemas.microsoft.com/office/drawing/2014/main" id="{19E3990F-61D9-425A-8E28-8D72512B78B4}"/>
+                <a16:creationId xmlns:a16="http://schemas.microsoft.com/office/drawing/2014/main" id="{6EB136B3-6356-46F0-BD69-5854E814FE41}"/>
               </a:ext>
             </a:extLst>
           </p:cNvPr>
@@ -1510,7 +1510,7 @@
           <p:cNvPr id="14" name="top-cape-gradient-13">
             <a:extLst xmlns:a="http://schemas.openxmlformats.org/drawingml/2006/main">
               <a:ext uri="{FF2B5EF4-FFF2-40B4-BE49-F238E27FC236}">
-                <a16:creationId xmlns:a16="http://schemas.microsoft.com/office/drawing/2014/main" id="{06483B26-8681-4675-BE42-387AB57BF5D5}"/>
+                <a16:creationId xmlns:a16="http://schemas.microsoft.com/office/drawing/2014/main" id="{33DFB657-B605-48A6-984D-718FD0E73684}"/>
               </a:ext>
             </a:extLst>
           </p:cNvPr>
@@ -1543,7 +1543,7 @@
           <p:cNvPr id="15" name="top-cape-gradient-14">
             <a:extLst xmlns:a="http://schemas.openxmlformats.org/drawingml/2006/main">
               <a:ext uri="{FF2B5EF4-FFF2-40B4-BE49-F238E27FC236}">
-                <a16:creationId xmlns:a16="http://schemas.microsoft.com/office/drawing/2014/main" id="{B71CC7D5-25AE-4802-BEEE-2003931052CF}"/>
+                <a16:creationId xmlns:a16="http://schemas.microsoft.com/office/drawing/2014/main" id="{BF868C3C-A6AD-4C03-817F-0E68AD33C540}"/>
               </a:ext>
             </a:extLst>
           </p:cNvPr>
@@ -1576,7 +1576,7 @@
           <p:cNvPr id="16" name="top-cape-gradient-15">
             <a:extLst xmlns:a="http://schemas.openxmlformats.org/drawingml/2006/main">
               <a:ext uri="{FF2B5EF4-FFF2-40B4-BE49-F238E27FC236}">
-                <a16:creationId xmlns:a16="http://schemas.microsoft.com/office/drawing/2014/main" id="{562C7BA7-AEA8-4A9B-8406-871CC456E7DA}"/>
+                <a16:creationId xmlns:a16="http://schemas.microsoft.com/office/drawing/2014/main" id="{F297EAA5-C7B7-4A69-965E-5A86716FF07A}"/>
               </a:ext>
             </a:extLst>
           </p:cNvPr>
@@ -1609,7 +1609,7 @@
           <p:cNvPr id="17" name="top-cape-gradient-16">
             <a:extLst xmlns:a="http://schemas.openxmlformats.org/drawingml/2006/main">
               <a:ext uri="{FF2B5EF4-FFF2-40B4-BE49-F238E27FC236}">
-                <a16:creationId xmlns:a16="http://schemas.microsoft.com/office/drawing/2014/main" id="{1CEE14E2-B976-43D3-825F-2131247EC7C2}"/>
+                <a16:creationId xmlns:a16="http://schemas.microsoft.com/office/drawing/2014/main" id="{FDCCB92A-50B5-4496-8C00-B98F469A6FAB}"/>
               </a:ext>
             </a:extLst>
           </p:cNvPr>
@@ -1642,7 +1642,7 @@
           <p:cNvPr id="18" name="top-cape-gradient-17">
             <a:extLst xmlns:a="http://schemas.openxmlformats.org/drawingml/2006/main">
               <a:ext uri="{FF2B5EF4-FFF2-40B4-BE49-F238E27FC236}">
-                <a16:creationId xmlns:a16="http://schemas.microsoft.com/office/drawing/2014/main" id="{95B9B027-E225-4CA5-9402-5F64533019A2}"/>
+                <a16:creationId xmlns:a16="http://schemas.microsoft.com/office/drawing/2014/main" id="{B822BED2-46B0-441F-A16B-A76A230E4890}"/>
               </a:ext>
             </a:extLst>
           </p:cNvPr>
@@ -1675,7 +1675,7 @@
           <p:cNvPr id="19" name="top-cape-gradient-18">
             <a:extLst xmlns:a="http://schemas.openxmlformats.org/drawingml/2006/main">
               <a:ext uri="{FF2B5EF4-FFF2-40B4-BE49-F238E27FC236}">
-                <a16:creationId xmlns:a16="http://schemas.microsoft.com/office/drawing/2014/main" id="{0AB93009-CBA7-4236-B324-136B3FC515DE}"/>
+                <a16:creationId xmlns:a16="http://schemas.microsoft.com/office/drawing/2014/main" id="{25D0CC36-0AE5-42F5-8C3E-9D7815FE6735}"/>
               </a:ext>
             </a:extLst>
           </p:cNvPr>
@@ -1708,7 +1708,7 @@
           <p:cNvPr id="20" name="top-cape-gradient-19">
             <a:extLst xmlns:a="http://schemas.openxmlformats.org/drawingml/2006/main">
               <a:ext uri="{FF2B5EF4-FFF2-40B4-BE49-F238E27FC236}">
-                <a16:creationId xmlns:a16="http://schemas.microsoft.com/office/drawing/2014/main" id="{6060CFEA-07AE-4D32-AAB1-80F0A11F7420}"/>
+                <a16:creationId xmlns:a16="http://schemas.microsoft.com/office/drawing/2014/main" id="{9FF56A38-8F09-4F8B-98D0-67B03C86F7B0}"/>
               </a:ext>
             </a:extLst>
           </p:cNvPr>
@@ -1741,7 +1741,7 @@
           <p:cNvPr id="21" name="top-cape-gradient-20">
             <a:extLst xmlns:a="http://schemas.openxmlformats.org/drawingml/2006/main">
               <a:ext uri="{FF2B5EF4-FFF2-40B4-BE49-F238E27FC236}">
-                <a16:creationId xmlns:a16="http://schemas.microsoft.com/office/drawing/2014/main" id="{CC3C2000-FE1B-466D-997C-1C6A3CB8717E}"/>
+                <a16:creationId xmlns:a16="http://schemas.microsoft.com/office/drawing/2014/main" id="{A2902B86-399E-43AF-BD2A-0A7D3F7D2A96}"/>
               </a:ext>
             </a:extLst>
           </p:cNvPr>
@@ -1774,7 +1774,7 @@
           <p:cNvPr id="22" name="top-cape-gradient-21">
             <a:extLst xmlns:a="http://schemas.openxmlformats.org/drawingml/2006/main">
               <a:ext uri="{FF2B5EF4-FFF2-40B4-BE49-F238E27FC236}">
-                <a16:creationId xmlns:a16="http://schemas.microsoft.com/office/drawing/2014/main" id="{8742EB9A-AC33-4AEC-9A21-CF494403BAA5}"/>
+                <a16:creationId xmlns:a16="http://schemas.microsoft.com/office/drawing/2014/main" id="{F7E66211-6F07-4FBD-A935-8A541A03588E}"/>
               </a:ext>
             </a:extLst>
           </p:cNvPr>
@@ -1807,7 +1807,7 @@
           <p:cNvPr id="23" name="top-cape-gradient-22">
             <a:extLst xmlns:a="http://schemas.openxmlformats.org/drawingml/2006/main">
               <a:ext uri="{FF2B5EF4-FFF2-40B4-BE49-F238E27FC236}">
-                <a16:creationId xmlns:a16="http://schemas.microsoft.com/office/drawing/2014/main" id="{2D0F16AF-E857-4E6B-BB72-A6D03576ACBB}"/>
+                <a16:creationId xmlns:a16="http://schemas.microsoft.com/office/drawing/2014/main" id="{F10A9ADD-8F5F-4C1D-A420-C0B530CD395C}"/>
               </a:ext>
             </a:extLst>
           </p:cNvPr>
@@ -1840,7 +1840,7 @@
           <p:cNvPr id="24" name="top-cape-gradient-23">
             <a:extLst xmlns:a="http://schemas.openxmlformats.org/drawingml/2006/main">
               <a:ext uri="{FF2B5EF4-FFF2-40B4-BE49-F238E27FC236}">
-                <a16:creationId xmlns:a16="http://schemas.microsoft.com/office/drawing/2014/main" id="{FB4DDF85-E810-4FBE-984F-3FAF54A7F70E}"/>
+                <a16:creationId xmlns:a16="http://schemas.microsoft.com/office/drawing/2014/main" id="{97300332-9E99-4BE3-866B-AE46AEB8E02C}"/>
               </a:ext>
             </a:extLst>
           </p:cNvPr>
@@ -1873,7 +1873,7 @@
           <p:cNvPr id="25" name="top-cape-gradient-24">
             <a:extLst xmlns:a="http://schemas.openxmlformats.org/drawingml/2006/main">
               <a:ext uri="{FF2B5EF4-FFF2-40B4-BE49-F238E27FC236}">
-                <a16:creationId xmlns:a16="http://schemas.microsoft.com/office/drawing/2014/main" id="{D9F9E3E0-D17D-4CD7-A064-3A9AAAFC555C}"/>
+                <a16:creationId xmlns:a16="http://schemas.microsoft.com/office/drawing/2014/main" id="{66BCB010-D69B-4AEB-A861-CB89864833E4}"/>
               </a:ext>
             </a:extLst>
           </p:cNvPr>
@@ -1906,7 +1906,7 @@
           <p:cNvPr id="26" name="top-cape-gradient-25">
             <a:extLst xmlns:a="http://schemas.openxmlformats.org/drawingml/2006/main">
               <a:ext uri="{FF2B5EF4-FFF2-40B4-BE49-F238E27FC236}">
-                <a16:creationId xmlns:a16="http://schemas.microsoft.com/office/drawing/2014/main" id="{3DC02A6B-8F1A-49CD-BC36-86880AA84601}"/>
+                <a16:creationId xmlns:a16="http://schemas.microsoft.com/office/drawing/2014/main" id="{0EAE7806-825B-414F-A2D5-EBFC18D45C85}"/>
               </a:ext>
             </a:extLst>
           </p:cNvPr>
@@ -1939,7 +1939,7 @@
           <p:cNvPr id="27" name="top-cape-gradient-26">
             <a:extLst xmlns:a="http://schemas.openxmlformats.org/drawingml/2006/main">
               <a:ext uri="{FF2B5EF4-FFF2-40B4-BE49-F238E27FC236}">
-                <a16:creationId xmlns:a16="http://schemas.microsoft.com/office/drawing/2014/main" id="{6554BFD9-7A92-4041-AD7D-EF6D03420EB5}"/>
+                <a16:creationId xmlns:a16="http://schemas.microsoft.com/office/drawing/2014/main" id="{21A2091E-C069-448B-862B-3885AF6B6F33}"/>
               </a:ext>
             </a:extLst>
           </p:cNvPr>
@@ -1972,7 +1972,7 @@
           <p:cNvPr id="28" name="top-cape-gradient-27">
             <a:extLst xmlns:a="http://schemas.openxmlformats.org/drawingml/2006/main">
               <a:ext uri="{FF2B5EF4-FFF2-40B4-BE49-F238E27FC236}">
-                <a16:creationId xmlns:a16="http://schemas.microsoft.com/office/drawing/2014/main" id="{4B654739-4367-4F6F-8AEA-FA9F4568A229}"/>
+                <a16:creationId xmlns:a16="http://schemas.microsoft.com/office/drawing/2014/main" id="{92F3DF21-B94A-43C4-8C64-1861A98EBC8F}"/>
               </a:ext>
             </a:extLst>
           </p:cNvPr>
@@ -2005,7 +2005,7 @@
           <p:cNvPr id="29" name="top-cape-gradient-28">
             <a:extLst xmlns:a="http://schemas.openxmlformats.org/drawingml/2006/main">
               <a:ext uri="{FF2B5EF4-FFF2-40B4-BE49-F238E27FC236}">
-                <a16:creationId xmlns:a16="http://schemas.microsoft.com/office/drawing/2014/main" id="{E29A428A-9408-4AD5-8924-53806E6A2950}"/>
+                <a16:creationId xmlns:a16="http://schemas.microsoft.com/office/drawing/2014/main" id="{3A371CC9-A216-4072-B582-67F91B92A62D}"/>
               </a:ext>
             </a:extLst>
           </p:cNvPr>
@@ -2038,7 +2038,7 @@
           <p:cNvPr id="30" name="top-cape-gradient-29">
             <a:extLst xmlns:a="http://schemas.openxmlformats.org/drawingml/2006/main">
               <a:ext uri="{FF2B5EF4-FFF2-40B4-BE49-F238E27FC236}">
-                <a16:creationId xmlns:a16="http://schemas.microsoft.com/office/drawing/2014/main" id="{2A403D3A-4E19-4911-9D81-CE991887B655}"/>
+                <a16:creationId xmlns:a16="http://schemas.microsoft.com/office/drawing/2014/main" id="{3C25150D-FED0-4448-AE03-EB018F1581DA}"/>
               </a:ext>
             </a:extLst>
           </p:cNvPr>
@@ -2071,7 +2071,7 @@
           <p:cNvPr id="31" name="top-cape-gradient-30">
             <a:extLst xmlns:a="http://schemas.openxmlformats.org/drawingml/2006/main">
               <a:ext uri="{FF2B5EF4-FFF2-40B4-BE49-F238E27FC236}">
-                <a16:creationId xmlns:a16="http://schemas.microsoft.com/office/drawing/2014/main" id="{67973AE0-1E4F-4D6C-97AD-C8B7C808FC1E}"/>
+                <a16:creationId xmlns:a16="http://schemas.microsoft.com/office/drawing/2014/main" id="{12371C64-5B8E-4CCE-A12C-4A5CDE358739}"/>
               </a:ext>
             </a:extLst>
           </p:cNvPr>
@@ -2104,7 +2104,7 @@
           <p:cNvPr id="32" name="top-cape-gradient-31">
             <a:extLst xmlns:a="http://schemas.openxmlformats.org/drawingml/2006/main">
               <a:ext uri="{FF2B5EF4-FFF2-40B4-BE49-F238E27FC236}">
-                <a16:creationId xmlns:a16="http://schemas.microsoft.com/office/drawing/2014/main" id="{14A2DD61-2FFD-4305-870C-05388633BF10}"/>
+                <a16:creationId xmlns:a16="http://schemas.microsoft.com/office/drawing/2014/main" id="{08D856A6-3765-441E-A172-D97C7D0FD986}"/>
               </a:ext>
             </a:extLst>
           </p:cNvPr>
@@ -2137,7 +2137,7 @@
           <p:cNvPr id="33" name="top-cape-gradient-32">
             <a:extLst xmlns:a="http://schemas.openxmlformats.org/drawingml/2006/main">
               <a:ext uri="{FF2B5EF4-FFF2-40B4-BE49-F238E27FC236}">
-                <a16:creationId xmlns:a16="http://schemas.microsoft.com/office/drawing/2014/main" id="{0E4CDB7D-CD52-445E-A5C4-B3953456E3CA}"/>
+                <a16:creationId xmlns:a16="http://schemas.microsoft.com/office/drawing/2014/main" id="{9DF2E961-80C5-4908-9D92-00A53F0036EC}"/>
               </a:ext>
             </a:extLst>
           </p:cNvPr>
@@ -2170,7 +2170,7 @@
           <p:cNvPr id="34" name="header-cape-gradient-1">
             <a:extLst xmlns:a="http://schemas.openxmlformats.org/drawingml/2006/main">
               <a:ext uri="{FF2B5EF4-FFF2-40B4-BE49-F238E27FC236}">
-                <a16:creationId xmlns:a16="http://schemas.microsoft.com/office/drawing/2014/main" id="{E161B405-DAD7-458A-9A57-7A4136E1E390}"/>
+                <a16:creationId xmlns:a16="http://schemas.microsoft.com/office/drawing/2014/main" id="{831925E6-9421-46D0-8D91-323E1C8BC4BC}"/>
               </a:ext>
             </a:extLst>
           </p:cNvPr>
@@ -2203,7 +2203,7 @@
           <p:cNvPr id="35" name="header-cape-gradient-2">
             <a:extLst xmlns:a="http://schemas.openxmlformats.org/drawingml/2006/main">
               <a:ext uri="{FF2B5EF4-FFF2-40B4-BE49-F238E27FC236}">
-                <a16:creationId xmlns:a16="http://schemas.microsoft.com/office/drawing/2014/main" id="{A77711A4-ECCA-4840-8216-4307671C716A}"/>
+                <a16:creationId xmlns:a16="http://schemas.microsoft.com/office/drawing/2014/main" id="{4AA3330C-3703-436C-8EF3-297084783D79}"/>
               </a:ext>
             </a:extLst>
           </p:cNvPr>
@@ -2236,7 +2236,7 @@
           <p:cNvPr id="36" name="header-cape-gradient-3">
             <a:extLst xmlns:a="http://schemas.openxmlformats.org/drawingml/2006/main">
               <a:ext uri="{FF2B5EF4-FFF2-40B4-BE49-F238E27FC236}">
-                <a16:creationId xmlns:a16="http://schemas.microsoft.com/office/drawing/2014/main" id="{188CD933-8E9D-4881-A953-EADCA1015BBA}"/>
+                <a16:creationId xmlns:a16="http://schemas.microsoft.com/office/drawing/2014/main" id="{CD3ECEAB-1467-4BC9-80AE-4A066EF84BB0}"/>
               </a:ext>
             </a:extLst>
           </p:cNvPr>
@@ -2269,7 +2269,7 @@
           <p:cNvPr id="37" name="header-cape-gradient-4">
             <a:extLst xmlns:a="http://schemas.openxmlformats.org/drawingml/2006/main">
               <a:ext uri="{FF2B5EF4-FFF2-40B4-BE49-F238E27FC236}">
-                <a16:creationId xmlns:a16="http://schemas.microsoft.com/office/drawing/2014/main" id="{0D774F1C-E100-4CAC-B5A3-68ABA9D781F6}"/>
+                <a16:creationId xmlns:a16="http://schemas.microsoft.com/office/drawing/2014/main" id="{C2162618-2667-40AF-9B42-2F527C49044D}"/>
               </a:ext>
             </a:extLst>
           </p:cNvPr>
@@ -2302,7 +2302,7 @@
           <p:cNvPr id="38" name="header-cape-gradient-5">
             <a:extLst xmlns:a="http://schemas.openxmlformats.org/drawingml/2006/main">
               <a:ext uri="{FF2B5EF4-FFF2-40B4-BE49-F238E27FC236}">
-                <a16:creationId xmlns:a16="http://schemas.microsoft.com/office/drawing/2014/main" id="{81DA13B4-909B-4902-80F6-5BC732A4018A}"/>
+                <a16:creationId xmlns:a16="http://schemas.microsoft.com/office/drawing/2014/main" id="{43B27A7A-7468-4EA7-8A69-F8D8BDEE2FF8}"/>
               </a:ext>
             </a:extLst>
           </p:cNvPr>
@@ -2335,7 +2335,7 @@
           <p:cNvPr id="39" name="header-cape-gradient-6">
             <a:extLst xmlns:a="http://schemas.openxmlformats.org/drawingml/2006/main">
               <a:ext uri="{FF2B5EF4-FFF2-40B4-BE49-F238E27FC236}">
-                <a16:creationId xmlns:a16="http://schemas.microsoft.com/office/drawing/2014/main" id="{0D309B21-2335-4E3C-9BE7-430FDD165493}"/>
+                <a16:creationId xmlns:a16="http://schemas.microsoft.com/office/drawing/2014/main" id="{929FE853-A286-44A3-A724-13A970179CC5}"/>
               </a:ext>
             </a:extLst>
           </p:cNvPr>
@@ -2368,7 +2368,7 @@
           <p:cNvPr id="40" name="header-cape-gradient-7">
             <a:extLst xmlns:a="http://schemas.openxmlformats.org/drawingml/2006/main">
               <a:ext uri="{FF2B5EF4-FFF2-40B4-BE49-F238E27FC236}">
-                <a16:creationId xmlns:a16="http://schemas.microsoft.com/office/drawing/2014/main" id="{FCE18146-E43C-41E1-B517-205134BD1090}"/>
+                <a16:creationId xmlns:a16="http://schemas.microsoft.com/office/drawing/2014/main" id="{D7157310-263D-4535-A1C7-9590E61698B5}"/>
               </a:ext>
             </a:extLst>
           </p:cNvPr>
@@ -2401,7 +2401,7 @@
           <p:cNvPr id="41" name="header-cape-gradient-8">
             <a:extLst xmlns:a="http://schemas.openxmlformats.org/drawingml/2006/main">
               <a:ext uri="{FF2B5EF4-FFF2-40B4-BE49-F238E27FC236}">
-                <a16:creationId xmlns:a16="http://schemas.microsoft.com/office/drawing/2014/main" id="{86DD7191-3965-467B-A2EC-E07631CD30A6}"/>
+                <a16:creationId xmlns:a16="http://schemas.microsoft.com/office/drawing/2014/main" id="{5513A952-1F26-43F9-AF83-A818F66DD091}"/>
               </a:ext>
             </a:extLst>
           </p:cNvPr>
@@ -2434,7 +2434,7 @@
           <p:cNvPr id="42" name="header-cape-gradient-9">
             <a:extLst xmlns:a="http://schemas.openxmlformats.org/drawingml/2006/main">
               <a:ext uri="{FF2B5EF4-FFF2-40B4-BE49-F238E27FC236}">
-                <a16:creationId xmlns:a16="http://schemas.microsoft.com/office/drawing/2014/main" id="{D67EA4BD-6DBC-4F64-B43B-A933D47E6C6C}"/>
+                <a16:creationId xmlns:a16="http://schemas.microsoft.com/office/drawing/2014/main" id="{F2784989-11E2-47A5-B37A-7FECD1BD72F1}"/>
               </a:ext>
             </a:extLst>
           </p:cNvPr>
@@ -2467,7 +2467,7 @@
           <p:cNvPr id="43" name="header-cape-gradient-10">
             <a:extLst xmlns:a="http://schemas.openxmlformats.org/drawingml/2006/main">
               <a:ext uri="{FF2B5EF4-FFF2-40B4-BE49-F238E27FC236}">
-                <a16:creationId xmlns:a16="http://schemas.microsoft.com/office/drawing/2014/main" id="{52A8E573-3C5F-4D29-8B3A-F45F93619060}"/>
+                <a16:creationId xmlns:a16="http://schemas.microsoft.com/office/drawing/2014/main" id="{74D13511-1941-437A-95CD-1C1429FEC41D}"/>
               </a:ext>
             </a:extLst>
           </p:cNvPr>
@@ -2500,7 +2500,7 @@
           <p:cNvPr id="44" name="header-cape-gradient-11">
             <a:extLst xmlns:a="http://schemas.openxmlformats.org/drawingml/2006/main">
               <a:ext uri="{FF2B5EF4-FFF2-40B4-BE49-F238E27FC236}">
-                <a16:creationId xmlns:a16="http://schemas.microsoft.com/office/drawing/2014/main" id="{4A6BBF1F-8835-4827-9643-88081C9B5343}"/>
+                <a16:creationId xmlns:a16="http://schemas.microsoft.com/office/drawing/2014/main" id="{3FA2615E-2DC1-449B-AB87-DA5460B4C9E5}"/>
               </a:ext>
             </a:extLst>
           </p:cNvPr>
@@ -2533,7 +2533,7 @@
           <p:cNvPr id="45" name="header-cape-gradient-12">
             <a:extLst xmlns:a="http://schemas.openxmlformats.org/drawingml/2006/main">
               <a:ext uri="{FF2B5EF4-FFF2-40B4-BE49-F238E27FC236}">
-                <a16:creationId xmlns:a16="http://schemas.microsoft.com/office/drawing/2014/main" id="{4C3D63E1-FF04-42F3-9819-5A8913AC7D09}"/>
+                <a16:creationId xmlns:a16="http://schemas.microsoft.com/office/drawing/2014/main" id="{573EA956-C117-4F52-81A1-DAE3950B22E8}"/>
               </a:ext>
             </a:extLst>
           </p:cNvPr>
@@ -2566,7 +2566,7 @@
           <p:cNvPr id="46" name="header-cape-gradient-13">
             <a:extLst xmlns:a="http://schemas.openxmlformats.org/drawingml/2006/main">
               <a:ext uri="{FF2B5EF4-FFF2-40B4-BE49-F238E27FC236}">
-                <a16:creationId xmlns:a16="http://schemas.microsoft.com/office/drawing/2014/main" id="{AB587CE9-1ABB-44E8-A3AB-DEAE40C9521D}"/>
+                <a16:creationId xmlns:a16="http://schemas.microsoft.com/office/drawing/2014/main" id="{60D23A04-CB57-460C-9630-FB57B49C826F}"/>
               </a:ext>
             </a:extLst>
           </p:cNvPr>
@@ -2599,7 +2599,7 @@
           <p:cNvPr id="47" name="header-cape-gradient-14">
             <a:extLst xmlns:a="http://schemas.openxmlformats.org/drawingml/2006/main">
               <a:ext uri="{FF2B5EF4-FFF2-40B4-BE49-F238E27FC236}">
-                <a16:creationId xmlns:a16="http://schemas.microsoft.com/office/drawing/2014/main" id="{4C4423D2-BF0F-43B1-92D2-73D592A6B68F}"/>
+                <a16:creationId xmlns:a16="http://schemas.microsoft.com/office/drawing/2014/main" id="{E40A1576-4BD0-41AB-8658-64806076FD2B}"/>
               </a:ext>
             </a:extLst>
           </p:cNvPr>
@@ -2632,7 +2632,7 @@
           <p:cNvPr id="48" name="header-cape-gradient-15">
             <a:extLst xmlns:a="http://schemas.openxmlformats.org/drawingml/2006/main">
               <a:ext uri="{FF2B5EF4-FFF2-40B4-BE49-F238E27FC236}">
-                <a16:creationId xmlns:a16="http://schemas.microsoft.com/office/drawing/2014/main" id="{496AC4E1-DA99-4837-8944-FDDDA2C40952}"/>
+                <a16:creationId xmlns:a16="http://schemas.microsoft.com/office/drawing/2014/main" id="{01B5965B-7D49-4B4A-A67B-7B76A65D3506}"/>
               </a:ext>
             </a:extLst>
           </p:cNvPr>
@@ -2665,7 +2665,7 @@
           <p:cNvPr id="49" name="header-cape-gradient-16">
             <a:extLst xmlns:a="http://schemas.openxmlformats.org/drawingml/2006/main">
               <a:ext uri="{FF2B5EF4-FFF2-40B4-BE49-F238E27FC236}">
-                <a16:creationId xmlns:a16="http://schemas.microsoft.com/office/drawing/2014/main" id="{334E6DE7-6148-4951-9416-9609EB266ADC}"/>
+                <a16:creationId xmlns:a16="http://schemas.microsoft.com/office/drawing/2014/main" id="{3B80BE65-9263-4EB5-BED2-E567D3EDBE62}"/>
               </a:ext>
             </a:extLst>
           </p:cNvPr>
@@ -2698,7 +2698,7 @@
           <p:cNvPr id="50" name="header-cape-gradient-17">
             <a:extLst xmlns:a="http://schemas.openxmlformats.org/drawingml/2006/main">
               <a:ext uri="{FF2B5EF4-FFF2-40B4-BE49-F238E27FC236}">
-                <a16:creationId xmlns:a16="http://schemas.microsoft.com/office/drawing/2014/main" id="{57BFA031-644B-4910-AE60-4F2BA271C1A6}"/>
+                <a16:creationId xmlns:a16="http://schemas.microsoft.com/office/drawing/2014/main" id="{EC51ECFA-E7D2-4C57-8E57-E103CE2EE84D}"/>
               </a:ext>
             </a:extLst>
           </p:cNvPr>
@@ -2731,7 +2731,7 @@
           <p:cNvPr id="51" name="header-cape-gradient-18">
             <a:extLst xmlns:a="http://schemas.openxmlformats.org/drawingml/2006/main">
               <a:ext uri="{FF2B5EF4-FFF2-40B4-BE49-F238E27FC236}">
-                <a16:creationId xmlns:a16="http://schemas.microsoft.com/office/drawing/2014/main" id="{A290D23E-BFDD-442D-B6C8-529EF0074811}"/>
+                <a16:creationId xmlns:a16="http://schemas.microsoft.com/office/drawing/2014/main" id="{E4047515-0E49-4393-AC3B-D83220AEA7B0}"/>
               </a:ext>
             </a:extLst>
           </p:cNvPr>
@@ -2764,7 +2764,7 @@
           <p:cNvPr id="52" name="header-cape-gradient-19">
             <a:extLst xmlns:a="http://schemas.openxmlformats.org/drawingml/2006/main">
               <a:ext uri="{FF2B5EF4-FFF2-40B4-BE49-F238E27FC236}">
-                <a16:creationId xmlns:a16="http://schemas.microsoft.com/office/drawing/2014/main" id="{A0D3A98D-C378-4173-AD73-5DB9AF7E72AA}"/>
+                <a16:creationId xmlns:a16="http://schemas.microsoft.com/office/drawing/2014/main" id="{CB6FC755-C43D-4320-9DA9-A9F4B4E065A6}"/>
               </a:ext>
             </a:extLst>
           </p:cNvPr>
@@ -2797,7 +2797,7 @@
           <p:cNvPr id="53" name="header-cape-gradient-20">
             <a:extLst xmlns:a="http://schemas.openxmlformats.org/drawingml/2006/main">
               <a:ext uri="{FF2B5EF4-FFF2-40B4-BE49-F238E27FC236}">
-                <a16:creationId xmlns:a16="http://schemas.microsoft.com/office/drawing/2014/main" id="{6318A1CF-8616-4D58-BA9C-FD6D87A96870}"/>
+                <a16:creationId xmlns:a16="http://schemas.microsoft.com/office/drawing/2014/main" id="{4DA8D4D1-9A1A-4F02-BF3A-8088EA089EAE}"/>
               </a:ext>
             </a:extLst>
           </p:cNvPr>
@@ -2830,7 +2830,7 @@
           <p:cNvPr id="54" name="header-cape-gradient-21">
             <a:extLst xmlns:a="http://schemas.openxmlformats.org/drawingml/2006/main">
               <a:ext uri="{FF2B5EF4-FFF2-40B4-BE49-F238E27FC236}">
-                <a16:creationId xmlns:a16="http://schemas.microsoft.com/office/drawing/2014/main" id="{46C4A864-E904-44F7-8001-14BF39802DAE}"/>
+                <a16:creationId xmlns:a16="http://schemas.microsoft.com/office/drawing/2014/main" id="{78B2C59B-1621-4EA2-B694-7B467D76CCD0}"/>
               </a:ext>
             </a:extLst>
           </p:cNvPr>
@@ -2863,7 +2863,7 @@
           <p:cNvPr id="55" name="header-cape-gradient-22">
             <a:extLst xmlns:a="http://schemas.openxmlformats.org/drawingml/2006/main">
               <a:ext uri="{FF2B5EF4-FFF2-40B4-BE49-F238E27FC236}">
-                <a16:creationId xmlns:a16="http://schemas.microsoft.com/office/drawing/2014/main" id="{49EE3E4B-8C08-46DB-8704-FFE3B5550DD8}"/>
+                <a16:creationId xmlns:a16="http://schemas.microsoft.com/office/drawing/2014/main" id="{66E280A4-0224-4921-B7AC-1D07225BD2F8}"/>
               </a:ext>
             </a:extLst>
           </p:cNvPr>
@@ -2896,7 +2896,7 @@
           <p:cNvPr id="56" name="header-cape-gradient-23">
             <a:extLst xmlns:a="http://schemas.openxmlformats.org/drawingml/2006/main">
               <a:ext uri="{FF2B5EF4-FFF2-40B4-BE49-F238E27FC236}">
-                <a16:creationId xmlns:a16="http://schemas.microsoft.com/office/drawing/2014/main" id="{EED66DD2-948C-485D-A5C5-573C3E4323A5}"/>
+                <a16:creationId xmlns:a16="http://schemas.microsoft.com/office/drawing/2014/main" id="{1F231307-F656-4068-BE56-702DB9F8811D}"/>
               </a:ext>
             </a:extLst>
           </p:cNvPr>
@@ -2929,7 +2929,7 @@
           <p:cNvPr id="57" name="header-cape-gradient-24">
             <a:extLst xmlns:a="http://schemas.openxmlformats.org/drawingml/2006/main">
               <a:ext uri="{FF2B5EF4-FFF2-40B4-BE49-F238E27FC236}">
-                <a16:creationId xmlns:a16="http://schemas.microsoft.com/office/drawing/2014/main" id="{DD022F73-1ABC-46B0-A108-31D479AE2F81}"/>
+                <a16:creationId xmlns:a16="http://schemas.microsoft.com/office/drawing/2014/main" id="{979FA790-44A2-473F-962A-1D342D70530B}"/>
               </a:ext>
             </a:extLst>
           </p:cNvPr>
@@ -2962,7 +2962,7 @@
           <p:cNvPr id="58" name="header-cape-gradient-25">
             <a:extLst xmlns:a="http://schemas.openxmlformats.org/drawingml/2006/main">
               <a:ext uri="{FF2B5EF4-FFF2-40B4-BE49-F238E27FC236}">
-                <a16:creationId xmlns:a16="http://schemas.microsoft.com/office/drawing/2014/main" id="{99DF12E0-BD02-4EE9-B5FA-DE7CC4A7C484}"/>
+                <a16:creationId xmlns:a16="http://schemas.microsoft.com/office/drawing/2014/main" id="{40D0357A-10F1-4B4B-B28C-BDDA7802A38A}"/>
               </a:ext>
             </a:extLst>
           </p:cNvPr>
@@ -2995,7 +2995,7 @@
           <p:cNvPr id="59" name="header-cape-gradient-26">
             <a:extLst xmlns:a="http://schemas.openxmlformats.org/drawingml/2006/main">
               <a:ext uri="{FF2B5EF4-FFF2-40B4-BE49-F238E27FC236}">
-                <a16:creationId xmlns:a16="http://schemas.microsoft.com/office/drawing/2014/main" id="{7126889A-7393-4298-8A14-D3FC25EBBD41}"/>
+                <a16:creationId xmlns:a16="http://schemas.microsoft.com/office/drawing/2014/main" id="{4BE0EE22-E986-4D76-A4F1-0F48BAC07FB0}"/>
               </a:ext>
             </a:extLst>
           </p:cNvPr>
@@ -3028,7 +3028,7 @@
           <p:cNvPr id="60" name="header-cape-gradient-27">
             <a:extLst xmlns:a="http://schemas.openxmlformats.org/drawingml/2006/main">
               <a:ext uri="{FF2B5EF4-FFF2-40B4-BE49-F238E27FC236}">
-                <a16:creationId xmlns:a16="http://schemas.microsoft.com/office/drawing/2014/main" id="{BDA36D6A-AE9B-48D5-B8C1-A2634DAACFBF}"/>
+                <a16:creationId xmlns:a16="http://schemas.microsoft.com/office/drawing/2014/main" id="{D613DE1A-8CC9-4570-B657-C847890BFD3C}"/>
               </a:ext>
             </a:extLst>
           </p:cNvPr>
@@ -3061,7 +3061,7 @@
           <p:cNvPr id="61" name="header-cape-gradient-28">
             <a:extLst xmlns:a="http://schemas.openxmlformats.org/drawingml/2006/main">
               <a:ext uri="{FF2B5EF4-FFF2-40B4-BE49-F238E27FC236}">
-                <a16:creationId xmlns:a16="http://schemas.microsoft.com/office/drawing/2014/main" id="{F715D159-1F37-4682-A5AC-AA2FBB04FC99}"/>
+                <a16:creationId xmlns:a16="http://schemas.microsoft.com/office/drawing/2014/main" id="{AAFF434C-F016-4FB5-ACCD-EEB88205D059}"/>
               </a:ext>
             </a:extLst>
           </p:cNvPr>
@@ -3094,7 +3094,7 @@
           <p:cNvPr id="62" name="header-cape-gradient-29">
             <a:extLst xmlns:a="http://schemas.openxmlformats.org/drawingml/2006/main">
               <a:ext uri="{FF2B5EF4-FFF2-40B4-BE49-F238E27FC236}">
-                <a16:creationId xmlns:a16="http://schemas.microsoft.com/office/drawing/2014/main" id="{E4D3026C-552B-444B-8842-D9CF2F0A4E4D}"/>
+                <a16:creationId xmlns:a16="http://schemas.microsoft.com/office/drawing/2014/main" id="{45746FED-C5EB-44E1-BB50-678DF3474E79}"/>
               </a:ext>
             </a:extLst>
           </p:cNvPr>
@@ -3127,7 +3127,7 @@
           <p:cNvPr id="63" name="header-cape-gradient-30">
             <a:extLst xmlns:a="http://schemas.openxmlformats.org/drawingml/2006/main">
               <a:ext uri="{FF2B5EF4-FFF2-40B4-BE49-F238E27FC236}">
-                <a16:creationId xmlns:a16="http://schemas.microsoft.com/office/drawing/2014/main" id="{91C0E8A0-423C-4680-B5D1-4E1820256FF4}"/>
+                <a16:creationId xmlns:a16="http://schemas.microsoft.com/office/drawing/2014/main" id="{66455485-EA0E-42D5-8B29-049F7E8B87CD}"/>
               </a:ext>
             </a:extLst>
           </p:cNvPr>
@@ -3160,7 +3160,7 @@
           <p:cNvPr id="64" name="header-cape-gradient-31">
             <a:extLst xmlns:a="http://schemas.openxmlformats.org/drawingml/2006/main">
               <a:ext uri="{FF2B5EF4-FFF2-40B4-BE49-F238E27FC236}">
-                <a16:creationId xmlns:a16="http://schemas.microsoft.com/office/drawing/2014/main" id="{59949E7D-6001-4B43-AD22-84619CFEF4FE}"/>
+                <a16:creationId xmlns:a16="http://schemas.microsoft.com/office/drawing/2014/main" id="{E5D065F9-C684-4174-BAB3-23D3BAEC4877}"/>
               </a:ext>
             </a:extLst>
           </p:cNvPr>
@@ -3193,7 +3193,7 @@
           <p:cNvPr id="65" name="header-cape-gradient-32">
             <a:extLst xmlns:a="http://schemas.openxmlformats.org/drawingml/2006/main">
               <a:ext uri="{FF2B5EF4-FFF2-40B4-BE49-F238E27FC236}">
-                <a16:creationId xmlns:a16="http://schemas.microsoft.com/office/drawing/2014/main" id="{E5496AC5-842D-45A5-BC82-ECB799A9EC89}"/>
+                <a16:creationId xmlns:a16="http://schemas.microsoft.com/office/drawing/2014/main" id="{15D1C70A-ACBF-42F0-8450-3698C6131364}"/>
               </a:ext>
             </a:extLst>
           </p:cNvPr>
@@ -3226,7 +3226,7 @@
           <p:cNvPr id="66" name="poster-title">
             <a:extLst xmlns:a="http://schemas.openxmlformats.org/drawingml/2006/main">
               <a:ext uri="{FF2B5EF4-FFF2-40B4-BE49-F238E27FC236}">
-                <a16:creationId xmlns:a16="http://schemas.microsoft.com/office/drawing/2014/main" id="{C40B1615-B60F-476A-9C7F-C140D56ABE28}"/>
+                <a16:creationId xmlns:a16="http://schemas.microsoft.com/office/drawing/2014/main" id="{8219A290-9D7C-49C7-A6EE-22E405183043}"/>
               </a:ext>
             </a:extLst>
           </p:cNvPr>
@@ -3293,7 +3293,7 @@
           <p:cNvPr id="67" name="authors">
             <a:extLst xmlns:a="http://schemas.openxmlformats.org/drawingml/2006/main">
               <a:ext uri="{FF2B5EF4-FFF2-40B4-BE49-F238E27FC236}">
-                <a16:creationId xmlns:a16="http://schemas.microsoft.com/office/drawing/2014/main" id="{BDB96858-44A3-4B89-A101-2C11205B3CB5}"/>
+                <a16:creationId xmlns:a16="http://schemas.microsoft.com/office/drawing/2014/main" id="{29884C9D-0BF5-4948-86DD-FC957F06B709}"/>
               </a:ext>
             </a:extLst>
           </p:cNvPr>
@@ -3343,7 +3343,7 @@
           <p:cNvPr id="68" name="affiliations">
             <a:extLst xmlns:a="http://schemas.openxmlformats.org/drawingml/2006/main">
               <a:ext uri="{FF2B5EF4-FFF2-40B4-BE49-F238E27FC236}">
-                <a16:creationId xmlns:a16="http://schemas.microsoft.com/office/drawing/2014/main" id="{197E1E56-A115-43F6-84DE-4950564B3BCB}"/>
+                <a16:creationId xmlns:a16="http://schemas.microsoft.com/office/drawing/2014/main" id="{1F9CBB82-0016-48DD-BF03-B70F8CDB1A13}"/>
               </a:ext>
             </a:extLst>
           </p:cNvPr>
@@ -3393,7 +3393,7 @@
           <p:cNvPr id="69" name="citation">
             <a:extLst xmlns:a="http://schemas.openxmlformats.org/drawingml/2006/main">
               <a:ext uri="{FF2B5EF4-FFF2-40B4-BE49-F238E27FC236}">
-                <a16:creationId xmlns:a16="http://schemas.microsoft.com/office/drawing/2014/main" id="{E8071C09-E975-48A6-B25E-E1EBB523D607}"/>
+                <a16:creationId xmlns:a16="http://schemas.microsoft.com/office/drawing/2014/main" id="{7A8FE7DB-6E17-4CA3-AE34-36AD239929F5}"/>
               </a:ext>
             </a:extLst>
           </p:cNvPr>
@@ -3443,7 +3443,7 @@
           <p:cNvPr id="70" name="logo-slot-fictional-lab-logo">
             <a:extLst xmlns:a="http://schemas.openxmlformats.org/drawingml/2006/main">
               <a:ext uri="{FF2B5EF4-FFF2-40B4-BE49-F238E27FC236}">
-                <a16:creationId xmlns:a16="http://schemas.microsoft.com/office/drawing/2014/main" id="{9B14A6EC-FD31-4ED9-9E91-3F9F0A301041}"/>
+                <a16:creationId xmlns:a16="http://schemas.microsoft.com/office/drawing/2014/main" id="{FFCF3434-20C0-44C7-8E35-02B0D7914795}"/>
               </a:ext>
             </a:extLst>
           </p:cNvPr>
@@ -3478,7 +3478,7 @@
           <p:cNvPr id="71" name="logo-placeholder-fictional-lab-logo">
             <a:extLst xmlns:a="http://schemas.openxmlformats.org/drawingml/2006/main">
               <a:ext uri="{FF2B5EF4-FFF2-40B4-BE49-F238E27FC236}">
-                <a16:creationId xmlns:a16="http://schemas.microsoft.com/office/drawing/2014/main" id="{12D002E4-34FB-4719-8A35-D98D2A7CB794}"/>
+                <a16:creationId xmlns:a16="http://schemas.microsoft.com/office/drawing/2014/main" id="{0844A30A-F311-4D8C-ADEC-4696D2E38FCE}"/>
               </a:ext>
             </a:extLst>
           </p:cNvPr>
@@ -3528,7 +3528,7 @@
           <p:cNvPr id="72" name="header-summary">
             <a:extLst xmlns:a="http://schemas.openxmlformats.org/drawingml/2006/main">
               <a:ext uri="{FF2B5EF4-FFF2-40B4-BE49-F238E27FC236}">
-                <a16:creationId xmlns:a16="http://schemas.microsoft.com/office/drawing/2014/main" id="{DCE5B45A-57B0-40ED-8516-4589C6C1D088}"/>
+                <a16:creationId xmlns:a16="http://schemas.microsoft.com/office/drawing/2014/main" id="{DA2B4902-B9E1-4926-8CCC-D91C57DB1366}"/>
               </a:ext>
             </a:extLst>
           </p:cNvPr>
@@ -3561,7 +3561,7 @@
           <p:cNvPr id="73" name="header-metric-1-value">
             <a:extLst xmlns:a="http://schemas.openxmlformats.org/drawingml/2006/main">
               <a:ext uri="{FF2B5EF4-FFF2-40B4-BE49-F238E27FC236}">
-                <a16:creationId xmlns:a16="http://schemas.microsoft.com/office/drawing/2014/main" id="{328821F3-2233-470C-B485-0D3E76878874}"/>
+                <a16:creationId xmlns:a16="http://schemas.microsoft.com/office/drawing/2014/main" id="{E0C1F24C-85C9-4076-A074-865576D88453}"/>
               </a:ext>
             </a:extLst>
           </p:cNvPr>
@@ -3611,18 +3611,18 @@
           <p:cNvPr id="74" name="header-metric-1-label">
             <a:extLst xmlns:a="http://schemas.openxmlformats.org/drawingml/2006/main">
               <a:ext uri="{FF2B5EF4-FFF2-40B4-BE49-F238E27FC236}">
-                <a16:creationId xmlns:a16="http://schemas.microsoft.com/office/drawing/2014/main" id="{DBA0AA63-2A93-435D-BC21-3EE4EBFD2CC9}"/>
-              </a:ext>
-            </a:extLst>
-          </p:cNvPr>
-          <p:cNvSpPr>
-            <a:spLocks xmlns:a="http://schemas.openxmlformats.org/drawingml/2006/main" noGrp="1"/>
-          </p:cNvSpPr>
-          <p:nvPr/>
-        </p:nvSpPr>
-        <p:spPr>
-          <a:xfrm xmlns:a="http://schemas.openxmlformats.org/drawingml/2006/main">
-            <a:off x="23178263" y="2165941"/>
+                <a16:creationId xmlns:a16="http://schemas.microsoft.com/office/drawing/2014/main" id="{E0B357CD-6D50-4838-BC84-1F0EF334F596}"/>
+              </a:ext>
+            </a:extLst>
+          </p:cNvPr>
+          <p:cNvSpPr>
+            <a:spLocks xmlns:a="http://schemas.openxmlformats.org/drawingml/2006/main" noGrp="1"/>
+          </p:cNvSpPr>
+          <p:nvPr/>
+        </p:nvSpPr>
+        <p:spPr>
+          <a:xfrm xmlns:a="http://schemas.openxmlformats.org/drawingml/2006/main">
+            <a:off x="23178263" y="2139035"/>
             <a:ext cx="1751845" cy="591934"/>
           </a:xfrm>
           <a:prstGeom xmlns:a="http://schemas.openxmlformats.org/drawingml/2006/main" prst="rect">
@@ -3661,7 +3661,7 @@
           <p:cNvPr id="75" name="header-metric-2-value">
             <a:extLst xmlns:a="http://schemas.openxmlformats.org/drawingml/2006/main">
               <a:ext uri="{FF2B5EF4-FFF2-40B4-BE49-F238E27FC236}">
-                <a16:creationId xmlns:a16="http://schemas.microsoft.com/office/drawing/2014/main" id="{048C58EB-06C5-4A95-BE75-7CF9497791E6}"/>
+                <a16:creationId xmlns:a16="http://schemas.microsoft.com/office/drawing/2014/main" id="{9B0E1059-4B2C-4FC0-AD09-7E81277ABEE8}"/>
               </a:ext>
             </a:extLst>
           </p:cNvPr>
@@ -3711,18 +3711,18 @@
           <p:cNvPr id="76" name="header-metric-2-label">
             <a:extLst xmlns:a="http://schemas.openxmlformats.org/drawingml/2006/main">
               <a:ext uri="{FF2B5EF4-FFF2-40B4-BE49-F238E27FC236}">
-                <a16:creationId xmlns:a16="http://schemas.microsoft.com/office/drawing/2014/main" id="{120586EC-1A07-473B-9501-367B965B160D}"/>
-              </a:ext>
-            </a:extLst>
-          </p:cNvPr>
-          <p:cNvSpPr>
-            <a:spLocks xmlns:a="http://schemas.openxmlformats.org/drawingml/2006/main" noGrp="1"/>
-          </p:cNvSpPr>
-          <p:nvPr/>
-        </p:nvSpPr>
-        <p:spPr>
-          <a:xfrm xmlns:a="http://schemas.openxmlformats.org/drawingml/2006/main">
-            <a:off x="25199623" y="2165941"/>
+                <a16:creationId xmlns:a16="http://schemas.microsoft.com/office/drawing/2014/main" id="{6AC37CB6-B862-4BF4-91DF-5C4C3FE3D69E}"/>
+              </a:ext>
+            </a:extLst>
+          </p:cNvPr>
+          <p:cNvSpPr>
+            <a:spLocks xmlns:a="http://schemas.openxmlformats.org/drawingml/2006/main" noGrp="1"/>
+          </p:cNvSpPr>
+          <p:nvPr/>
+        </p:nvSpPr>
+        <p:spPr>
+          <a:xfrm xmlns:a="http://schemas.openxmlformats.org/drawingml/2006/main">
+            <a:off x="25199623" y="2139035"/>
             <a:ext cx="1751845" cy="591934"/>
           </a:xfrm>
           <a:prstGeom xmlns:a="http://schemas.openxmlformats.org/drawingml/2006/main" prst="rect">
@@ -3761,7 +3761,7 @@
           <p:cNvPr id="77" name="header-metric-3-value">
             <a:extLst xmlns:a="http://schemas.openxmlformats.org/drawingml/2006/main">
               <a:ext uri="{FF2B5EF4-FFF2-40B4-BE49-F238E27FC236}">
-                <a16:creationId xmlns:a16="http://schemas.microsoft.com/office/drawing/2014/main" id="{F2AABA2B-D9D9-44BD-B70C-4742A197448D}"/>
+                <a16:creationId xmlns:a16="http://schemas.microsoft.com/office/drawing/2014/main" id="{9F5D31D8-6233-471D-9614-67133292C3D7}"/>
               </a:ext>
             </a:extLst>
           </p:cNvPr>
@@ -3811,18 +3811,18 @@
           <p:cNvPr id="78" name="header-metric-3-label">
             <a:extLst xmlns:a="http://schemas.openxmlformats.org/drawingml/2006/main">
               <a:ext uri="{FF2B5EF4-FFF2-40B4-BE49-F238E27FC236}">
-                <a16:creationId xmlns:a16="http://schemas.microsoft.com/office/drawing/2014/main" id="{CF1BBA35-5922-432A-85A4-89E53DA5D1B0}"/>
-              </a:ext>
-            </a:extLst>
-          </p:cNvPr>
-          <p:cNvSpPr>
-            <a:spLocks xmlns:a="http://schemas.openxmlformats.org/drawingml/2006/main" noGrp="1"/>
-          </p:cNvSpPr>
-          <p:nvPr/>
-        </p:nvSpPr>
-        <p:spPr>
-          <a:xfrm xmlns:a="http://schemas.openxmlformats.org/drawingml/2006/main">
-            <a:off x="27220983" y="2165941"/>
+                <a16:creationId xmlns:a16="http://schemas.microsoft.com/office/drawing/2014/main" id="{E86A281E-E481-496C-8F4D-F1D5FBA35EC8}"/>
+              </a:ext>
+            </a:extLst>
+          </p:cNvPr>
+          <p:cNvSpPr>
+            <a:spLocks xmlns:a="http://schemas.openxmlformats.org/drawingml/2006/main" noGrp="1"/>
+          </p:cNvSpPr>
+          <p:nvPr/>
+        </p:nvSpPr>
+        <p:spPr>
+          <a:xfrm xmlns:a="http://schemas.openxmlformats.org/drawingml/2006/main">
+            <a:off x="27220983" y="2139035"/>
             <a:ext cx="1751845" cy="591934"/>
           </a:xfrm>
           <a:prstGeom xmlns:a="http://schemas.openxmlformats.org/drawingml/2006/main" prst="rect">
@@ -3861,7 +3861,7 @@
           <p:cNvPr id="79" name="question-title">
             <a:extLst xmlns:a="http://schemas.openxmlformats.org/drawingml/2006/main">
               <a:ext uri="{FF2B5EF4-FFF2-40B4-BE49-F238E27FC236}">
-                <a16:creationId xmlns:a16="http://schemas.microsoft.com/office/drawing/2014/main" id="{1AC923A5-B529-410D-ACC0-DA7DD2468DF1}"/>
+                <a16:creationId xmlns:a16="http://schemas.microsoft.com/office/drawing/2014/main" id="{75DBCD69-0E32-4CCB-A640-BFF5C2833348}"/>
               </a:ext>
             </a:extLst>
           </p:cNvPr>
@@ -3911,7 +3911,7 @@
           <p:cNvPr id="80" name="question-rule">
             <a:extLst xmlns:a="http://schemas.openxmlformats.org/drawingml/2006/main">
               <a:ext uri="{FF2B5EF4-FFF2-40B4-BE49-F238E27FC236}">
-                <a16:creationId xmlns:a16="http://schemas.microsoft.com/office/drawing/2014/main" id="{E23958F6-CAAC-4C63-8617-D633A32277F6}"/>
+                <a16:creationId xmlns:a16="http://schemas.microsoft.com/office/drawing/2014/main" id="{01922E0C-E14B-46C9-B516-909FEF80D334}"/>
               </a:ext>
             </a:extLst>
           </p:cNvPr>
@@ -3944,7 +3944,7 @@
           <p:cNvPr id="81" name="research-question">
             <a:extLst xmlns:a="http://schemas.openxmlformats.org/drawingml/2006/main">
               <a:ext uri="{FF2B5EF4-FFF2-40B4-BE49-F238E27FC236}">
-                <a16:creationId xmlns:a16="http://schemas.microsoft.com/office/drawing/2014/main" id="{362D8766-2761-42F5-9E4C-A29319CB3FCF}"/>
+                <a16:creationId xmlns:a16="http://schemas.microsoft.com/office/drawing/2014/main" id="{346A610C-CC05-4D79-9049-765FF1FB5CDE}"/>
               </a:ext>
             </a:extLst>
           </p:cNvPr>
@@ -3956,7 +3956,7 @@
         <p:spPr>
           <a:xfrm xmlns:a="http://schemas.openxmlformats.org/drawingml/2006/main">
             <a:off x="943301" y="4587490"/>
-            <a:ext cx="8220198" cy="1580734"/>
+            <a:ext cx="8220198" cy="1479836"/>
           </a:xfrm>
           <a:prstGeom xmlns:a="http://schemas.openxmlformats.org/drawingml/2006/main" prst="rect">
             <a:avLst/>
@@ -3994,7 +3994,7 @@
           <p:cNvPr id="82" name="question-evidence">
             <a:extLst xmlns:a="http://schemas.openxmlformats.org/drawingml/2006/main">
               <a:ext uri="{FF2B5EF4-FFF2-40B4-BE49-F238E27FC236}">
-                <a16:creationId xmlns:a16="http://schemas.microsoft.com/office/drawing/2014/main" id="{93BC1D2B-528C-4707-9802-5CB635FF5F05}"/>
+                <a16:creationId xmlns:a16="http://schemas.microsoft.com/office/drawing/2014/main" id="{6D123AFA-7159-4E8E-84F2-6BA02B08B670}"/>
               </a:ext>
             </a:extLst>
           </p:cNvPr>
@@ -4022,14 +4022,14 @@
           <a:lstStyle xmlns:a="http://schemas.openxmlformats.org/drawingml/2006/main"/>
           <a:p xmlns:a="http://schemas.openxmlformats.org/drawingml/2006/main">
             <a:pPr>
-              <a:defRPr sz="1324" i="1">
+              <a:defRPr sz="1324">
                 <a:solidFill>
                   <a:srgbClr val="487AA1"/>
                 </a:solidFill>
               </a:defRPr>
             </a:pPr>
             <a:r>
-              <a:rPr sz="1324" i="1">
+              <a:rPr sz="1324">
                 <a:solidFill>
                   <a:srgbClr val="487AA1"/>
                 </a:solidFill>
@@ -4044,7 +4044,7 @@
           <p:cNvPr id="83" name="pipeline-title">
             <a:extLst xmlns:a="http://schemas.openxmlformats.org/drawingml/2006/main">
               <a:ext uri="{FF2B5EF4-FFF2-40B4-BE49-F238E27FC236}">
-                <a16:creationId xmlns:a16="http://schemas.microsoft.com/office/drawing/2014/main" id="{C99BFB04-59E4-4055-B62D-39EC8B646353}"/>
+                <a16:creationId xmlns:a16="http://schemas.microsoft.com/office/drawing/2014/main" id="{2A7DAAAE-55E3-4587-852D-843706C212C9}"/>
               </a:ext>
             </a:extLst>
           </p:cNvPr>
@@ -4094,7 +4094,7 @@
           <p:cNvPr id="84" name="pipeline-rule">
             <a:extLst xmlns:a="http://schemas.openxmlformats.org/drawingml/2006/main">
               <a:ext uri="{FF2B5EF4-FFF2-40B4-BE49-F238E27FC236}">
-                <a16:creationId xmlns:a16="http://schemas.microsoft.com/office/drawing/2014/main" id="{A732B440-A4BE-4740-B766-92FC399FE96B}"/>
+                <a16:creationId xmlns:a16="http://schemas.microsoft.com/office/drawing/2014/main" id="{938A120E-16C8-427F-8C69-5331ED736775}"/>
               </a:ext>
             </a:extLst>
           </p:cNvPr>
@@ -4127,7 +4127,7 @@
           <p:cNvPr id="85" name="pipeline-1-number-bg">
             <a:extLst xmlns:a="http://schemas.openxmlformats.org/drawingml/2006/main">
               <a:ext uri="{FF2B5EF4-FFF2-40B4-BE49-F238E27FC236}">
-                <a16:creationId xmlns:a16="http://schemas.microsoft.com/office/drawing/2014/main" id="{AE251CFF-8448-4F3B-9D2E-D66DF71D48E2}"/>
+                <a16:creationId xmlns:a16="http://schemas.microsoft.com/office/drawing/2014/main" id="{2CFA6BF2-63E9-4DC1-8AE9-D5C878F9446B}"/>
               </a:ext>
             </a:extLst>
           </p:cNvPr>
@@ -4160,7 +4160,7 @@
           <p:cNvPr id="86" name="pipeline-1-number">
             <a:extLst xmlns:a="http://schemas.openxmlformats.org/drawingml/2006/main">
               <a:ext uri="{FF2B5EF4-FFF2-40B4-BE49-F238E27FC236}">
-                <a16:creationId xmlns:a16="http://schemas.microsoft.com/office/drawing/2014/main" id="{BB2DB423-06DB-4D6D-B497-83394A21A43A}"/>
+                <a16:creationId xmlns:a16="http://schemas.microsoft.com/office/drawing/2014/main" id="{D5C2FFA4-0359-4E79-8AAD-7C93FF05E5A1}"/>
               </a:ext>
             </a:extLst>
           </p:cNvPr>
@@ -4210,7 +4210,7 @@
           <p:cNvPr id="87" name="pipeline-1-text">
             <a:extLst xmlns:a="http://schemas.openxmlformats.org/drawingml/2006/main">
               <a:ext uri="{FF2B5EF4-FFF2-40B4-BE49-F238E27FC236}">
-                <a16:creationId xmlns:a16="http://schemas.microsoft.com/office/drawing/2014/main" id="{67B719EB-AF19-4593-9209-7035D1D26E8F}"/>
+                <a16:creationId xmlns:a16="http://schemas.microsoft.com/office/drawing/2014/main" id="{46DBDACA-8703-4474-B5A4-B976D0DE4AEA}"/>
               </a:ext>
             </a:extLst>
           </p:cNvPr>
@@ -4223,6 +4223,540 @@
           <a:xfrm xmlns:a="http://schemas.openxmlformats.org/drawingml/2006/main">
             <a:off x="1495807" y="7183929"/>
             <a:ext cx="7667693" cy="390138"/>
+          </a:xfrm>
+          <a:prstGeom xmlns:a="http://schemas.openxmlformats.org/drawingml/2006/main" prst="rect">
+            <a:avLst/>
+          </a:prstGeom>
+          <a:noFill xmlns:a="http://schemas.openxmlformats.org/drawingml/2006/main"/>
+          <a:ln xmlns:a="http://schemas.openxmlformats.org/drawingml/2006/main" w="0">
+            <a:noFill/>
+            <a:prstDash val="solid"/>
+          </a:ln>
+        </p:spPr>
+        <p:txBody>
+          <a:bodyPr xmlns:a="http://schemas.openxmlformats.org/drawingml/2006/main"/>
+          <a:lstStyle xmlns:a="http://schemas.openxmlformats.org/drawingml/2006/main"/>
+          <a:p xmlns:a="http://schemas.openxmlformats.org/drawingml/2006/main">
+            <a:pPr>
+              <a:defRPr sz="2013">
+                <a:solidFill>
+                  <a:srgbClr val="293F55"/>
+                </a:solidFill>
+              </a:defRPr>
+            </a:pPr>
+            <a:r>
+              <a:rPr sz="2013">
+                <a:solidFill>
+                  <a:srgbClr val="293F55"/>
+                </a:solidFill>
+              </a:rPr>
+              <a:t>Fixed seed generated 1,240 profiles</a:t>
+            </a:r>
+          </a:p>
+        </p:txBody>
+      </p:sp>
+      <p:sp>
+        <p:nvSpPr>
+          <p:cNvPr id="88" name="pipeline-2-number-bg">
+            <a:extLst xmlns:a="http://schemas.openxmlformats.org/drawingml/2006/main">
+              <a:ext uri="{FF2B5EF4-FFF2-40B4-BE49-F238E27FC236}">
+                <a16:creationId xmlns:a16="http://schemas.microsoft.com/office/drawing/2014/main" id="{50E28259-D133-4D05-A996-840A30F937C1}"/>
+              </a:ext>
+            </a:extLst>
+          </p:cNvPr>
+          <p:cNvSpPr>
+            <a:spLocks xmlns:a="http://schemas.openxmlformats.org/drawingml/2006/main" noGrp="1"/>
+          </p:cNvSpPr>
+          <p:nvPr/>
+        </p:nvSpPr>
+        <p:spPr>
+          <a:xfrm xmlns:a="http://schemas.openxmlformats.org/drawingml/2006/main">
+            <a:off x="943301" y="7695145"/>
+            <a:ext cx="417748" cy="417045"/>
+          </a:xfrm>
+          <a:prstGeom xmlns:a="http://schemas.openxmlformats.org/drawingml/2006/main" prst="roundRect">
+            <a:avLst>
+              <a:gd name="adj" fmla="val 18271"/>
+            </a:avLst>
+          </a:prstGeom>
+          <a:solidFill xmlns:a="http://schemas.openxmlformats.org/drawingml/2006/main">
+            <a:srgbClr val="E5BC6C"/>
+          </a:solidFill>
+          <a:ln xmlns:a="http://schemas.openxmlformats.org/drawingml/2006/main" w="0">
+            <a:noFill/>
+            <a:prstDash val="solid"/>
+          </a:ln>
+        </p:spPr>
+      </p:sp>
+      <p:sp>
+        <p:nvSpPr>
+          <p:cNvPr id="89" name="pipeline-2-number">
+            <a:extLst xmlns:a="http://schemas.openxmlformats.org/drawingml/2006/main">
+              <a:ext uri="{FF2B5EF4-FFF2-40B4-BE49-F238E27FC236}">
+                <a16:creationId xmlns:a16="http://schemas.microsoft.com/office/drawing/2014/main" id="{5B876DFA-2A92-44E5-8147-2B92D0318F87}"/>
+              </a:ext>
+            </a:extLst>
+          </p:cNvPr>
+          <p:cNvSpPr>
+            <a:spLocks xmlns:a="http://schemas.openxmlformats.org/drawingml/2006/main" noGrp="1"/>
+          </p:cNvSpPr>
+          <p:nvPr/>
+        </p:nvSpPr>
+        <p:spPr>
+          <a:xfrm xmlns:a="http://schemas.openxmlformats.org/drawingml/2006/main">
+            <a:off x="943301" y="7742231"/>
+            <a:ext cx="417748" cy="309420"/>
+          </a:xfrm>
+          <a:prstGeom xmlns:a="http://schemas.openxmlformats.org/drawingml/2006/main" prst="rect">
+            <a:avLst/>
+          </a:prstGeom>
+          <a:noFill xmlns:a="http://schemas.openxmlformats.org/drawingml/2006/main"/>
+          <a:ln xmlns:a="http://schemas.openxmlformats.org/drawingml/2006/main" w="0">
+            <a:noFill/>
+            <a:prstDash val="solid"/>
+          </a:ln>
+        </p:spPr>
+        <p:txBody>
+          <a:bodyPr xmlns:a="http://schemas.openxmlformats.org/drawingml/2006/main"/>
+          <a:lstStyle xmlns:a="http://schemas.openxmlformats.org/drawingml/2006/main"/>
+          <a:p xmlns:a="http://schemas.openxmlformats.org/drawingml/2006/main">
+            <a:pPr algn="ctr">
+              <a:defRPr sz="1642" b="1">
+                <a:solidFill>
+                  <a:srgbClr val="293F55"/>
+                </a:solidFill>
+              </a:defRPr>
+            </a:pPr>
+            <a:r>
+              <a:rPr sz="1642" b="1">
+                <a:solidFill>
+                  <a:srgbClr val="293F55"/>
+                </a:solidFill>
+              </a:rPr>
+              <a:t>2</a:t>
+            </a:r>
+          </a:p>
+        </p:txBody>
+      </p:sp>
+      <p:sp>
+        <p:nvSpPr>
+          <p:cNvPr id="90" name="pipeline-2-text">
+            <a:extLst xmlns:a="http://schemas.openxmlformats.org/drawingml/2006/main">
+              <a:ext uri="{FF2B5EF4-FFF2-40B4-BE49-F238E27FC236}">
+                <a16:creationId xmlns:a16="http://schemas.microsoft.com/office/drawing/2014/main" id="{5272D324-8A74-4336-B4A8-458CA4C5CB10}"/>
+              </a:ext>
+            </a:extLst>
+          </p:cNvPr>
+          <p:cNvSpPr>
+            <a:spLocks xmlns:a="http://schemas.openxmlformats.org/drawingml/2006/main" noGrp="1"/>
+          </p:cNvSpPr>
+          <p:nvPr/>
+        </p:nvSpPr>
+        <p:spPr>
+          <a:xfrm xmlns:a="http://schemas.openxmlformats.org/drawingml/2006/main">
+            <a:off x="1495807" y="7722051"/>
+            <a:ext cx="7667693" cy="390138"/>
+          </a:xfrm>
+          <a:prstGeom xmlns:a="http://schemas.openxmlformats.org/drawingml/2006/main" prst="rect">
+            <a:avLst/>
+          </a:prstGeom>
+          <a:noFill xmlns:a="http://schemas.openxmlformats.org/drawingml/2006/main"/>
+          <a:ln xmlns:a="http://schemas.openxmlformats.org/drawingml/2006/main" w="0">
+            <a:noFill/>
+            <a:prstDash val="solid"/>
+          </a:ln>
+        </p:spPr>
+        <p:txBody>
+          <a:bodyPr xmlns:a="http://schemas.openxmlformats.org/drawingml/2006/main"/>
+          <a:lstStyle xmlns:a="http://schemas.openxmlformats.org/drawingml/2006/main"/>
+          <a:p xmlns:a="http://schemas.openxmlformats.org/drawingml/2006/main">
+            <a:pPr>
+              <a:defRPr sz="2013">
+                <a:solidFill>
+                  <a:srgbClr val="293F55"/>
+                </a:solidFill>
+              </a:defRPr>
+            </a:pPr>
+            <a:r>
+              <a:rPr sz="2013">
+                <a:solidFill>
+                  <a:srgbClr val="293F55"/>
+                </a:solidFill>
+              </a:rPr>
+              <a:t>480 anonymous transcript-like features</a:t>
+            </a:r>
+          </a:p>
+        </p:txBody>
+      </p:sp>
+      <p:sp>
+        <p:nvSpPr>
+          <p:cNvPr id="91" name="pipeline-3-number-bg">
+            <a:extLst xmlns:a="http://schemas.openxmlformats.org/drawingml/2006/main">
+              <a:ext uri="{FF2B5EF4-FFF2-40B4-BE49-F238E27FC236}">
+                <a16:creationId xmlns:a16="http://schemas.microsoft.com/office/drawing/2014/main" id="{3C2036AD-B1C9-4F4C-8524-921A7DC8567D}"/>
+              </a:ext>
+            </a:extLst>
+          </p:cNvPr>
+          <p:cNvSpPr>
+            <a:spLocks xmlns:a="http://schemas.openxmlformats.org/drawingml/2006/main" noGrp="1"/>
+          </p:cNvSpPr>
+          <p:nvPr/>
+        </p:nvSpPr>
+        <p:spPr>
+          <a:xfrm xmlns:a="http://schemas.openxmlformats.org/drawingml/2006/main">
+            <a:off x="943301" y="8233267"/>
+            <a:ext cx="417748" cy="417045"/>
+          </a:xfrm>
+          <a:prstGeom xmlns:a="http://schemas.openxmlformats.org/drawingml/2006/main" prst="roundRect">
+            <a:avLst>
+              <a:gd name="adj" fmla="val 18271"/>
+            </a:avLst>
+          </a:prstGeom>
+          <a:solidFill xmlns:a="http://schemas.openxmlformats.org/drawingml/2006/main">
+            <a:srgbClr val="E5BC6C"/>
+          </a:solidFill>
+          <a:ln xmlns:a="http://schemas.openxmlformats.org/drawingml/2006/main" w="0">
+            <a:noFill/>
+            <a:prstDash val="solid"/>
+          </a:ln>
+        </p:spPr>
+      </p:sp>
+      <p:sp>
+        <p:nvSpPr>
+          <p:cNvPr id="92" name="pipeline-3-number">
+            <a:extLst xmlns:a="http://schemas.openxmlformats.org/drawingml/2006/main">
+              <a:ext uri="{FF2B5EF4-FFF2-40B4-BE49-F238E27FC236}">
+                <a16:creationId xmlns:a16="http://schemas.microsoft.com/office/drawing/2014/main" id="{588B83EE-66EA-4B3E-AC96-B98B9B0B7B8F}"/>
+              </a:ext>
+            </a:extLst>
+          </p:cNvPr>
+          <p:cNvSpPr>
+            <a:spLocks xmlns:a="http://schemas.openxmlformats.org/drawingml/2006/main" noGrp="1"/>
+          </p:cNvSpPr>
+          <p:nvPr/>
+        </p:nvSpPr>
+        <p:spPr>
+          <a:xfrm xmlns:a="http://schemas.openxmlformats.org/drawingml/2006/main">
+            <a:off x="943301" y="8280353"/>
+            <a:ext cx="417748" cy="309420"/>
+          </a:xfrm>
+          <a:prstGeom xmlns:a="http://schemas.openxmlformats.org/drawingml/2006/main" prst="rect">
+            <a:avLst/>
+          </a:prstGeom>
+          <a:noFill xmlns:a="http://schemas.openxmlformats.org/drawingml/2006/main"/>
+          <a:ln xmlns:a="http://schemas.openxmlformats.org/drawingml/2006/main" w="0">
+            <a:noFill/>
+            <a:prstDash val="solid"/>
+          </a:ln>
+        </p:spPr>
+        <p:txBody>
+          <a:bodyPr xmlns:a="http://schemas.openxmlformats.org/drawingml/2006/main"/>
+          <a:lstStyle xmlns:a="http://schemas.openxmlformats.org/drawingml/2006/main"/>
+          <a:p xmlns:a="http://schemas.openxmlformats.org/drawingml/2006/main">
+            <a:pPr algn="ctr">
+              <a:defRPr sz="1642" b="1">
+                <a:solidFill>
+                  <a:srgbClr val="293F55"/>
+                </a:solidFill>
+              </a:defRPr>
+            </a:pPr>
+            <a:r>
+              <a:rPr sz="1642" b="1">
+                <a:solidFill>
+                  <a:srgbClr val="293F55"/>
+                </a:solidFill>
+              </a:rPr>
+              <a:t>3</a:t>
+            </a:r>
+          </a:p>
+        </p:txBody>
+      </p:sp>
+      <p:sp>
+        <p:nvSpPr>
+          <p:cNvPr id="93" name="pipeline-3-text">
+            <a:extLst xmlns:a="http://schemas.openxmlformats.org/drawingml/2006/main">
+              <a:ext uri="{FF2B5EF4-FFF2-40B4-BE49-F238E27FC236}">
+                <a16:creationId xmlns:a16="http://schemas.microsoft.com/office/drawing/2014/main" id="{3FDE43BB-72C6-43C1-AF71-91562CE53E3E}"/>
+              </a:ext>
+            </a:extLst>
+          </p:cNvPr>
+          <p:cNvSpPr>
+            <a:spLocks xmlns:a="http://schemas.openxmlformats.org/drawingml/2006/main" noGrp="1"/>
+          </p:cNvSpPr>
+          <p:nvPr/>
+        </p:nvSpPr>
+        <p:spPr>
+          <a:xfrm xmlns:a="http://schemas.openxmlformats.org/drawingml/2006/main">
+            <a:off x="1495807" y="8260173"/>
+            <a:ext cx="7667693" cy="390138"/>
+          </a:xfrm>
+          <a:prstGeom xmlns:a="http://schemas.openxmlformats.org/drawingml/2006/main" prst="rect">
+            <a:avLst/>
+          </a:prstGeom>
+          <a:noFill xmlns:a="http://schemas.openxmlformats.org/drawingml/2006/main"/>
+          <a:ln xmlns:a="http://schemas.openxmlformats.org/drawingml/2006/main" w="0">
+            <a:noFill/>
+            <a:prstDash val="solid"/>
+          </a:ln>
+        </p:spPr>
+        <p:txBody>
+          <a:bodyPr xmlns:a="http://schemas.openxmlformats.org/drawingml/2006/main"/>
+          <a:lstStyle xmlns:a="http://schemas.openxmlformats.org/drawingml/2006/main"/>
+          <a:p xmlns:a="http://schemas.openxmlformats.org/drawingml/2006/main">
+            <a:pPr>
+              <a:defRPr sz="2013">
+                <a:solidFill>
+                  <a:srgbClr val="293F55"/>
+                </a:solidFill>
+              </a:defRPr>
+            </a:pPr>
+            <a:r>
+              <a:rPr sz="2013">
+                <a:solidFill>
+                  <a:srgbClr val="293F55"/>
+                </a:solidFill>
+              </a:rPr>
+              <a:t>Nested elastic-net selection</a:t>
+            </a:r>
+          </a:p>
+        </p:txBody>
+      </p:sp>
+      <p:sp>
+        <p:nvSpPr>
+          <p:cNvPr id="94" name="pipeline-4-number-bg">
+            <a:extLst xmlns:a="http://schemas.openxmlformats.org/drawingml/2006/main">
+              <a:ext uri="{FF2B5EF4-FFF2-40B4-BE49-F238E27FC236}">
+                <a16:creationId xmlns:a16="http://schemas.microsoft.com/office/drawing/2014/main" id="{59A271CA-0C78-4F28-972F-E98075E56826}"/>
+              </a:ext>
+            </a:extLst>
+          </p:cNvPr>
+          <p:cNvSpPr>
+            <a:spLocks xmlns:a="http://schemas.openxmlformats.org/drawingml/2006/main" noGrp="1"/>
+          </p:cNvSpPr>
+          <p:nvPr/>
+        </p:nvSpPr>
+        <p:spPr>
+          <a:xfrm xmlns:a="http://schemas.openxmlformats.org/drawingml/2006/main">
+            <a:off x="943301" y="8771389"/>
+            <a:ext cx="417748" cy="417045"/>
+          </a:xfrm>
+          <a:prstGeom xmlns:a="http://schemas.openxmlformats.org/drawingml/2006/main" prst="roundRect">
+            <a:avLst>
+              <a:gd name="adj" fmla="val 18271"/>
+            </a:avLst>
+          </a:prstGeom>
+          <a:solidFill xmlns:a="http://schemas.openxmlformats.org/drawingml/2006/main">
+            <a:srgbClr val="E5BC6C"/>
+          </a:solidFill>
+          <a:ln xmlns:a="http://schemas.openxmlformats.org/drawingml/2006/main" w="0">
+            <a:noFill/>
+            <a:prstDash val="solid"/>
+          </a:ln>
+        </p:spPr>
+      </p:sp>
+      <p:sp>
+        <p:nvSpPr>
+          <p:cNvPr id="95" name="pipeline-4-number">
+            <a:extLst xmlns:a="http://schemas.openxmlformats.org/drawingml/2006/main">
+              <a:ext uri="{FF2B5EF4-FFF2-40B4-BE49-F238E27FC236}">
+                <a16:creationId xmlns:a16="http://schemas.microsoft.com/office/drawing/2014/main" id="{EEE52C35-F506-45CF-BD65-375C9F254D28}"/>
+              </a:ext>
+            </a:extLst>
+          </p:cNvPr>
+          <p:cNvSpPr>
+            <a:spLocks xmlns:a="http://schemas.openxmlformats.org/drawingml/2006/main" noGrp="1"/>
+          </p:cNvSpPr>
+          <p:nvPr/>
+        </p:nvSpPr>
+        <p:spPr>
+          <a:xfrm xmlns:a="http://schemas.openxmlformats.org/drawingml/2006/main">
+            <a:off x="943301" y="8818475"/>
+            <a:ext cx="417748" cy="309420"/>
+          </a:xfrm>
+          <a:prstGeom xmlns:a="http://schemas.openxmlformats.org/drawingml/2006/main" prst="rect">
+            <a:avLst/>
+          </a:prstGeom>
+          <a:noFill xmlns:a="http://schemas.openxmlformats.org/drawingml/2006/main"/>
+          <a:ln xmlns:a="http://schemas.openxmlformats.org/drawingml/2006/main" w="0">
+            <a:noFill/>
+            <a:prstDash val="solid"/>
+          </a:ln>
+        </p:spPr>
+        <p:txBody>
+          <a:bodyPr xmlns:a="http://schemas.openxmlformats.org/drawingml/2006/main"/>
+          <a:lstStyle xmlns:a="http://schemas.openxmlformats.org/drawingml/2006/main"/>
+          <a:p xmlns:a="http://schemas.openxmlformats.org/drawingml/2006/main">
+            <a:pPr algn="ctr">
+              <a:defRPr sz="1642" b="1">
+                <a:solidFill>
+                  <a:srgbClr val="293F55"/>
+                </a:solidFill>
+              </a:defRPr>
+            </a:pPr>
+            <a:r>
+              <a:rPr sz="1642" b="1">
+                <a:solidFill>
+                  <a:srgbClr val="293F55"/>
+                </a:solidFill>
+              </a:rPr>
+              <a:t>4</a:t>
+            </a:r>
+          </a:p>
+        </p:txBody>
+      </p:sp>
+      <p:sp>
+        <p:nvSpPr>
+          <p:cNvPr id="96" name="pipeline-4-text">
+            <a:extLst xmlns:a="http://schemas.openxmlformats.org/drawingml/2006/main">
+              <a:ext uri="{FF2B5EF4-FFF2-40B4-BE49-F238E27FC236}">
+                <a16:creationId xmlns:a16="http://schemas.microsoft.com/office/drawing/2014/main" id="{1B996DD7-032C-4145-B6D5-15C2EB05797A}"/>
+              </a:ext>
+            </a:extLst>
+          </p:cNvPr>
+          <p:cNvSpPr>
+            <a:spLocks xmlns:a="http://schemas.openxmlformats.org/drawingml/2006/main" noGrp="1"/>
+          </p:cNvSpPr>
+          <p:nvPr/>
+        </p:nvSpPr>
+        <p:spPr>
+          <a:xfrm xmlns:a="http://schemas.openxmlformats.org/drawingml/2006/main">
+            <a:off x="1495807" y="8798296"/>
+            <a:ext cx="7667693" cy="390138"/>
+          </a:xfrm>
+          <a:prstGeom xmlns:a="http://schemas.openxmlformats.org/drawingml/2006/main" prst="rect">
+            <a:avLst/>
+          </a:prstGeom>
+          <a:noFill xmlns:a="http://schemas.openxmlformats.org/drawingml/2006/main"/>
+          <a:ln xmlns:a="http://schemas.openxmlformats.org/drawingml/2006/main" w="0">
+            <a:noFill/>
+            <a:prstDash val="solid"/>
+          </a:ln>
+        </p:spPr>
+        <p:txBody>
+          <a:bodyPr xmlns:a="http://schemas.openxmlformats.org/drawingml/2006/main"/>
+          <a:lstStyle xmlns:a="http://schemas.openxmlformats.org/drawingml/2006/main"/>
+          <a:p xmlns:a="http://schemas.openxmlformats.org/drawingml/2006/main">
+            <a:pPr>
+              <a:defRPr sz="2013">
+                <a:solidFill>
+                  <a:srgbClr val="293F55"/>
+                </a:solidFill>
+              </a:defRPr>
+            </a:pPr>
+            <a:r>
+              <a:rPr sz="2013">
+                <a:solidFill>
+                  <a:srgbClr val="293F55"/>
+                </a:solidFill>
+              </a:rPr>
+              <a:t>12-feature score and shift testing</a:t>
+            </a:r>
+          </a:p>
+        </p:txBody>
+      </p:sp>
+      <p:sp>
+        <p:nvSpPr>
+          <p:cNvPr id="97" name="dataset-panel">
+            <a:extLst xmlns:a="http://schemas.openxmlformats.org/drawingml/2006/main">
+              <a:ext uri="{FF2B5EF4-FFF2-40B4-BE49-F238E27FC236}">
+                <a16:creationId xmlns:a16="http://schemas.microsoft.com/office/drawing/2014/main" id="{044F145A-8411-4C2B-B8CD-621397D24738}"/>
+              </a:ext>
+            </a:extLst>
+          </p:cNvPr>
+          <p:cNvSpPr>
+            <a:spLocks xmlns:a="http://schemas.openxmlformats.org/drawingml/2006/main" noGrp="1"/>
+          </p:cNvSpPr>
+          <p:nvPr/>
+        </p:nvSpPr>
+        <p:spPr>
+          <a:xfrm xmlns:a="http://schemas.openxmlformats.org/drawingml/2006/main">
+            <a:off x="943301" y="9484401"/>
+            <a:ext cx="8220198" cy="2421549"/>
+          </a:xfrm>
+          <a:prstGeom xmlns:a="http://schemas.openxmlformats.org/drawingml/2006/main" prst="roundRect">
+            <a:avLst>
+              <a:gd name="adj" fmla="val 4720"/>
+            </a:avLst>
+          </a:prstGeom>
+          <a:solidFill xmlns:a="http://schemas.openxmlformats.org/drawingml/2006/main">
+            <a:srgbClr val="FFFFFF"/>
+          </a:solidFill>
+          <a:ln xmlns:a="http://schemas.openxmlformats.org/drawingml/2006/main" w="20180">
+            <a:solidFill>
+              <a:srgbClr val="DDE5E7"/>
+            </a:solidFill>
+            <a:prstDash val="solid"/>
+          </a:ln>
+        </p:spPr>
+      </p:sp>
+      <p:sp>
+        <p:nvSpPr>
+          <p:cNvPr id="98" name="dataset-kicker">
+            <a:extLst xmlns:a="http://schemas.openxmlformats.org/drawingml/2006/main">
+              <a:ext uri="{FF2B5EF4-FFF2-40B4-BE49-F238E27FC236}">
+                <a16:creationId xmlns:a16="http://schemas.microsoft.com/office/drawing/2014/main" id="{7C6E7341-DD32-4CFE-A12C-1D0964D7EA1A}"/>
+              </a:ext>
+            </a:extLst>
+          </p:cNvPr>
+          <p:cNvSpPr>
+            <a:spLocks xmlns:a="http://schemas.openxmlformats.org/drawingml/2006/main" noGrp="1"/>
+          </p:cNvSpPr>
+          <p:nvPr/>
+        </p:nvSpPr>
+        <p:spPr>
+          <a:xfrm xmlns:a="http://schemas.openxmlformats.org/drawingml/2006/main">
+            <a:off x="1131962" y="9686197"/>
+            <a:ext cx="3099419" cy="269061"/>
+          </a:xfrm>
+          <a:prstGeom xmlns:a="http://schemas.openxmlformats.org/drawingml/2006/main" prst="rect">
+            <a:avLst/>
+          </a:prstGeom>
+          <a:noFill xmlns:a="http://schemas.openxmlformats.org/drawingml/2006/main"/>
+          <a:ln xmlns:a="http://schemas.openxmlformats.org/drawingml/2006/main" w="0">
+            <a:noFill/>
+            <a:prstDash val="solid"/>
+          </a:ln>
+        </p:spPr>
+        <p:txBody>
+          <a:bodyPr xmlns:a="http://schemas.openxmlformats.org/drawingml/2006/main"/>
+          <a:lstStyle xmlns:a="http://schemas.openxmlformats.org/drawingml/2006/main"/>
+          <a:p xmlns:a="http://schemas.openxmlformats.org/drawingml/2006/main">
+            <a:pPr>
+              <a:defRPr sz="1536" b="1">
+                <a:solidFill>
+                  <a:srgbClr val="3E5C78"/>
+                </a:solidFill>
+              </a:defRPr>
+            </a:pPr>
+            <a:r>
+              <a:rPr sz="1536" b="1">
+                <a:solidFill>
+                  <a:srgbClr val="3E5C78"/>
+                </a:solidFill>
+              </a:rPr>
+              <a:t>FOUR SYNTHETIC COHORTS</a:t>
+            </a:r>
+          </a:p>
+        </p:txBody>
+      </p:sp>
+      <p:sp>
+        <p:nvSpPr>
+          <p:cNvPr id="99" name="dataset-lead">
+            <a:extLst xmlns:a="http://schemas.openxmlformats.org/drawingml/2006/main">
+              <a:ext uri="{FF2B5EF4-FFF2-40B4-BE49-F238E27FC236}">
+                <a16:creationId xmlns:a16="http://schemas.microsoft.com/office/drawing/2014/main" id="{0595FB7E-D117-408E-A298-F0F5E5E4BB08}"/>
+              </a:ext>
+            </a:extLst>
+          </p:cNvPr>
+          <p:cNvSpPr>
+            <a:spLocks xmlns:a="http://schemas.openxmlformats.org/drawingml/2006/main" noGrp="1"/>
+          </p:cNvSpPr>
+          <p:nvPr/>
+        </p:nvSpPr>
+        <p:spPr>
+          <a:xfrm xmlns:a="http://schemas.openxmlformats.org/drawingml/2006/main">
+            <a:off x="1131962" y="10056156"/>
+            <a:ext cx="7842877" cy="363232"/>
           </a:xfrm>
           <a:prstGeom xmlns:a="http://schemas.openxmlformats.org/drawingml/2006/main" prst="rect">
             <a:avLst/>
@@ -4250,513 +4784,29 @@
                   <a:srgbClr val="293F55"/>
                 </a:solidFill>
               </a:rPr>
-              <a:t>Fixed seed generated 1,240 profiles</a:t>
+              <a:t>Four deterministic synthetic cohorts</a:t>
             </a:r>
           </a:p>
         </p:txBody>
       </p:sp>
       <p:sp>
         <p:nvSpPr>
-          <p:cNvPr id="88" name="pipeline-2-number-bg">
-            <a:extLst xmlns:a="http://schemas.openxmlformats.org/drawingml/2006/main">
-              <a:ext uri="{FF2B5EF4-FFF2-40B4-BE49-F238E27FC236}">
-                <a16:creationId xmlns:a16="http://schemas.microsoft.com/office/drawing/2014/main" id="{6E3E3187-45F6-4E4D-983D-6158D61D5119}"/>
-              </a:ext>
-            </a:extLst>
-          </p:cNvPr>
-          <p:cNvSpPr>
-            <a:spLocks xmlns:a="http://schemas.openxmlformats.org/drawingml/2006/main" noGrp="1"/>
-          </p:cNvSpPr>
-          <p:nvPr/>
-        </p:nvSpPr>
-        <p:spPr>
-          <a:xfrm xmlns:a="http://schemas.openxmlformats.org/drawingml/2006/main">
-            <a:off x="943301" y="7695145"/>
-            <a:ext cx="417748" cy="417045"/>
-          </a:xfrm>
-          <a:prstGeom xmlns:a="http://schemas.openxmlformats.org/drawingml/2006/main" prst="roundRect">
-            <a:avLst>
-              <a:gd name="adj" fmla="val 18271"/>
-            </a:avLst>
-          </a:prstGeom>
-          <a:solidFill xmlns:a="http://schemas.openxmlformats.org/drawingml/2006/main">
-            <a:srgbClr val="E5BC6C"/>
-          </a:solidFill>
-          <a:ln xmlns:a="http://schemas.openxmlformats.org/drawingml/2006/main" w="0">
-            <a:noFill/>
-            <a:prstDash val="solid"/>
-          </a:ln>
-        </p:spPr>
-      </p:sp>
-      <p:sp>
-        <p:nvSpPr>
-          <p:cNvPr id="89" name="pipeline-2-number">
-            <a:extLst xmlns:a="http://schemas.openxmlformats.org/drawingml/2006/main">
-              <a:ext uri="{FF2B5EF4-FFF2-40B4-BE49-F238E27FC236}">
-                <a16:creationId xmlns:a16="http://schemas.microsoft.com/office/drawing/2014/main" id="{B7775F1E-3FE3-473A-8DFF-B7FF9E40FC9D}"/>
-              </a:ext>
-            </a:extLst>
-          </p:cNvPr>
-          <p:cNvSpPr>
-            <a:spLocks xmlns:a="http://schemas.openxmlformats.org/drawingml/2006/main" noGrp="1"/>
-          </p:cNvSpPr>
-          <p:nvPr/>
-        </p:nvSpPr>
-        <p:spPr>
-          <a:xfrm xmlns:a="http://schemas.openxmlformats.org/drawingml/2006/main">
-            <a:off x="943301" y="7742231"/>
-            <a:ext cx="417748" cy="309420"/>
-          </a:xfrm>
-          <a:prstGeom xmlns:a="http://schemas.openxmlformats.org/drawingml/2006/main" prst="rect">
-            <a:avLst/>
-          </a:prstGeom>
-          <a:noFill xmlns:a="http://schemas.openxmlformats.org/drawingml/2006/main"/>
-          <a:ln xmlns:a="http://schemas.openxmlformats.org/drawingml/2006/main" w="0">
-            <a:noFill/>
-            <a:prstDash val="solid"/>
-          </a:ln>
-        </p:spPr>
-        <p:txBody>
-          <a:bodyPr xmlns:a="http://schemas.openxmlformats.org/drawingml/2006/main"/>
-          <a:lstStyle xmlns:a="http://schemas.openxmlformats.org/drawingml/2006/main"/>
-          <a:p xmlns:a="http://schemas.openxmlformats.org/drawingml/2006/main">
-            <a:pPr algn="ctr">
-              <a:defRPr sz="1642" b="1">
-                <a:solidFill>
-                  <a:srgbClr val="293F55"/>
-                </a:solidFill>
-              </a:defRPr>
-            </a:pPr>
-            <a:r>
-              <a:rPr sz="1642" b="1">
-                <a:solidFill>
-                  <a:srgbClr val="293F55"/>
-                </a:solidFill>
-              </a:rPr>
-              <a:t>2</a:t>
-            </a:r>
-          </a:p>
-        </p:txBody>
-      </p:sp>
-      <p:sp>
-        <p:nvSpPr>
-          <p:cNvPr id="90" name="pipeline-2-text">
-            <a:extLst xmlns:a="http://schemas.openxmlformats.org/drawingml/2006/main">
-              <a:ext uri="{FF2B5EF4-FFF2-40B4-BE49-F238E27FC236}">
-                <a16:creationId xmlns:a16="http://schemas.microsoft.com/office/drawing/2014/main" id="{2AD8622D-7208-4106-ACEF-39F3843A0ABB}"/>
-              </a:ext>
-            </a:extLst>
-          </p:cNvPr>
-          <p:cNvSpPr>
-            <a:spLocks xmlns:a="http://schemas.openxmlformats.org/drawingml/2006/main" noGrp="1"/>
-          </p:cNvSpPr>
-          <p:nvPr/>
-        </p:nvSpPr>
-        <p:spPr>
-          <a:xfrm xmlns:a="http://schemas.openxmlformats.org/drawingml/2006/main">
-            <a:off x="1495807" y="7722051"/>
-            <a:ext cx="7667693" cy="390138"/>
-          </a:xfrm>
-          <a:prstGeom xmlns:a="http://schemas.openxmlformats.org/drawingml/2006/main" prst="rect">
-            <a:avLst/>
-          </a:prstGeom>
-          <a:noFill xmlns:a="http://schemas.openxmlformats.org/drawingml/2006/main"/>
-          <a:ln xmlns:a="http://schemas.openxmlformats.org/drawingml/2006/main" w="0">
-            <a:noFill/>
-            <a:prstDash val="solid"/>
-          </a:ln>
-        </p:spPr>
-        <p:txBody>
-          <a:bodyPr xmlns:a="http://schemas.openxmlformats.org/drawingml/2006/main"/>
-          <a:lstStyle xmlns:a="http://schemas.openxmlformats.org/drawingml/2006/main"/>
-          <a:p xmlns:a="http://schemas.openxmlformats.org/drawingml/2006/main">
-            <a:pPr>
-              <a:defRPr sz="2013" b="1">
-                <a:solidFill>
-                  <a:srgbClr val="293F55"/>
-                </a:solidFill>
-              </a:defRPr>
-            </a:pPr>
-            <a:r>
-              <a:rPr sz="2013" b="1">
-                <a:solidFill>
-                  <a:srgbClr val="293F55"/>
-                </a:solidFill>
-              </a:rPr>
-              <a:t>480 anonymous transcript-like features</a:t>
-            </a:r>
-          </a:p>
-        </p:txBody>
-      </p:sp>
-      <p:sp>
-        <p:nvSpPr>
-          <p:cNvPr id="91" name="pipeline-3-number-bg">
-            <a:extLst xmlns:a="http://schemas.openxmlformats.org/drawingml/2006/main">
-              <a:ext uri="{FF2B5EF4-FFF2-40B4-BE49-F238E27FC236}">
-                <a16:creationId xmlns:a16="http://schemas.microsoft.com/office/drawing/2014/main" id="{057D92CF-8C57-46F7-8FB0-B672D1F9E2CE}"/>
-              </a:ext>
-            </a:extLst>
-          </p:cNvPr>
-          <p:cNvSpPr>
-            <a:spLocks xmlns:a="http://schemas.openxmlformats.org/drawingml/2006/main" noGrp="1"/>
-          </p:cNvSpPr>
-          <p:nvPr/>
-        </p:nvSpPr>
-        <p:spPr>
-          <a:xfrm xmlns:a="http://schemas.openxmlformats.org/drawingml/2006/main">
-            <a:off x="943301" y="8233267"/>
-            <a:ext cx="417748" cy="417045"/>
-          </a:xfrm>
-          <a:prstGeom xmlns:a="http://schemas.openxmlformats.org/drawingml/2006/main" prst="roundRect">
-            <a:avLst>
-              <a:gd name="adj" fmla="val 18271"/>
-            </a:avLst>
-          </a:prstGeom>
-          <a:solidFill xmlns:a="http://schemas.openxmlformats.org/drawingml/2006/main">
-            <a:srgbClr val="E5BC6C"/>
-          </a:solidFill>
-          <a:ln xmlns:a="http://schemas.openxmlformats.org/drawingml/2006/main" w="0">
-            <a:noFill/>
-            <a:prstDash val="solid"/>
-          </a:ln>
-        </p:spPr>
-      </p:sp>
-      <p:sp>
-        <p:nvSpPr>
-          <p:cNvPr id="92" name="pipeline-3-number">
-            <a:extLst xmlns:a="http://schemas.openxmlformats.org/drawingml/2006/main">
-              <a:ext uri="{FF2B5EF4-FFF2-40B4-BE49-F238E27FC236}">
-                <a16:creationId xmlns:a16="http://schemas.microsoft.com/office/drawing/2014/main" id="{FAAFBA3C-5AE7-4C42-9E6D-D1F82FE686FF}"/>
-              </a:ext>
-            </a:extLst>
-          </p:cNvPr>
-          <p:cNvSpPr>
-            <a:spLocks xmlns:a="http://schemas.openxmlformats.org/drawingml/2006/main" noGrp="1"/>
-          </p:cNvSpPr>
-          <p:nvPr/>
-        </p:nvSpPr>
-        <p:spPr>
-          <a:xfrm xmlns:a="http://schemas.openxmlformats.org/drawingml/2006/main">
-            <a:off x="943301" y="8280353"/>
-            <a:ext cx="417748" cy="309420"/>
-          </a:xfrm>
-          <a:prstGeom xmlns:a="http://schemas.openxmlformats.org/drawingml/2006/main" prst="rect">
-            <a:avLst/>
-          </a:prstGeom>
-          <a:noFill xmlns:a="http://schemas.openxmlformats.org/drawingml/2006/main"/>
-          <a:ln xmlns:a="http://schemas.openxmlformats.org/drawingml/2006/main" w="0">
-            <a:noFill/>
-            <a:prstDash val="solid"/>
-          </a:ln>
-        </p:spPr>
-        <p:txBody>
-          <a:bodyPr xmlns:a="http://schemas.openxmlformats.org/drawingml/2006/main"/>
-          <a:lstStyle xmlns:a="http://schemas.openxmlformats.org/drawingml/2006/main"/>
-          <a:p xmlns:a="http://schemas.openxmlformats.org/drawingml/2006/main">
-            <a:pPr algn="ctr">
-              <a:defRPr sz="1642" b="1">
-                <a:solidFill>
-                  <a:srgbClr val="293F55"/>
-                </a:solidFill>
-              </a:defRPr>
-            </a:pPr>
-            <a:r>
-              <a:rPr sz="1642" b="1">
-                <a:solidFill>
-                  <a:srgbClr val="293F55"/>
-                </a:solidFill>
-              </a:rPr>
-              <a:t>3</a:t>
-            </a:r>
-          </a:p>
-        </p:txBody>
-      </p:sp>
-      <p:sp>
-        <p:nvSpPr>
-          <p:cNvPr id="93" name="pipeline-3-text">
-            <a:extLst xmlns:a="http://schemas.openxmlformats.org/drawingml/2006/main">
-              <a:ext uri="{FF2B5EF4-FFF2-40B4-BE49-F238E27FC236}">
-                <a16:creationId xmlns:a16="http://schemas.microsoft.com/office/drawing/2014/main" id="{A9047EF2-56D4-4877-A19F-3F8A73749EE4}"/>
-              </a:ext>
-            </a:extLst>
-          </p:cNvPr>
-          <p:cNvSpPr>
-            <a:spLocks xmlns:a="http://schemas.openxmlformats.org/drawingml/2006/main" noGrp="1"/>
-          </p:cNvSpPr>
-          <p:nvPr/>
-        </p:nvSpPr>
-        <p:spPr>
-          <a:xfrm xmlns:a="http://schemas.openxmlformats.org/drawingml/2006/main">
-            <a:off x="1495807" y="8260173"/>
-            <a:ext cx="7667693" cy="390138"/>
-          </a:xfrm>
-          <a:prstGeom xmlns:a="http://schemas.openxmlformats.org/drawingml/2006/main" prst="rect">
-            <a:avLst/>
-          </a:prstGeom>
-          <a:noFill xmlns:a="http://schemas.openxmlformats.org/drawingml/2006/main"/>
-          <a:ln xmlns:a="http://schemas.openxmlformats.org/drawingml/2006/main" w="0">
-            <a:noFill/>
-            <a:prstDash val="solid"/>
-          </a:ln>
-        </p:spPr>
-        <p:txBody>
-          <a:bodyPr xmlns:a="http://schemas.openxmlformats.org/drawingml/2006/main"/>
-          <a:lstStyle xmlns:a="http://schemas.openxmlformats.org/drawingml/2006/main"/>
-          <a:p xmlns:a="http://schemas.openxmlformats.org/drawingml/2006/main">
-            <a:pPr>
-              <a:defRPr sz="2013" b="1">
-                <a:solidFill>
-                  <a:srgbClr val="293F55"/>
-                </a:solidFill>
-              </a:defRPr>
-            </a:pPr>
-            <a:r>
-              <a:rPr sz="2013" b="1">
-                <a:solidFill>
-                  <a:srgbClr val="293F55"/>
-                </a:solidFill>
-              </a:rPr>
-              <a:t>Nested elastic-net selection</a:t>
-            </a:r>
-          </a:p>
-        </p:txBody>
-      </p:sp>
-      <p:sp>
-        <p:nvSpPr>
-          <p:cNvPr id="94" name="pipeline-4-number-bg">
-            <a:extLst xmlns:a="http://schemas.openxmlformats.org/drawingml/2006/main">
-              <a:ext uri="{FF2B5EF4-FFF2-40B4-BE49-F238E27FC236}">
-                <a16:creationId xmlns:a16="http://schemas.microsoft.com/office/drawing/2014/main" id="{D879B8DE-4BE4-4796-9C10-ADA4E540EB91}"/>
-              </a:ext>
-            </a:extLst>
-          </p:cNvPr>
-          <p:cNvSpPr>
-            <a:spLocks xmlns:a="http://schemas.openxmlformats.org/drawingml/2006/main" noGrp="1"/>
-          </p:cNvSpPr>
-          <p:nvPr/>
-        </p:nvSpPr>
-        <p:spPr>
-          <a:xfrm xmlns:a="http://schemas.openxmlformats.org/drawingml/2006/main">
-            <a:off x="943301" y="8771389"/>
-            <a:ext cx="417748" cy="417045"/>
-          </a:xfrm>
-          <a:prstGeom xmlns:a="http://schemas.openxmlformats.org/drawingml/2006/main" prst="roundRect">
-            <a:avLst>
-              <a:gd name="adj" fmla="val 18271"/>
-            </a:avLst>
-          </a:prstGeom>
-          <a:solidFill xmlns:a="http://schemas.openxmlformats.org/drawingml/2006/main">
-            <a:srgbClr val="E5BC6C"/>
-          </a:solidFill>
-          <a:ln xmlns:a="http://schemas.openxmlformats.org/drawingml/2006/main" w="0">
-            <a:noFill/>
-            <a:prstDash val="solid"/>
-          </a:ln>
-        </p:spPr>
-      </p:sp>
-      <p:sp>
-        <p:nvSpPr>
-          <p:cNvPr id="95" name="pipeline-4-number">
-            <a:extLst xmlns:a="http://schemas.openxmlformats.org/drawingml/2006/main">
-              <a:ext uri="{FF2B5EF4-FFF2-40B4-BE49-F238E27FC236}">
-                <a16:creationId xmlns:a16="http://schemas.microsoft.com/office/drawing/2014/main" id="{26F73394-E7ED-42F2-871A-352AF8A32571}"/>
-              </a:ext>
-            </a:extLst>
-          </p:cNvPr>
-          <p:cNvSpPr>
-            <a:spLocks xmlns:a="http://schemas.openxmlformats.org/drawingml/2006/main" noGrp="1"/>
-          </p:cNvSpPr>
-          <p:nvPr/>
-        </p:nvSpPr>
-        <p:spPr>
-          <a:xfrm xmlns:a="http://schemas.openxmlformats.org/drawingml/2006/main">
-            <a:off x="943301" y="8818475"/>
-            <a:ext cx="417748" cy="309420"/>
-          </a:xfrm>
-          <a:prstGeom xmlns:a="http://schemas.openxmlformats.org/drawingml/2006/main" prst="rect">
-            <a:avLst/>
-          </a:prstGeom>
-          <a:noFill xmlns:a="http://schemas.openxmlformats.org/drawingml/2006/main"/>
-          <a:ln xmlns:a="http://schemas.openxmlformats.org/drawingml/2006/main" w="0">
-            <a:noFill/>
-            <a:prstDash val="solid"/>
-          </a:ln>
-        </p:spPr>
-        <p:txBody>
-          <a:bodyPr xmlns:a="http://schemas.openxmlformats.org/drawingml/2006/main"/>
-          <a:lstStyle xmlns:a="http://schemas.openxmlformats.org/drawingml/2006/main"/>
-          <a:p xmlns:a="http://schemas.openxmlformats.org/drawingml/2006/main">
-            <a:pPr algn="ctr">
-              <a:defRPr sz="1642" b="1">
-                <a:solidFill>
-                  <a:srgbClr val="293F55"/>
-                </a:solidFill>
-              </a:defRPr>
-            </a:pPr>
-            <a:r>
-              <a:rPr sz="1642" b="1">
-                <a:solidFill>
-                  <a:srgbClr val="293F55"/>
-                </a:solidFill>
-              </a:rPr>
-              <a:t>4</a:t>
-            </a:r>
-          </a:p>
-        </p:txBody>
-      </p:sp>
-      <p:sp>
-        <p:nvSpPr>
-          <p:cNvPr id="96" name="pipeline-4-text">
-            <a:extLst xmlns:a="http://schemas.openxmlformats.org/drawingml/2006/main">
-              <a:ext uri="{FF2B5EF4-FFF2-40B4-BE49-F238E27FC236}">
-                <a16:creationId xmlns:a16="http://schemas.microsoft.com/office/drawing/2014/main" id="{2A8CB7F5-0472-4F5F-8237-C1ADB63BB97A}"/>
-              </a:ext>
-            </a:extLst>
-          </p:cNvPr>
-          <p:cNvSpPr>
-            <a:spLocks xmlns:a="http://schemas.openxmlformats.org/drawingml/2006/main" noGrp="1"/>
-          </p:cNvSpPr>
-          <p:nvPr/>
-        </p:nvSpPr>
-        <p:spPr>
-          <a:xfrm xmlns:a="http://schemas.openxmlformats.org/drawingml/2006/main">
-            <a:off x="1495807" y="8798296"/>
-            <a:ext cx="7667693" cy="390138"/>
-          </a:xfrm>
-          <a:prstGeom xmlns:a="http://schemas.openxmlformats.org/drawingml/2006/main" prst="rect">
-            <a:avLst/>
-          </a:prstGeom>
-          <a:noFill xmlns:a="http://schemas.openxmlformats.org/drawingml/2006/main"/>
-          <a:ln xmlns:a="http://schemas.openxmlformats.org/drawingml/2006/main" w="0">
-            <a:noFill/>
-            <a:prstDash val="solid"/>
-          </a:ln>
-        </p:spPr>
-        <p:txBody>
-          <a:bodyPr xmlns:a="http://schemas.openxmlformats.org/drawingml/2006/main"/>
-          <a:lstStyle xmlns:a="http://schemas.openxmlformats.org/drawingml/2006/main"/>
-          <a:p xmlns:a="http://schemas.openxmlformats.org/drawingml/2006/main">
-            <a:pPr>
-              <a:defRPr sz="2013" b="1">
-                <a:solidFill>
-                  <a:srgbClr val="293F55"/>
-                </a:solidFill>
-              </a:defRPr>
-            </a:pPr>
-            <a:r>
-              <a:rPr sz="2013" b="1">
-                <a:solidFill>
-                  <a:srgbClr val="293F55"/>
-                </a:solidFill>
-              </a:rPr>
-              <a:t>12-feature score and shift testing</a:t>
-            </a:r>
-          </a:p>
-        </p:txBody>
-      </p:sp>
-      <p:sp>
-        <p:nvSpPr>
-          <p:cNvPr id="97" name="dataset-panel">
-            <a:extLst xmlns:a="http://schemas.openxmlformats.org/drawingml/2006/main">
-              <a:ext uri="{FF2B5EF4-FFF2-40B4-BE49-F238E27FC236}">
-                <a16:creationId xmlns:a16="http://schemas.microsoft.com/office/drawing/2014/main" id="{ADE90F39-CB2F-4FFA-96FE-85274B7014EA}"/>
-              </a:ext>
-            </a:extLst>
-          </p:cNvPr>
-          <p:cNvSpPr>
-            <a:spLocks xmlns:a="http://schemas.openxmlformats.org/drawingml/2006/main" noGrp="1"/>
-          </p:cNvSpPr>
-          <p:nvPr/>
-        </p:nvSpPr>
-        <p:spPr>
-          <a:xfrm xmlns:a="http://schemas.openxmlformats.org/drawingml/2006/main">
-            <a:off x="943301" y="9484401"/>
-            <a:ext cx="8220198" cy="2421549"/>
-          </a:xfrm>
-          <a:prstGeom xmlns:a="http://schemas.openxmlformats.org/drawingml/2006/main" prst="roundRect">
-            <a:avLst>
-              <a:gd name="adj" fmla="val 4720"/>
-            </a:avLst>
-          </a:prstGeom>
-          <a:solidFill xmlns:a="http://schemas.openxmlformats.org/drawingml/2006/main">
-            <a:srgbClr val="FFFFFF"/>
-          </a:solidFill>
-          <a:ln xmlns:a="http://schemas.openxmlformats.org/drawingml/2006/main" w="20180">
-            <a:solidFill>
-              <a:srgbClr val="DDE5E7"/>
-            </a:solidFill>
-            <a:prstDash val="solid"/>
-          </a:ln>
-        </p:spPr>
-      </p:sp>
-      <p:sp>
-        <p:nvSpPr>
-          <p:cNvPr id="98" name="dataset-kicker">
-            <a:extLst xmlns:a="http://schemas.openxmlformats.org/drawingml/2006/main">
-              <a:ext uri="{FF2B5EF4-FFF2-40B4-BE49-F238E27FC236}">
-                <a16:creationId xmlns:a16="http://schemas.microsoft.com/office/drawing/2014/main" id="{52A65067-36BC-4A67-B403-31366066A2D2}"/>
-              </a:ext>
-            </a:extLst>
-          </p:cNvPr>
-          <p:cNvSpPr>
-            <a:spLocks xmlns:a="http://schemas.openxmlformats.org/drawingml/2006/main" noGrp="1"/>
-          </p:cNvSpPr>
-          <p:nvPr/>
-        </p:nvSpPr>
-        <p:spPr>
-          <a:xfrm xmlns:a="http://schemas.openxmlformats.org/drawingml/2006/main">
-            <a:off x="1131962" y="9686197"/>
-            <a:ext cx="3099419" cy="269061"/>
-          </a:xfrm>
-          <a:prstGeom xmlns:a="http://schemas.openxmlformats.org/drawingml/2006/main" prst="rect">
-            <a:avLst/>
-          </a:prstGeom>
-          <a:noFill xmlns:a="http://schemas.openxmlformats.org/drawingml/2006/main"/>
-          <a:ln xmlns:a="http://schemas.openxmlformats.org/drawingml/2006/main" w="0">
-            <a:noFill/>
-            <a:prstDash val="solid"/>
-          </a:ln>
-        </p:spPr>
-        <p:txBody>
-          <a:bodyPr xmlns:a="http://schemas.openxmlformats.org/drawingml/2006/main"/>
-          <a:lstStyle xmlns:a="http://schemas.openxmlformats.org/drawingml/2006/main"/>
-          <a:p xmlns:a="http://schemas.openxmlformats.org/drawingml/2006/main">
-            <a:pPr>
-              <a:defRPr sz="1536" b="1">
-                <a:solidFill>
-                  <a:srgbClr val="3E5C78"/>
-                </a:solidFill>
-              </a:defRPr>
-            </a:pPr>
-            <a:r>
-              <a:rPr sz="1536" b="1">
-                <a:solidFill>
-                  <a:srgbClr val="3E5C78"/>
-                </a:solidFill>
-              </a:rPr>
-              <a:t>FOUR SYNTHETIC COHORTS</a:t>
-            </a:r>
-          </a:p>
-        </p:txBody>
-      </p:sp>
-      <p:sp>
-        <p:nvSpPr>
-          <p:cNvPr id="99" name="datasets">
-            <a:extLst xmlns:a="http://schemas.openxmlformats.org/drawingml/2006/main">
-              <a:ext uri="{FF2B5EF4-FFF2-40B4-BE49-F238E27FC236}">
-                <a16:creationId xmlns:a16="http://schemas.microsoft.com/office/drawing/2014/main" id="{AF10D96F-E07C-4235-B133-CF083DCB3A61}"/>
-              </a:ext>
-            </a:extLst>
-          </p:cNvPr>
-          <p:cNvSpPr>
-            <a:spLocks xmlns:a="http://schemas.openxmlformats.org/drawingml/2006/main" noGrp="1"/>
-          </p:cNvSpPr>
-          <p:nvPr/>
-        </p:nvSpPr>
-        <p:spPr>
-          <a:xfrm xmlns:a="http://schemas.openxmlformats.org/drawingml/2006/main">
-            <a:off x="1131962" y="10056156"/>
-            <a:ext cx="7842877" cy="1547101"/>
+          <p:cNvPr id="100" name="datasets">
+            <a:extLst xmlns:a="http://schemas.openxmlformats.org/drawingml/2006/main">
+              <a:ext uri="{FF2B5EF4-FFF2-40B4-BE49-F238E27FC236}">
+                <a16:creationId xmlns:a16="http://schemas.microsoft.com/office/drawing/2014/main" id="{0E7B3CFA-2B3F-4E85-9AEA-1676E34260B4}"/>
+              </a:ext>
+            </a:extLst>
+          </p:cNvPr>
+          <p:cNvSpPr>
+            <a:spLocks xmlns:a="http://schemas.openxmlformats.org/drawingml/2006/main" noGrp="1"/>
+          </p:cNvSpPr>
+          <p:nvPr/>
+        </p:nvSpPr>
+        <p:spPr>
+          <a:xfrm xmlns:a="http://schemas.openxmlformats.org/drawingml/2006/main">
+            <a:off x="1131962" y="10466474"/>
+            <a:ext cx="7842877" cy="1042611"/>
           </a:xfrm>
           <a:prstGeom xmlns:a="http://schemas.openxmlformats.org/drawingml/2006/main" prst="rect">
             <a:avLst/>
@@ -4784,7 +4834,7 @@
                   <a:srgbClr val="293F55"/>
                 </a:solidFill>
               </a:rPr>
-              <a:t>Discovery n=620 · Internal validation n=310</a:t>
+              <a:t>• Discovery n=620 · Internal validation n=310</a:t>
             </a:r>
           </a:p>
           <a:p xmlns:a="http://schemas.openxmlformats.org/drawingml/2006/main">
@@ -4801,7 +4851,7 @@
                   <a:srgbClr val="293F55"/>
                 </a:solidFill>
               </a:rPr>
-              <a:t>External simulation A n=186 · External simulation B n=124</a:t>
+              <a:t>• External A n=186 · External B n=124</a:t>
             </a:r>
           </a:p>
           <a:p xmlns:a="http://schemas.openxmlformats.org/drawingml/2006/main">
@@ -4818,17 +4868,17 @@
                   <a:srgbClr val="293F55"/>
                 </a:solidFill>
               </a:rPr>
-              <a:t>All values are authored fixtures; no participant, specimen, institution, registry or external dataset exists.</a:t>
+              <a:t>• No participants, specimens or external datasets</a:t>
             </a:r>
           </a:p>
         </p:txBody>
       </p:sp>
       <p:sp>
         <p:nvSpPr>
-          <p:cNvPr id="100" name="dataset-evidence">
-            <a:extLst xmlns:a="http://schemas.openxmlformats.org/drawingml/2006/main">
-              <a:ext uri="{FF2B5EF4-FFF2-40B4-BE49-F238E27FC236}">
-                <a16:creationId xmlns:a16="http://schemas.microsoft.com/office/drawing/2014/main" id="{33350469-32AF-4298-9C38-05F957187C27}"/>
+          <p:cNvPr id="101" name="dataset-evidence">
+            <a:extLst xmlns:a="http://schemas.openxmlformats.org/drawingml/2006/main">
+              <a:ext uri="{FF2B5EF4-FFF2-40B4-BE49-F238E27FC236}">
+                <a16:creationId xmlns:a16="http://schemas.microsoft.com/office/drawing/2014/main" id="{671FD104-FCC5-4696-B59D-241E711C9F14}"/>
               </a:ext>
             </a:extLst>
           </p:cNvPr>
@@ -4856,14 +4906,14 @@
           <a:lstStyle xmlns:a="http://schemas.openxmlformats.org/drawingml/2006/main"/>
           <a:p xmlns:a="http://schemas.openxmlformats.org/drawingml/2006/main">
             <a:pPr>
-              <a:defRPr sz="1324" i="1">
+              <a:defRPr sz="1324">
                 <a:solidFill>
                   <a:srgbClr val="487AA1"/>
                 </a:solidFill>
               </a:defRPr>
             </a:pPr>
             <a:r>
-              <a:rPr sz="1324" i="1">
+              <a:rPr sz="1324">
                 <a:solidFill>
                   <a:srgbClr val="487AA1"/>
                 </a:solidFill>
@@ -4875,10 +4925,10 @@
       </p:sp>
       <p:sp>
         <p:nvSpPr>
-          <p:cNvPr id="101" name="figure-one-heading-title">
-            <a:extLst xmlns:a="http://schemas.openxmlformats.org/drawingml/2006/main">
-              <a:ext uri="{FF2B5EF4-FFF2-40B4-BE49-F238E27FC236}">
-                <a16:creationId xmlns:a16="http://schemas.microsoft.com/office/drawing/2014/main" id="{110C0330-DD4B-434B-B051-F18B913409B8}"/>
+          <p:cNvPr id="102" name="figure-one-heading-title">
+            <a:extLst xmlns:a="http://schemas.openxmlformats.org/drawingml/2006/main">
+              <a:ext uri="{FF2B5EF4-FFF2-40B4-BE49-F238E27FC236}">
+                <a16:creationId xmlns:a16="http://schemas.microsoft.com/office/drawing/2014/main" id="{0752D048-59E9-4ECB-8E2C-C76DE5F495A6}"/>
               </a:ext>
             </a:extLst>
           </p:cNvPr>
@@ -4925,10 +4975,10 @@
       </p:sp>
       <p:sp>
         <p:nvSpPr>
-          <p:cNvPr id="102" name="figure-one-heading-rule">
-            <a:extLst xmlns:a="http://schemas.openxmlformats.org/drawingml/2006/main">
-              <a:ext uri="{FF2B5EF4-FFF2-40B4-BE49-F238E27FC236}">
-                <a16:creationId xmlns:a16="http://schemas.microsoft.com/office/drawing/2014/main" id="{4B17C5C4-5D40-4209-A0EA-AF131C89A83D}"/>
+          <p:cNvPr id="103" name="figure-one-heading-rule">
+            <a:extLst xmlns:a="http://schemas.openxmlformats.org/drawingml/2006/main">
+              <a:ext uri="{FF2B5EF4-FFF2-40B4-BE49-F238E27FC236}">
+                <a16:creationId xmlns:a16="http://schemas.microsoft.com/office/drawing/2014/main" id="{B43BEF61-BAF4-4D88-B524-79D16EC26BE4}"/>
               </a:ext>
             </a:extLst>
           </p:cNvPr>
@@ -4958,10 +5008,10 @@
       </p:sp>
       <p:sp>
         <p:nvSpPr>
-          <p:cNvPr id="103" name="figure-one-frame">
-            <a:extLst xmlns:a="http://schemas.openxmlformats.org/drawingml/2006/main">
-              <a:ext uri="{FF2B5EF4-FFF2-40B4-BE49-F238E27FC236}">
-                <a16:creationId xmlns:a16="http://schemas.microsoft.com/office/drawing/2014/main" id="{FE21D68C-CB1F-4ED5-8AF5-EE007CB39BA9}"/>
+          <p:cNvPr id="104" name="figure-one-frame">
+            <a:extLst xmlns:a="http://schemas.openxmlformats.org/drawingml/2006/main">
+              <a:ext uri="{FF2B5EF4-FFF2-40B4-BE49-F238E27FC236}">
+                <a16:creationId xmlns:a16="http://schemas.microsoft.com/office/drawing/2014/main" id="{0C8E4E28-2B29-4E9A-8B02-B8E0E74C4663}"/>
               </a:ext>
             </a:extLst>
           </p:cNvPr>
@@ -4993,17 +5043,17 @@
       </p:sp>
       <p:pic>
         <p:nvPicPr>
-          <p:cNvPr id="286" name=""/>
+          <p:cNvPr id="289" name=""/>
           <p:cNvPicPr>
             <a:picLocks xmlns:a="http://schemas.openxmlformats.org/drawingml/2006/main" noChangeAspect="1"/>
           </p:cNvPicPr>
           <p:nvPr/>
         </p:nvPicPr>
         <p:blipFill>
-          <a:blip xmlns:r="http://schemas.openxmlformats.org/officeDocument/2006/relationships" xmlns:a="http://schemas.openxmlformats.org/drawingml/2006/main" r:embed="R15b06699d7794e9f">
+          <a:blip xmlns:r="http://schemas.openxmlformats.org/officeDocument/2006/relationships" xmlns:a="http://schemas.openxmlformats.org/drawingml/2006/main" r:embed="Rdbcf6dbce3ae4cc6">
             <a:extLst>
               <a:ext uri="{96DAC541-7B7A-43D3-8B79-37D633B846F1}">
-                <asvg:svgBlip xmlns:asvg="http://schemas.microsoft.com/office/drawing/2016/SVG/main" r:embed="Re1987a56f3b24bac"/>
+                <asvg:svgBlip xmlns:asvg="http://schemas.microsoft.com/office/drawing/2016/SVG/main" r:embed="R83ace09a84c64eae"/>
               </a:ext>
             </a:extLst>
           </a:blip>
@@ -5021,10 +5071,10 @@
       </p:pic>
       <p:sp>
         <p:nvSpPr>
-          <p:cNvPr id="105" name="figure-one-caption">
-            <a:extLst xmlns:a="http://schemas.openxmlformats.org/drawingml/2006/main">
-              <a:ext uri="{FF2B5EF4-FFF2-40B4-BE49-F238E27FC236}">
-                <a16:creationId xmlns:a16="http://schemas.microsoft.com/office/drawing/2014/main" id="{94738010-685E-4D86-A058-330D7CE600E6}"/>
+          <p:cNvPr id="106" name="figure-one-caption">
+            <a:extLst xmlns:a="http://schemas.openxmlformats.org/drawingml/2006/main">
+              <a:ext uri="{FF2B5EF4-FFF2-40B4-BE49-F238E27FC236}">
+                <a16:creationId xmlns:a16="http://schemas.microsoft.com/office/drawing/2014/main" id="{B2626759-A886-4279-9733-7A0107A249EF}"/>
               </a:ext>
             </a:extLst>
           </p:cNvPr>
@@ -5036,7 +5086,7 @@
         <p:spPr>
           <a:xfrm xmlns:a="http://schemas.openxmlformats.org/drawingml/2006/main">
             <a:off x="1105010" y="19392573"/>
-            <a:ext cx="7896780" cy="282514"/>
+            <a:ext cx="7896780" cy="221975"/>
           </a:xfrm>
           <a:prstGeom xmlns:a="http://schemas.openxmlformats.org/drawingml/2006/main" prst="rect">
             <a:avLst/>
@@ -5071,21 +5121,21 @@
       </p:sp>
       <p:sp>
         <p:nvSpPr>
-          <p:cNvPr id="106" name="figure-one-source">
-            <a:extLst xmlns:a="http://schemas.openxmlformats.org/drawingml/2006/main">
-              <a:ext uri="{FF2B5EF4-FFF2-40B4-BE49-F238E27FC236}">
-                <a16:creationId xmlns:a16="http://schemas.microsoft.com/office/drawing/2014/main" id="{7E62FFE0-7532-4287-897D-371C548A1927}"/>
-              </a:ext>
-            </a:extLst>
-          </p:cNvPr>
-          <p:cNvSpPr>
-            <a:spLocks xmlns:a="http://schemas.openxmlformats.org/drawingml/2006/main" noGrp="1"/>
-          </p:cNvSpPr>
-          <p:nvPr/>
-        </p:nvSpPr>
-        <p:spPr>
-          <a:xfrm xmlns:a="http://schemas.openxmlformats.org/drawingml/2006/main">
-            <a:off x="1105010" y="19614549"/>
+          <p:cNvPr id="107" name="figure-one-source">
+            <a:extLst xmlns:a="http://schemas.openxmlformats.org/drawingml/2006/main">
+              <a:ext uri="{FF2B5EF4-FFF2-40B4-BE49-F238E27FC236}">
+                <a16:creationId xmlns:a16="http://schemas.microsoft.com/office/drawing/2014/main" id="{70A343E7-7B4E-4BF8-B3AF-C3337398B15C}"/>
+              </a:ext>
+            </a:extLst>
+          </p:cNvPr>
+          <p:cNvSpPr>
+            <a:spLocks xmlns:a="http://schemas.openxmlformats.org/drawingml/2006/main" noGrp="1"/>
+          </p:cNvSpPr>
+          <p:nvPr/>
+        </p:nvSpPr>
+        <p:spPr>
+          <a:xfrm xmlns:a="http://schemas.openxmlformats.org/drawingml/2006/main">
+            <a:off x="1105010" y="19621275"/>
             <a:ext cx="7896780" cy="255608"/>
           </a:xfrm>
           <a:prstGeom xmlns:a="http://schemas.openxmlformats.org/drawingml/2006/main" prst="rect">
@@ -5102,14 +5152,14 @@
           <a:lstStyle xmlns:a="http://schemas.openxmlformats.org/drawingml/2006/main"/>
           <a:p xmlns:a="http://schemas.openxmlformats.org/drawingml/2006/main">
             <a:pPr>
-              <a:defRPr sz="1324" i="1">
+              <a:defRPr sz="1324">
                 <a:solidFill>
                   <a:srgbClr val="487AA1"/>
                 </a:solidFill>
               </a:defRPr>
             </a:pPr>
             <a:r>
-              <a:rPr sz="1324" i="1">
+              <a:rPr sz="1324">
                 <a:solidFill>
                   <a:srgbClr val="487AA1"/>
                 </a:solidFill>
@@ -5121,10 +5171,10 @@
       </p:sp>
       <p:sp>
         <p:nvSpPr>
-          <p:cNvPr id="107" name="central-takeaway">
-            <a:extLst xmlns:a="http://schemas.openxmlformats.org/drawingml/2006/main">
-              <a:ext uri="{FF2B5EF4-FFF2-40B4-BE49-F238E27FC236}">
-                <a16:creationId xmlns:a16="http://schemas.microsoft.com/office/drawing/2014/main" id="{391B3410-BEFE-4563-9B4B-E49471D21698}"/>
+          <p:cNvPr id="108" name="central-takeaway">
+            <a:extLst xmlns:a="http://schemas.openxmlformats.org/drawingml/2006/main">
+              <a:ext uri="{FF2B5EF4-FFF2-40B4-BE49-F238E27FC236}">
+                <a16:creationId xmlns:a16="http://schemas.microsoft.com/office/drawing/2014/main" id="{DD7795BE-112A-4FC0-8BDB-AAB9499F0644}"/>
               </a:ext>
             </a:extLst>
           </p:cNvPr>
@@ -5154,10 +5204,10 @@
       </p:sp>
       <p:sp>
         <p:nvSpPr>
-          <p:cNvPr id="108" name="takeaway-cape-gradient-1">
-            <a:extLst xmlns:a="http://schemas.openxmlformats.org/drawingml/2006/main">
-              <a:ext uri="{FF2B5EF4-FFF2-40B4-BE49-F238E27FC236}">
-                <a16:creationId xmlns:a16="http://schemas.microsoft.com/office/drawing/2014/main" id="{04CB1D17-789F-412E-8D70-6EE8CB914347}"/>
+          <p:cNvPr id="109" name="takeaway-cape-gradient-1">
+            <a:extLst xmlns:a="http://schemas.openxmlformats.org/drawingml/2006/main">
+              <a:ext uri="{FF2B5EF4-FFF2-40B4-BE49-F238E27FC236}">
+                <a16:creationId xmlns:a16="http://schemas.microsoft.com/office/drawing/2014/main" id="{C425869D-8465-495F-A546-0955106BB790}"/>
               </a:ext>
             </a:extLst>
           </p:cNvPr>
@@ -5187,10 +5237,10 @@
       </p:sp>
       <p:sp>
         <p:nvSpPr>
-          <p:cNvPr id="109" name="takeaway-cape-gradient-2">
-            <a:extLst xmlns:a="http://schemas.openxmlformats.org/drawingml/2006/main">
-              <a:ext uri="{FF2B5EF4-FFF2-40B4-BE49-F238E27FC236}">
-                <a16:creationId xmlns:a16="http://schemas.microsoft.com/office/drawing/2014/main" id="{7EE4570A-CB56-4CED-990E-98D8782F2807}"/>
+          <p:cNvPr id="110" name="takeaway-cape-gradient-2">
+            <a:extLst xmlns:a="http://schemas.openxmlformats.org/drawingml/2006/main">
+              <a:ext uri="{FF2B5EF4-FFF2-40B4-BE49-F238E27FC236}">
+                <a16:creationId xmlns:a16="http://schemas.microsoft.com/office/drawing/2014/main" id="{BF8B06AE-7097-411C-A6A3-44769B3301C5}"/>
               </a:ext>
             </a:extLst>
           </p:cNvPr>
@@ -5220,10 +5270,10 @@
       </p:sp>
       <p:sp>
         <p:nvSpPr>
-          <p:cNvPr id="110" name="takeaway-cape-gradient-3">
-            <a:extLst xmlns:a="http://schemas.openxmlformats.org/drawingml/2006/main">
-              <a:ext uri="{FF2B5EF4-FFF2-40B4-BE49-F238E27FC236}">
-                <a16:creationId xmlns:a16="http://schemas.microsoft.com/office/drawing/2014/main" id="{002CFD38-2586-40BE-BB8F-4AA6258C1778}"/>
+          <p:cNvPr id="111" name="takeaway-cape-gradient-3">
+            <a:extLst xmlns:a="http://schemas.openxmlformats.org/drawingml/2006/main">
+              <a:ext uri="{FF2B5EF4-FFF2-40B4-BE49-F238E27FC236}">
+                <a16:creationId xmlns:a16="http://schemas.microsoft.com/office/drawing/2014/main" id="{33B6C8D0-D0AB-4BA6-9E1E-CA82E7F5D468}"/>
               </a:ext>
             </a:extLst>
           </p:cNvPr>
@@ -5253,10 +5303,10 @@
       </p:sp>
       <p:sp>
         <p:nvSpPr>
-          <p:cNvPr id="111" name="takeaway-cape-gradient-4">
-            <a:extLst xmlns:a="http://schemas.openxmlformats.org/drawingml/2006/main">
-              <a:ext uri="{FF2B5EF4-FFF2-40B4-BE49-F238E27FC236}">
-                <a16:creationId xmlns:a16="http://schemas.microsoft.com/office/drawing/2014/main" id="{C82CAE65-0448-48C1-A196-318C3E38B24E}"/>
+          <p:cNvPr id="112" name="takeaway-cape-gradient-4">
+            <a:extLst xmlns:a="http://schemas.openxmlformats.org/drawingml/2006/main">
+              <a:ext uri="{FF2B5EF4-FFF2-40B4-BE49-F238E27FC236}">
+                <a16:creationId xmlns:a16="http://schemas.microsoft.com/office/drawing/2014/main" id="{D9A9C99F-6F71-4F4F-8168-45B41B61EFA9}"/>
               </a:ext>
             </a:extLst>
           </p:cNvPr>
@@ -5286,10 +5336,10 @@
       </p:sp>
       <p:sp>
         <p:nvSpPr>
-          <p:cNvPr id="112" name="takeaway-cape-gradient-5">
-            <a:extLst xmlns:a="http://schemas.openxmlformats.org/drawingml/2006/main">
-              <a:ext uri="{FF2B5EF4-FFF2-40B4-BE49-F238E27FC236}">
-                <a16:creationId xmlns:a16="http://schemas.microsoft.com/office/drawing/2014/main" id="{9386A751-687B-4A04-91DB-5E1AB50CA8FA}"/>
+          <p:cNvPr id="113" name="takeaway-cape-gradient-5">
+            <a:extLst xmlns:a="http://schemas.openxmlformats.org/drawingml/2006/main">
+              <a:ext uri="{FF2B5EF4-FFF2-40B4-BE49-F238E27FC236}">
+                <a16:creationId xmlns:a16="http://schemas.microsoft.com/office/drawing/2014/main" id="{99A7957F-1A02-4998-A1C7-E8A0ADD2371A}"/>
               </a:ext>
             </a:extLst>
           </p:cNvPr>
@@ -5319,10 +5369,10 @@
       </p:sp>
       <p:sp>
         <p:nvSpPr>
-          <p:cNvPr id="113" name="takeaway-cape-gradient-6">
-            <a:extLst xmlns:a="http://schemas.openxmlformats.org/drawingml/2006/main">
-              <a:ext uri="{FF2B5EF4-FFF2-40B4-BE49-F238E27FC236}">
-                <a16:creationId xmlns:a16="http://schemas.microsoft.com/office/drawing/2014/main" id="{2B2FF2EE-E16C-438E-8450-D2414DF1B817}"/>
+          <p:cNvPr id="114" name="takeaway-cape-gradient-6">
+            <a:extLst xmlns:a="http://schemas.openxmlformats.org/drawingml/2006/main">
+              <a:ext uri="{FF2B5EF4-FFF2-40B4-BE49-F238E27FC236}">
+                <a16:creationId xmlns:a16="http://schemas.microsoft.com/office/drawing/2014/main" id="{2E5903C9-5439-4929-9EDC-C5D07402701B}"/>
               </a:ext>
             </a:extLst>
           </p:cNvPr>
@@ -5352,10 +5402,10 @@
       </p:sp>
       <p:sp>
         <p:nvSpPr>
-          <p:cNvPr id="114" name="takeaway-cape-gradient-7">
-            <a:extLst xmlns:a="http://schemas.openxmlformats.org/drawingml/2006/main">
-              <a:ext uri="{FF2B5EF4-FFF2-40B4-BE49-F238E27FC236}">
-                <a16:creationId xmlns:a16="http://schemas.microsoft.com/office/drawing/2014/main" id="{55640D12-FB94-4400-8A35-0C8E4A69CAE6}"/>
+          <p:cNvPr id="115" name="takeaway-cape-gradient-7">
+            <a:extLst xmlns:a="http://schemas.openxmlformats.org/drawingml/2006/main">
+              <a:ext uri="{FF2B5EF4-FFF2-40B4-BE49-F238E27FC236}">
+                <a16:creationId xmlns:a16="http://schemas.microsoft.com/office/drawing/2014/main" id="{7F08E786-5AC8-4339-A5A2-CB4A5BF786E2}"/>
               </a:ext>
             </a:extLst>
           </p:cNvPr>
@@ -5385,10 +5435,10 @@
       </p:sp>
       <p:sp>
         <p:nvSpPr>
-          <p:cNvPr id="115" name="takeaway-cape-gradient-8">
-            <a:extLst xmlns:a="http://schemas.openxmlformats.org/drawingml/2006/main">
-              <a:ext uri="{FF2B5EF4-FFF2-40B4-BE49-F238E27FC236}">
-                <a16:creationId xmlns:a16="http://schemas.microsoft.com/office/drawing/2014/main" id="{EDEC37EF-55CC-4E8A-9789-74D661AD8D0C}"/>
+          <p:cNvPr id="116" name="takeaway-cape-gradient-8">
+            <a:extLst xmlns:a="http://schemas.openxmlformats.org/drawingml/2006/main">
+              <a:ext uri="{FF2B5EF4-FFF2-40B4-BE49-F238E27FC236}">
+                <a16:creationId xmlns:a16="http://schemas.microsoft.com/office/drawing/2014/main" id="{5D5BCC8C-B57B-4B83-835E-D6A28729B947}"/>
               </a:ext>
             </a:extLst>
           </p:cNvPr>
@@ -5418,10 +5468,10 @@
       </p:sp>
       <p:sp>
         <p:nvSpPr>
-          <p:cNvPr id="116" name="takeaway-cape-gradient-9">
-            <a:extLst xmlns:a="http://schemas.openxmlformats.org/drawingml/2006/main">
-              <a:ext uri="{FF2B5EF4-FFF2-40B4-BE49-F238E27FC236}">
-                <a16:creationId xmlns:a16="http://schemas.microsoft.com/office/drawing/2014/main" id="{C646B9E0-7922-4323-AD8A-1FC4596E3182}"/>
+          <p:cNvPr id="117" name="takeaway-cape-gradient-9">
+            <a:extLst xmlns:a="http://schemas.openxmlformats.org/drawingml/2006/main">
+              <a:ext uri="{FF2B5EF4-FFF2-40B4-BE49-F238E27FC236}">
+                <a16:creationId xmlns:a16="http://schemas.microsoft.com/office/drawing/2014/main" id="{06E1A5E0-FAC4-4911-A848-689620C07F17}"/>
               </a:ext>
             </a:extLst>
           </p:cNvPr>
@@ -5451,10 +5501,10 @@
       </p:sp>
       <p:sp>
         <p:nvSpPr>
-          <p:cNvPr id="117" name="takeaway-cape-gradient-10">
-            <a:extLst xmlns:a="http://schemas.openxmlformats.org/drawingml/2006/main">
-              <a:ext uri="{FF2B5EF4-FFF2-40B4-BE49-F238E27FC236}">
-                <a16:creationId xmlns:a16="http://schemas.microsoft.com/office/drawing/2014/main" id="{B9FDAF17-4D59-4D2A-8E70-E07A4FBCD770}"/>
+          <p:cNvPr id="118" name="takeaway-cape-gradient-10">
+            <a:extLst xmlns:a="http://schemas.openxmlformats.org/drawingml/2006/main">
+              <a:ext uri="{FF2B5EF4-FFF2-40B4-BE49-F238E27FC236}">
+                <a16:creationId xmlns:a16="http://schemas.microsoft.com/office/drawing/2014/main" id="{AC6F5664-E616-49CF-805A-60FBBEAC9479}"/>
               </a:ext>
             </a:extLst>
           </p:cNvPr>
@@ -5484,10 +5534,10 @@
       </p:sp>
       <p:sp>
         <p:nvSpPr>
-          <p:cNvPr id="118" name="takeaway-cape-gradient-11">
-            <a:extLst xmlns:a="http://schemas.openxmlformats.org/drawingml/2006/main">
-              <a:ext uri="{FF2B5EF4-FFF2-40B4-BE49-F238E27FC236}">
-                <a16:creationId xmlns:a16="http://schemas.microsoft.com/office/drawing/2014/main" id="{45F60335-627C-4646-9D9A-15D8EF2F32FC}"/>
+          <p:cNvPr id="119" name="takeaway-cape-gradient-11">
+            <a:extLst xmlns:a="http://schemas.openxmlformats.org/drawingml/2006/main">
+              <a:ext uri="{FF2B5EF4-FFF2-40B4-BE49-F238E27FC236}">
+                <a16:creationId xmlns:a16="http://schemas.microsoft.com/office/drawing/2014/main" id="{B47C79ED-E4A4-4862-875B-F5910EA507F5}"/>
               </a:ext>
             </a:extLst>
           </p:cNvPr>
@@ -5517,10 +5567,10 @@
       </p:sp>
       <p:sp>
         <p:nvSpPr>
-          <p:cNvPr id="119" name="takeaway-cape-gradient-12">
-            <a:extLst xmlns:a="http://schemas.openxmlformats.org/drawingml/2006/main">
-              <a:ext uri="{FF2B5EF4-FFF2-40B4-BE49-F238E27FC236}">
-                <a16:creationId xmlns:a16="http://schemas.microsoft.com/office/drawing/2014/main" id="{709AE1B4-2498-4301-B97A-E31C7A19409B}"/>
+          <p:cNvPr id="120" name="takeaway-cape-gradient-12">
+            <a:extLst xmlns:a="http://schemas.openxmlformats.org/drawingml/2006/main">
+              <a:ext uri="{FF2B5EF4-FFF2-40B4-BE49-F238E27FC236}">
+                <a16:creationId xmlns:a16="http://schemas.microsoft.com/office/drawing/2014/main" id="{AFB89F15-1F15-4088-8674-7CD3872F4DF4}"/>
               </a:ext>
             </a:extLst>
           </p:cNvPr>
@@ -5550,10 +5600,10 @@
       </p:sp>
       <p:sp>
         <p:nvSpPr>
-          <p:cNvPr id="120" name="takeaway-cape-gradient-13">
-            <a:extLst xmlns:a="http://schemas.openxmlformats.org/drawingml/2006/main">
-              <a:ext uri="{FF2B5EF4-FFF2-40B4-BE49-F238E27FC236}">
-                <a16:creationId xmlns:a16="http://schemas.microsoft.com/office/drawing/2014/main" id="{0A2DA8F9-9E74-4485-80C1-1DAC2D7BFFD4}"/>
+          <p:cNvPr id="121" name="takeaway-cape-gradient-13">
+            <a:extLst xmlns:a="http://schemas.openxmlformats.org/drawingml/2006/main">
+              <a:ext uri="{FF2B5EF4-FFF2-40B4-BE49-F238E27FC236}">
+                <a16:creationId xmlns:a16="http://schemas.microsoft.com/office/drawing/2014/main" id="{38ECF446-3D67-4812-85FE-69327B7C09D2}"/>
               </a:ext>
             </a:extLst>
           </p:cNvPr>
@@ -5583,10 +5633,10 @@
       </p:sp>
       <p:sp>
         <p:nvSpPr>
-          <p:cNvPr id="121" name="takeaway-cape-gradient-14">
-            <a:extLst xmlns:a="http://schemas.openxmlformats.org/drawingml/2006/main">
-              <a:ext uri="{FF2B5EF4-FFF2-40B4-BE49-F238E27FC236}">
-                <a16:creationId xmlns:a16="http://schemas.microsoft.com/office/drawing/2014/main" id="{AFC5F2D3-AAFA-433D-90DB-7F34AFD36BC8}"/>
+          <p:cNvPr id="122" name="takeaway-cape-gradient-14">
+            <a:extLst xmlns:a="http://schemas.openxmlformats.org/drawingml/2006/main">
+              <a:ext uri="{FF2B5EF4-FFF2-40B4-BE49-F238E27FC236}">
+                <a16:creationId xmlns:a16="http://schemas.microsoft.com/office/drawing/2014/main" id="{6D82DD05-4A18-416A-9A78-E52BEA47D7BF}"/>
               </a:ext>
             </a:extLst>
           </p:cNvPr>
@@ -5616,10 +5666,10 @@
       </p:sp>
       <p:sp>
         <p:nvSpPr>
-          <p:cNvPr id="122" name="takeaway-cape-gradient-15">
-            <a:extLst xmlns:a="http://schemas.openxmlformats.org/drawingml/2006/main">
-              <a:ext uri="{FF2B5EF4-FFF2-40B4-BE49-F238E27FC236}">
-                <a16:creationId xmlns:a16="http://schemas.microsoft.com/office/drawing/2014/main" id="{A1D18EE6-FA09-42F0-A283-850159DDFDA3}"/>
+          <p:cNvPr id="123" name="takeaway-cape-gradient-15">
+            <a:extLst xmlns:a="http://schemas.openxmlformats.org/drawingml/2006/main">
+              <a:ext uri="{FF2B5EF4-FFF2-40B4-BE49-F238E27FC236}">
+                <a16:creationId xmlns:a16="http://schemas.microsoft.com/office/drawing/2014/main" id="{515FF613-1888-4358-BDE4-EB0CB4B9033C}"/>
               </a:ext>
             </a:extLst>
           </p:cNvPr>
@@ -5649,10 +5699,10 @@
       </p:sp>
       <p:sp>
         <p:nvSpPr>
-          <p:cNvPr id="123" name="takeaway-cape-gradient-16">
-            <a:extLst xmlns:a="http://schemas.openxmlformats.org/drawingml/2006/main">
-              <a:ext uri="{FF2B5EF4-FFF2-40B4-BE49-F238E27FC236}">
-                <a16:creationId xmlns:a16="http://schemas.microsoft.com/office/drawing/2014/main" id="{19BAA145-F44D-4184-86C0-13DAA552F67B}"/>
+          <p:cNvPr id="124" name="takeaway-cape-gradient-16">
+            <a:extLst xmlns:a="http://schemas.openxmlformats.org/drawingml/2006/main">
+              <a:ext uri="{FF2B5EF4-FFF2-40B4-BE49-F238E27FC236}">
+                <a16:creationId xmlns:a16="http://schemas.microsoft.com/office/drawing/2014/main" id="{E949D8EC-EEBF-4CE4-B3BD-7FFA2C4351FF}"/>
               </a:ext>
             </a:extLst>
           </p:cNvPr>
@@ -5682,10 +5732,10 @@
       </p:sp>
       <p:sp>
         <p:nvSpPr>
-          <p:cNvPr id="124" name="takeaway-cape-gradient-17">
-            <a:extLst xmlns:a="http://schemas.openxmlformats.org/drawingml/2006/main">
-              <a:ext uri="{FF2B5EF4-FFF2-40B4-BE49-F238E27FC236}">
-                <a16:creationId xmlns:a16="http://schemas.microsoft.com/office/drawing/2014/main" id="{CA785455-1B6E-4179-BE87-BA72F7CFA6BC}"/>
+          <p:cNvPr id="125" name="takeaway-cape-gradient-17">
+            <a:extLst xmlns:a="http://schemas.openxmlformats.org/drawingml/2006/main">
+              <a:ext uri="{FF2B5EF4-FFF2-40B4-BE49-F238E27FC236}">
+                <a16:creationId xmlns:a16="http://schemas.microsoft.com/office/drawing/2014/main" id="{7A1C7902-CB91-4566-A148-4335C8F55709}"/>
               </a:ext>
             </a:extLst>
           </p:cNvPr>
@@ -5715,10 +5765,10 @@
       </p:sp>
       <p:sp>
         <p:nvSpPr>
-          <p:cNvPr id="125" name="takeaway-cape-gradient-18">
-            <a:extLst xmlns:a="http://schemas.openxmlformats.org/drawingml/2006/main">
-              <a:ext uri="{FF2B5EF4-FFF2-40B4-BE49-F238E27FC236}">
-                <a16:creationId xmlns:a16="http://schemas.microsoft.com/office/drawing/2014/main" id="{C31EF5BC-96B7-44B1-B70E-095342D96950}"/>
+          <p:cNvPr id="126" name="takeaway-cape-gradient-18">
+            <a:extLst xmlns:a="http://schemas.openxmlformats.org/drawingml/2006/main">
+              <a:ext uri="{FF2B5EF4-FFF2-40B4-BE49-F238E27FC236}">
+                <a16:creationId xmlns:a16="http://schemas.microsoft.com/office/drawing/2014/main" id="{80E913FF-739D-4477-A823-F1113A0EF8F1}"/>
               </a:ext>
             </a:extLst>
           </p:cNvPr>
@@ -5748,10 +5798,10 @@
       </p:sp>
       <p:sp>
         <p:nvSpPr>
-          <p:cNvPr id="126" name="takeaway-cape-gradient-19">
-            <a:extLst xmlns:a="http://schemas.openxmlformats.org/drawingml/2006/main">
-              <a:ext uri="{FF2B5EF4-FFF2-40B4-BE49-F238E27FC236}">
-                <a16:creationId xmlns:a16="http://schemas.microsoft.com/office/drawing/2014/main" id="{02499C17-9B57-440F-99A3-D5AA1F670CFA}"/>
+          <p:cNvPr id="127" name="takeaway-cape-gradient-19">
+            <a:extLst xmlns:a="http://schemas.openxmlformats.org/drawingml/2006/main">
+              <a:ext uri="{FF2B5EF4-FFF2-40B4-BE49-F238E27FC236}">
+                <a16:creationId xmlns:a16="http://schemas.microsoft.com/office/drawing/2014/main" id="{7BD244DB-49F0-4BF9-9CB2-E2A920803419}"/>
               </a:ext>
             </a:extLst>
           </p:cNvPr>
@@ -5781,10 +5831,10 @@
       </p:sp>
       <p:sp>
         <p:nvSpPr>
-          <p:cNvPr id="127" name="takeaway-cape-gradient-20">
-            <a:extLst xmlns:a="http://schemas.openxmlformats.org/drawingml/2006/main">
-              <a:ext uri="{FF2B5EF4-FFF2-40B4-BE49-F238E27FC236}">
-                <a16:creationId xmlns:a16="http://schemas.microsoft.com/office/drawing/2014/main" id="{C60D0708-B4B6-412E-B15D-4D58F8CE3179}"/>
+          <p:cNvPr id="128" name="takeaway-cape-gradient-20">
+            <a:extLst xmlns:a="http://schemas.openxmlformats.org/drawingml/2006/main">
+              <a:ext uri="{FF2B5EF4-FFF2-40B4-BE49-F238E27FC236}">
+                <a16:creationId xmlns:a16="http://schemas.microsoft.com/office/drawing/2014/main" id="{5B9CD190-D1E6-4E40-BD4A-52AF52B179E6}"/>
               </a:ext>
             </a:extLst>
           </p:cNvPr>
@@ -5814,10 +5864,10 @@
       </p:sp>
       <p:sp>
         <p:nvSpPr>
-          <p:cNvPr id="128" name="takeaway-cape-gradient-21">
-            <a:extLst xmlns:a="http://schemas.openxmlformats.org/drawingml/2006/main">
-              <a:ext uri="{FF2B5EF4-FFF2-40B4-BE49-F238E27FC236}">
-                <a16:creationId xmlns:a16="http://schemas.microsoft.com/office/drawing/2014/main" id="{19C62973-A473-4176-82D9-A08CCFC951D8}"/>
+          <p:cNvPr id="129" name="takeaway-cape-gradient-21">
+            <a:extLst xmlns:a="http://schemas.openxmlformats.org/drawingml/2006/main">
+              <a:ext uri="{FF2B5EF4-FFF2-40B4-BE49-F238E27FC236}">
+                <a16:creationId xmlns:a16="http://schemas.microsoft.com/office/drawing/2014/main" id="{E1C7FA5D-4C7D-49AF-A7C5-245268FC2502}"/>
               </a:ext>
             </a:extLst>
           </p:cNvPr>
@@ -5847,10 +5897,10 @@
       </p:sp>
       <p:sp>
         <p:nvSpPr>
-          <p:cNvPr id="129" name="takeaway-cape-gradient-22">
-            <a:extLst xmlns:a="http://schemas.openxmlformats.org/drawingml/2006/main">
-              <a:ext uri="{FF2B5EF4-FFF2-40B4-BE49-F238E27FC236}">
-                <a16:creationId xmlns:a16="http://schemas.microsoft.com/office/drawing/2014/main" id="{A577E0BA-3207-4436-A30F-7CC821BC9C63}"/>
+          <p:cNvPr id="130" name="takeaway-cape-gradient-22">
+            <a:extLst xmlns:a="http://schemas.openxmlformats.org/drawingml/2006/main">
+              <a:ext uri="{FF2B5EF4-FFF2-40B4-BE49-F238E27FC236}">
+                <a16:creationId xmlns:a16="http://schemas.microsoft.com/office/drawing/2014/main" id="{E2E249E0-BD3E-4767-AAA7-7D3663BB735E}"/>
               </a:ext>
             </a:extLst>
           </p:cNvPr>
@@ -5880,10 +5930,10 @@
       </p:sp>
       <p:sp>
         <p:nvSpPr>
-          <p:cNvPr id="130" name="takeaway-cape-gradient-23">
-            <a:extLst xmlns:a="http://schemas.openxmlformats.org/drawingml/2006/main">
-              <a:ext uri="{FF2B5EF4-FFF2-40B4-BE49-F238E27FC236}">
-                <a16:creationId xmlns:a16="http://schemas.microsoft.com/office/drawing/2014/main" id="{22F395EF-2F95-455F-AEF9-805830763CF6}"/>
+          <p:cNvPr id="131" name="takeaway-cape-gradient-23">
+            <a:extLst xmlns:a="http://schemas.openxmlformats.org/drawingml/2006/main">
+              <a:ext uri="{FF2B5EF4-FFF2-40B4-BE49-F238E27FC236}">
+                <a16:creationId xmlns:a16="http://schemas.microsoft.com/office/drawing/2014/main" id="{0CF7C7B0-F4ED-446A-94A4-42C21D7E3878}"/>
               </a:ext>
             </a:extLst>
           </p:cNvPr>
@@ -5913,10 +5963,10 @@
       </p:sp>
       <p:sp>
         <p:nvSpPr>
-          <p:cNvPr id="131" name="takeaway-cape-gradient-24">
-            <a:extLst xmlns:a="http://schemas.openxmlformats.org/drawingml/2006/main">
-              <a:ext uri="{FF2B5EF4-FFF2-40B4-BE49-F238E27FC236}">
-                <a16:creationId xmlns:a16="http://schemas.microsoft.com/office/drawing/2014/main" id="{743555BE-B746-43B9-9B9E-E89E9FC30B77}"/>
+          <p:cNvPr id="132" name="takeaway-cape-gradient-24">
+            <a:extLst xmlns:a="http://schemas.openxmlformats.org/drawingml/2006/main">
+              <a:ext uri="{FF2B5EF4-FFF2-40B4-BE49-F238E27FC236}">
+                <a16:creationId xmlns:a16="http://schemas.microsoft.com/office/drawing/2014/main" id="{6BCE36A8-81AE-47A2-AAD9-671B33CA22E8}"/>
               </a:ext>
             </a:extLst>
           </p:cNvPr>
@@ -5946,10 +5996,10 @@
       </p:sp>
       <p:sp>
         <p:nvSpPr>
-          <p:cNvPr id="132" name="takeaway-cape-gradient-25">
-            <a:extLst xmlns:a="http://schemas.openxmlformats.org/drawingml/2006/main">
-              <a:ext uri="{FF2B5EF4-FFF2-40B4-BE49-F238E27FC236}">
-                <a16:creationId xmlns:a16="http://schemas.microsoft.com/office/drawing/2014/main" id="{777907D4-551A-40D5-8772-AE9E674C58A9}"/>
+          <p:cNvPr id="133" name="takeaway-cape-gradient-25">
+            <a:extLst xmlns:a="http://schemas.openxmlformats.org/drawingml/2006/main">
+              <a:ext uri="{FF2B5EF4-FFF2-40B4-BE49-F238E27FC236}">
+                <a16:creationId xmlns:a16="http://schemas.microsoft.com/office/drawing/2014/main" id="{7AA35D95-1039-47A0-AC03-38867C8AB2C5}"/>
               </a:ext>
             </a:extLst>
           </p:cNvPr>
@@ -5979,10 +6029,10 @@
       </p:sp>
       <p:sp>
         <p:nvSpPr>
-          <p:cNvPr id="133" name="takeaway-cape-gradient-26">
-            <a:extLst xmlns:a="http://schemas.openxmlformats.org/drawingml/2006/main">
-              <a:ext uri="{FF2B5EF4-FFF2-40B4-BE49-F238E27FC236}">
-                <a16:creationId xmlns:a16="http://schemas.microsoft.com/office/drawing/2014/main" id="{6C8DF5F6-C84D-4DE6-BF25-AABBB2413B6F}"/>
+          <p:cNvPr id="134" name="takeaway-cape-gradient-26">
+            <a:extLst xmlns:a="http://schemas.openxmlformats.org/drawingml/2006/main">
+              <a:ext uri="{FF2B5EF4-FFF2-40B4-BE49-F238E27FC236}">
+                <a16:creationId xmlns:a16="http://schemas.microsoft.com/office/drawing/2014/main" id="{D70CDD2B-385C-43D8-9CC9-F7C93A163853}"/>
               </a:ext>
             </a:extLst>
           </p:cNvPr>
@@ -6012,10 +6062,10 @@
       </p:sp>
       <p:sp>
         <p:nvSpPr>
-          <p:cNvPr id="134" name="takeaway-cape-gradient-27">
-            <a:extLst xmlns:a="http://schemas.openxmlformats.org/drawingml/2006/main">
-              <a:ext uri="{FF2B5EF4-FFF2-40B4-BE49-F238E27FC236}">
-                <a16:creationId xmlns:a16="http://schemas.microsoft.com/office/drawing/2014/main" id="{94277B28-8E30-4B16-BE37-1FACE7953F82}"/>
+          <p:cNvPr id="135" name="takeaway-cape-gradient-27">
+            <a:extLst xmlns:a="http://schemas.openxmlformats.org/drawingml/2006/main">
+              <a:ext uri="{FF2B5EF4-FFF2-40B4-BE49-F238E27FC236}">
+                <a16:creationId xmlns:a16="http://schemas.microsoft.com/office/drawing/2014/main" id="{1C4E8BF8-5E74-41CB-B536-587EA5B5B7EA}"/>
               </a:ext>
             </a:extLst>
           </p:cNvPr>
@@ -6045,10 +6095,10 @@
       </p:sp>
       <p:sp>
         <p:nvSpPr>
-          <p:cNvPr id="135" name="takeaway-cape-gradient-28">
-            <a:extLst xmlns:a="http://schemas.openxmlformats.org/drawingml/2006/main">
-              <a:ext uri="{FF2B5EF4-FFF2-40B4-BE49-F238E27FC236}">
-                <a16:creationId xmlns:a16="http://schemas.microsoft.com/office/drawing/2014/main" id="{ACEB41DA-AF71-419A-A36B-D1D884EC29C8}"/>
+          <p:cNvPr id="136" name="takeaway-cape-gradient-28">
+            <a:extLst xmlns:a="http://schemas.openxmlformats.org/drawingml/2006/main">
+              <a:ext uri="{FF2B5EF4-FFF2-40B4-BE49-F238E27FC236}">
+                <a16:creationId xmlns:a16="http://schemas.microsoft.com/office/drawing/2014/main" id="{7EBB481E-F271-45A0-95D2-98F07D6F85B9}"/>
               </a:ext>
             </a:extLst>
           </p:cNvPr>
@@ -6078,10 +6128,10 @@
       </p:sp>
       <p:sp>
         <p:nvSpPr>
-          <p:cNvPr id="136" name="takeaway-cape-gradient-29">
-            <a:extLst xmlns:a="http://schemas.openxmlformats.org/drawingml/2006/main">
-              <a:ext uri="{FF2B5EF4-FFF2-40B4-BE49-F238E27FC236}">
-                <a16:creationId xmlns:a16="http://schemas.microsoft.com/office/drawing/2014/main" id="{12345636-DE3D-4583-87AE-5142E02274DF}"/>
+          <p:cNvPr id="137" name="takeaway-cape-gradient-29">
+            <a:extLst xmlns:a="http://schemas.openxmlformats.org/drawingml/2006/main">
+              <a:ext uri="{FF2B5EF4-FFF2-40B4-BE49-F238E27FC236}">
+                <a16:creationId xmlns:a16="http://schemas.microsoft.com/office/drawing/2014/main" id="{E92FE5D4-BE5D-44CA-BA5A-E7065977A955}"/>
               </a:ext>
             </a:extLst>
           </p:cNvPr>
@@ -6111,10 +6161,10 @@
       </p:sp>
       <p:sp>
         <p:nvSpPr>
-          <p:cNvPr id="137" name="takeaway-cape-gradient-30">
-            <a:extLst xmlns:a="http://schemas.openxmlformats.org/drawingml/2006/main">
-              <a:ext uri="{FF2B5EF4-FFF2-40B4-BE49-F238E27FC236}">
-                <a16:creationId xmlns:a16="http://schemas.microsoft.com/office/drawing/2014/main" id="{7B2A475A-75E4-42A2-A856-3B01CC4EDF2A}"/>
+          <p:cNvPr id="138" name="takeaway-cape-gradient-30">
+            <a:extLst xmlns:a="http://schemas.openxmlformats.org/drawingml/2006/main">
+              <a:ext uri="{FF2B5EF4-FFF2-40B4-BE49-F238E27FC236}">
+                <a16:creationId xmlns:a16="http://schemas.microsoft.com/office/drawing/2014/main" id="{D4847EC8-AD8A-4C79-8ADA-D0FB1822E606}"/>
               </a:ext>
             </a:extLst>
           </p:cNvPr>
@@ -6144,10 +6194,10 @@
       </p:sp>
       <p:sp>
         <p:nvSpPr>
-          <p:cNvPr id="138" name="takeaway-cape-gradient-31">
-            <a:extLst xmlns:a="http://schemas.openxmlformats.org/drawingml/2006/main">
-              <a:ext uri="{FF2B5EF4-FFF2-40B4-BE49-F238E27FC236}">
-                <a16:creationId xmlns:a16="http://schemas.microsoft.com/office/drawing/2014/main" id="{7040686B-DF02-4507-8E76-41DB7100FA64}"/>
+          <p:cNvPr id="139" name="takeaway-cape-gradient-31">
+            <a:extLst xmlns:a="http://schemas.openxmlformats.org/drawingml/2006/main">
+              <a:ext uri="{FF2B5EF4-FFF2-40B4-BE49-F238E27FC236}">
+                <a16:creationId xmlns:a16="http://schemas.microsoft.com/office/drawing/2014/main" id="{1B06E8E2-69E2-494E-9057-0263C65ED540}"/>
               </a:ext>
             </a:extLst>
           </p:cNvPr>
@@ -6177,10 +6227,10 @@
       </p:sp>
       <p:sp>
         <p:nvSpPr>
-          <p:cNvPr id="139" name="takeaway-cape-gradient-32">
-            <a:extLst xmlns:a="http://schemas.openxmlformats.org/drawingml/2006/main">
-              <a:ext uri="{FF2B5EF4-FFF2-40B4-BE49-F238E27FC236}">
-                <a16:creationId xmlns:a16="http://schemas.microsoft.com/office/drawing/2014/main" id="{93EDC66E-48E8-4512-9F25-81D5579CF5D5}"/>
+          <p:cNvPr id="140" name="takeaway-cape-gradient-32">
+            <a:extLst xmlns:a="http://schemas.openxmlformats.org/drawingml/2006/main">
+              <a:ext uri="{FF2B5EF4-FFF2-40B4-BE49-F238E27FC236}">
+                <a16:creationId xmlns:a16="http://schemas.microsoft.com/office/drawing/2014/main" id="{7E2D1A17-DB7F-4357-A2C5-C2C3767140C4}"/>
               </a:ext>
             </a:extLst>
           </p:cNvPr>
@@ -6210,10 +6260,10 @@
       </p:sp>
       <p:sp>
         <p:nvSpPr>
-          <p:cNvPr id="140" name="central-takeaway-title">
-            <a:extLst xmlns:a="http://schemas.openxmlformats.org/drawingml/2006/main">
-              <a:ext uri="{FF2B5EF4-FFF2-40B4-BE49-F238E27FC236}">
-                <a16:creationId xmlns:a16="http://schemas.microsoft.com/office/drawing/2014/main" id="{0FB1FBE3-2CAB-47C2-9D57-C659AE9B6822}"/>
+          <p:cNvPr id="141" name="central-takeaway-title">
+            <a:extLst xmlns:a="http://schemas.openxmlformats.org/drawingml/2006/main">
+              <a:ext uri="{FF2B5EF4-FFF2-40B4-BE49-F238E27FC236}">
+                <a16:creationId xmlns:a16="http://schemas.microsoft.com/office/drawing/2014/main" id="{3C5B5633-084A-4002-BFC6-8705ADAD2033}"/>
               </a:ext>
             </a:extLst>
           </p:cNvPr>
@@ -6253,17 +6303,17 @@
                   <a:srgbClr val="293F55"/>
                 </a:solidFill>
               </a:rPr>
-              <a:t>External simulations retained C-indices of 0.75 and 0.74</a:t>
+              <a:t>External C-indices remained 0.75 and 0.74</a:t>
             </a:r>
           </a:p>
         </p:txBody>
       </p:sp>
       <p:sp>
         <p:nvSpPr>
-          <p:cNvPr id="141" name="central-takeaway-subtitle">
-            <a:extLst xmlns:a="http://schemas.openxmlformats.org/drawingml/2006/main">
-              <a:ext uri="{FF2B5EF4-FFF2-40B4-BE49-F238E27FC236}">
-                <a16:creationId xmlns:a16="http://schemas.microsoft.com/office/drawing/2014/main" id="{6A89F50F-2EEC-473F-B046-D60DA5A310FC}"/>
+          <p:cNvPr id="142" name="central-takeaway-subtitle">
+            <a:extLst xmlns:a="http://schemas.openxmlformats.org/drawingml/2006/main">
+              <a:ext uri="{FF2B5EF4-FFF2-40B4-BE49-F238E27FC236}">
+                <a16:creationId xmlns:a16="http://schemas.microsoft.com/office/drawing/2014/main" id="{E7936670-0EBE-4526-90B7-84178E35A86C}"/>
               </a:ext>
             </a:extLst>
           </p:cNvPr>
@@ -6310,10 +6360,10 @@
       </p:sp>
       <p:sp>
         <p:nvSpPr>
-          <p:cNvPr id="142" name="takeaway-evidence">
-            <a:extLst xmlns:a="http://schemas.openxmlformats.org/drawingml/2006/main">
-              <a:ext uri="{FF2B5EF4-FFF2-40B4-BE49-F238E27FC236}">
-                <a16:creationId xmlns:a16="http://schemas.microsoft.com/office/drawing/2014/main" id="{1FE6B86A-A82E-4E10-9259-F4DEA8224891}"/>
+          <p:cNvPr id="143" name="takeaway-evidence">
+            <a:extLst xmlns:a="http://schemas.openxmlformats.org/drawingml/2006/main">
+              <a:ext uri="{FF2B5EF4-FFF2-40B4-BE49-F238E27FC236}">
+                <a16:creationId xmlns:a16="http://schemas.microsoft.com/office/drawing/2014/main" id="{DF2C5E1F-5585-44DE-A671-9C36F82F1380}"/>
               </a:ext>
             </a:extLst>
           </p:cNvPr>
@@ -6341,14 +6391,14 @@
           <a:lstStyle xmlns:a="http://schemas.openxmlformats.org/drawingml/2006/main"/>
           <a:p xmlns:a="http://schemas.openxmlformats.org/drawingml/2006/main">
             <a:pPr>
-              <a:defRPr sz="1324" i="1">
+              <a:defRPr sz="1324">
                 <a:solidFill>
                   <a:srgbClr val="487AA1"/>
                 </a:solidFill>
               </a:defRPr>
             </a:pPr>
             <a:r>
-              <a:rPr sz="1324" i="1">
+              <a:rPr sz="1324">
                 <a:solidFill>
                   <a:srgbClr val="487AA1"/>
                 </a:solidFill>
@@ -6360,10 +6410,10 @@
       </p:sp>
       <p:sp>
         <p:nvSpPr>
-          <p:cNvPr id="143" name="figure-two-heading-title">
-            <a:extLst xmlns:a="http://schemas.openxmlformats.org/drawingml/2006/main">
-              <a:ext uri="{FF2B5EF4-FFF2-40B4-BE49-F238E27FC236}">
-                <a16:creationId xmlns:a16="http://schemas.microsoft.com/office/drawing/2014/main" id="{49451D4A-EF15-46A9-B867-E914FC4DDE85}"/>
+          <p:cNvPr id="144" name="figure-two-heading-title">
+            <a:extLst xmlns:a="http://schemas.openxmlformats.org/drawingml/2006/main">
+              <a:ext uri="{FF2B5EF4-FFF2-40B4-BE49-F238E27FC236}">
+                <a16:creationId xmlns:a16="http://schemas.microsoft.com/office/drawing/2014/main" id="{6AC60595-5A4A-4D21-8523-C7DC3EF4D459}"/>
               </a:ext>
             </a:extLst>
           </p:cNvPr>
@@ -6410,10 +6460,10 @@
       </p:sp>
       <p:sp>
         <p:nvSpPr>
-          <p:cNvPr id="144" name="figure-two-heading-rule">
-            <a:extLst xmlns:a="http://schemas.openxmlformats.org/drawingml/2006/main">
-              <a:ext uri="{FF2B5EF4-FFF2-40B4-BE49-F238E27FC236}">
-                <a16:creationId xmlns:a16="http://schemas.microsoft.com/office/drawing/2014/main" id="{364B6142-0E18-499B-A8A9-82A3ECEBA1F3}"/>
+          <p:cNvPr id="145" name="figure-two-heading-rule">
+            <a:extLst xmlns:a="http://schemas.openxmlformats.org/drawingml/2006/main">
+              <a:ext uri="{FF2B5EF4-FFF2-40B4-BE49-F238E27FC236}">
+                <a16:creationId xmlns:a16="http://schemas.microsoft.com/office/drawing/2014/main" id="{67C67F2C-E179-4669-9AD1-34D5EA0A4B3E}"/>
               </a:ext>
             </a:extLst>
           </p:cNvPr>
@@ -6443,10 +6493,10 @@
       </p:sp>
       <p:sp>
         <p:nvSpPr>
-          <p:cNvPr id="145" name="figure-two-frame">
-            <a:extLst xmlns:a="http://schemas.openxmlformats.org/drawingml/2006/main">
-              <a:ext uri="{FF2B5EF4-FFF2-40B4-BE49-F238E27FC236}">
-                <a16:creationId xmlns:a16="http://schemas.microsoft.com/office/drawing/2014/main" id="{A006D58F-8E35-4546-98C5-8991370E7C5C}"/>
+          <p:cNvPr id="146" name="figure-two-frame">
+            <a:extLst xmlns:a="http://schemas.openxmlformats.org/drawingml/2006/main">
+              <a:ext uri="{FF2B5EF4-FFF2-40B4-BE49-F238E27FC236}">
+                <a16:creationId xmlns:a16="http://schemas.microsoft.com/office/drawing/2014/main" id="{C70F3EC6-BA1F-495B-8B5D-4A3E06DBF652}"/>
               </a:ext>
             </a:extLst>
           </p:cNvPr>
@@ -6478,17 +6528,17 @@
       </p:sp>
       <p:pic>
         <p:nvPicPr>
-          <p:cNvPr id="328" name=""/>
+          <p:cNvPr id="331" name=""/>
           <p:cNvPicPr>
             <a:picLocks xmlns:a="http://schemas.openxmlformats.org/drawingml/2006/main" noChangeAspect="1"/>
           </p:cNvPicPr>
           <p:nvPr/>
         </p:nvPicPr>
         <p:blipFill>
-          <a:blip xmlns:r="http://schemas.openxmlformats.org/officeDocument/2006/relationships" xmlns:a="http://schemas.openxmlformats.org/drawingml/2006/main" r:embed="Re520d2bd644d406b">
+          <a:blip xmlns:r="http://schemas.openxmlformats.org/officeDocument/2006/relationships" xmlns:a="http://schemas.openxmlformats.org/drawingml/2006/main" r:embed="Rc6f2dd9910ac4a14">
             <a:extLst>
               <a:ext uri="{96DAC541-7B7A-43D3-8B79-37D633B846F1}">
-                <asvg:svgBlip xmlns:asvg="http://schemas.microsoft.com/office/drawing/2016/SVG/main" r:embed="Rb4daec20550e4e25"/>
+                <asvg:svgBlip xmlns:asvg="http://schemas.microsoft.com/office/drawing/2016/SVG/main" r:embed="R000bb6c2e97940ed"/>
               </a:ext>
             </a:extLst>
           </a:blip>
@@ -6506,10 +6556,10 @@
       </p:pic>
       <p:sp>
         <p:nvSpPr>
-          <p:cNvPr id="147" name="figure-two-caption">
-            <a:extLst xmlns:a="http://schemas.openxmlformats.org/drawingml/2006/main">
-              <a:ext uri="{FF2B5EF4-FFF2-40B4-BE49-F238E27FC236}">
-                <a16:creationId xmlns:a16="http://schemas.microsoft.com/office/drawing/2014/main" id="{C54FDF30-B7E6-42CB-B6B5-159243A7E3EE}"/>
+          <p:cNvPr id="148" name="figure-two-caption">
+            <a:extLst xmlns:a="http://schemas.openxmlformats.org/drawingml/2006/main">
+              <a:ext uri="{FF2B5EF4-FFF2-40B4-BE49-F238E27FC236}">
+                <a16:creationId xmlns:a16="http://schemas.microsoft.com/office/drawing/2014/main" id="{7B002DF6-4B19-4437-813E-0E541AA0068D}"/>
               </a:ext>
             </a:extLst>
           </p:cNvPr>
@@ -6521,7 +6571,7 @@
         <p:spPr>
           <a:xfrm xmlns:a="http://schemas.openxmlformats.org/drawingml/2006/main">
             <a:off x="9729480" y="15188495"/>
-            <a:ext cx="9345422" cy="282514"/>
+            <a:ext cx="9345422" cy="221975"/>
           </a:xfrm>
           <a:prstGeom xmlns:a="http://schemas.openxmlformats.org/drawingml/2006/main" prst="rect">
             <a:avLst/>
@@ -6556,21 +6606,21 @@
       </p:sp>
       <p:sp>
         <p:nvSpPr>
-          <p:cNvPr id="148" name="figure-two-source">
-            <a:extLst xmlns:a="http://schemas.openxmlformats.org/drawingml/2006/main">
-              <a:ext uri="{FF2B5EF4-FFF2-40B4-BE49-F238E27FC236}">
-                <a16:creationId xmlns:a16="http://schemas.microsoft.com/office/drawing/2014/main" id="{83956298-8F3B-41DC-84EF-2E8E6C668168}"/>
-              </a:ext>
-            </a:extLst>
-          </p:cNvPr>
-          <p:cNvSpPr>
-            <a:spLocks xmlns:a="http://schemas.openxmlformats.org/drawingml/2006/main" noGrp="1"/>
-          </p:cNvSpPr>
-          <p:nvPr/>
-        </p:nvSpPr>
-        <p:spPr>
-          <a:xfrm xmlns:a="http://schemas.openxmlformats.org/drawingml/2006/main">
-            <a:off x="9729480" y="15410470"/>
+          <p:cNvPr id="149" name="figure-two-source">
+            <a:extLst xmlns:a="http://schemas.openxmlformats.org/drawingml/2006/main">
+              <a:ext uri="{FF2B5EF4-FFF2-40B4-BE49-F238E27FC236}">
+                <a16:creationId xmlns:a16="http://schemas.microsoft.com/office/drawing/2014/main" id="{02E446B1-E0B1-40A8-91EB-BCC10368AD31}"/>
+              </a:ext>
+            </a:extLst>
+          </p:cNvPr>
+          <p:cNvSpPr>
+            <a:spLocks xmlns:a="http://schemas.openxmlformats.org/drawingml/2006/main" noGrp="1"/>
+          </p:cNvSpPr>
+          <p:nvPr/>
+        </p:nvSpPr>
+        <p:spPr>
+          <a:xfrm xmlns:a="http://schemas.openxmlformats.org/drawingml/2006/main">
+            <a:off x="9729480" y="15417197"/>
             <a:ext cx="9345422" cy="255608"/>
           </a:xfrm>
           <a:prstGeom xmlns:a="http://schemas.openxmlformats.org/drawingml/2006/main" prst="rect">
@@ -6587,14 +6637,14 @@
           <a:lstStyle xmlns:a="http://schemas.openxmlformats.org/drawingml/2006/main"/>
           <a:p xmlns:a="http://schemas.openxmlformats.org/drawingml/2006/main">
             <a:pPr>
-              <a:defRPr sz="1324" i="1">
+              <a:defRPr sz="1324">
                 <a:solidFill>
                   <a:srgbClr val="487AA1"/>
                 </a:solidFill>
               </a:defRPr>
             </a:pPr>
             <a:r>
-              <a:rPr sz="1324" i="1">
+              <a:rPr sz="1324">
                 <a:solidFill>
                   <a:srgbClr val="487AA1"/>
                 </a:solidFill>
@@ -6606,10 +6656,10 @@
       </p:sp>
       <p:sp>
         <p:nvSpPr>
-          <p:cNvPr id="149" name="validation-heading-title">
-            <a:extLst xmlns:a="http://schemas.openxmlformats.org/drawingml/2006/main">
-              <a:ext uri="{FF2B5EF4-FFF2-40B4-BE49-F238E27FC236}">
-                <a16:creationId xmlns:a16="http://schemas.microsoft.com/office/drawing/2014/main" id="{8659E964-6FD9-4307-8B83-E541E09B0AA5}"/>
+          <p:cNvPr id="150" name="validation-heading-title">
+            <a:extLst xmlns:a="http://schemas.openxmlformats.org/drawingml/2006/main">
+              <a:ext uri="{FF2B5EF4-FFF2-40B4-BE49-F238E27FC236}">
+                <a16:creationId xmlns:a16="http://schemas.microsoft.com/office/drawing/2014/main" id="{90B9DBDF-AC72-4A5E-B96A-4CA30D7DC198}"/>
               </a:ext>
             </a:extLst>
           </p:cNvPr>
@@ -6656,10 +6706,10 @@
       </p:sp>
       <p:sp>
         <p:nvSpPr>
-          <p:cNvPr id="150" name="validation-heading-rule">
-            <a:extLst xmlns:a="http://schemas.openxmlformats.org/drawingml/2006/main">
-              <a:ext uri="{FF2B5EF4-FFF2-40B4-BE49-F238E27FC236}">
-                <a16:creationId xmlns:a16="http://schemas.microsoft.com/office/drawing/2014/main" id="{33382504-7907-4553-B0BA-0261AF1C6C79}"/>
+          <p:cNvPr id="151" name="validation-heading-rule">
+            <a:extLst xmlns:a="http://schemas.openxmlformats.org/drawingml/2006/main">
+              <a:ext uri="{FF2B5EF4-FFF2-40B4-BE49-F238E27FC236}">
+                <a16:creationId xmlns:a16="http://schemas.microsoft.com/office/drawing/2014/main" id="{F410096F-F5C9-4D0D-97E7-B7E744166164}"/>
               </a:ext>
             </a:extLst>
           </p:cNvPr>
@@ -6689,10 +6739,10 @@
       </p:sp>
       <p:sp>
         <p:nvSpPr>
-          <p:cNvPr id="151" name="validation-panel">
-            <a:extLst xmlns:a="http://schemas.openxmlformats.org/drawingml/2006/main">
-              <a:ext uri="{FF2B5EF4-FFF2-40B4-BE49-F238E27FC236}">
-                <a16:creationId xmlns:a16="http://schemas.microsoft.com/office/drawing/2014/main" id="{0343B59D-BB47-4EEE-9D14-1F0AA52D37D2}"/>
+          <p:cNvPr id="152" name="validation-panel">
+            <a:extLst xmlns:a="http://schemas.openxmlformats.org/drawingml/2006/main">
+              <a:ext uri="{FF2B5EF4-FFF2-40B4-BE49-F238E27FC236}">
+                <a16:creationId xmlns:a16="http://schemas.microsoft.com/office/drawing/2014/main" id="{453B71BC-1A2E-4CD0-B574-3F2C990171AF}"/>
               </a:ext>
             </a:extLst>
           </p:cNvPr>
@@ -6724,10 +6774,10 @@
       </p:sp>
       <p:sp>
         <p:nvSpPr>
-          <p:cNvPr id="152" name="validation">
-            <a:extLst xmlns:a="http://schemas.openxmlformats.org/drawingml/2006/main">
-              <a:ext uri="{FF2B5EF4-FFF2-40B4-BE49-F238E27FC236}">
-                <a16:creationId xmlns:a16="http://schemas.microsoft.com/office/drawing/2014/main" id="{E0F373C6-2947-4A0B-A240-D88E3B23010E}"/>
+          <p:cNvPr id="153" name="validation">
+            <a:extLst xmlns:a="http://schemas.openxmlformats.org/drawingml/2006/main">
+              <a:ext uri="{FF2B5EF4-FFF2-40B4-BE49-F238E27FC236}">
+                <a16:creationId xmlns:a16="http://schemas.microsoft.com/office/drawing/2014/main" id="{E85C9E90-5B41-4E38-A37C-804BDC2ED776}"/>
               </a:ext>
             </a:extLst>
           </p:cNvPr>
@@ -6825,10 +6875,10 @@
       </p:sp>
       <p:sp>
         <p:nvSpPr>
-          <p:cNvPr id="153" name="validation-evidence">
-            <a:extLst xmlns:a="http://schemas.openxmlformats.org/drawingml/2006/main">
-              <a:ext uri="{FF2B5EF4-FFF2-40B4-BE49-F238E27FC236}">
-                <a16:creationId xmlns:a16="http://schemas.microsoft.com/office/drawing/2014/main" id="{9C9A1CFD-A28C-45D2-9E49-886268AEAD36}"/>
+          <p:cNvPr id="154" name="validation-evidence">
+            <a:extLst xmlns:a="http://schemas.openxmlformats.org/drawingml/2006/main">
+              <a:ext uri="{FF2B5EF4-FFF2-40B4-BE49-F238E27FC236}">
+                <a16:creationId xmlns:a16="http://schemas.microsoft.com/office/drawing/2014/main" id="{3E532F2A-0E5F-453A-A384-DCFB7C98F752}"/>
               </a:ext>
             </a:extLst>
           </p:cNvPr>
@@ -6856,14 +6906,14 @@
           <a:lstStyle xmlns:a="http://schemas.openxmlformats.org/drawingml/2006/main"/>
           <a:p xmlns:a="http://schemas.openxmlformats.org/drawingml/2006/main">
             <a:pPr>
-              <a:defRPr sz="1324" i="1">
+              <a:defRPr sz="1324">
                 <a:solidFill>
                   <a:srgbClr val="487AA1"/>
                 </a:solidFill>
               </a:defRPr>
             </a:pPr>
             <a:r>
-              <a:rPr sz="1324" i="1">
+              <a:rPr sz="1324">
                 <a:solidFill>
                   <a:srgbClr val="487AA1"/>
                 </a:solidFill>
@@ -6875,10 +6925,10 @@
       </p:sp>
       <p:sp>
         <p:nvSpPr>
-          <p:cNvPr id="154" name="performance-strip">
-            <a:extLst xmlns:a="http://schemas.openxmlformats.org/drawingml/2006/main">
-              <a:ext uri="{FF2B5EF4-FFF2-40B4-BE49-F238E27FC236}">
-                <a16:creationId xmlns:a16="http://schemas.microsoft.com/office/drawing/2014/main" id="{A710BD32-37F4-451A-8916-F53DD685E5F0}"/>
+          <p:cNvPr id="155" name="performance-strip">
+            <a:extLst xmlns:a="http://schemas.openxmlformats.org/drawingml/2006/main">
+              <a:ext uri="{FF2B5EF4-FFF2-40B4-BE49-F238E27FC236}">
+                <a16:creationId xmlns:a16="http://schemas.microsoft.com/office/drawing/2014/main" id="{9F58B3C4-390D-466A-AF69-FB2E742D1B05}"/>
               </a:ext>
             </a:extLst>
           </p:cNvPr>
@@ -6908,10 +6958,10 @@
       </p:sp>
       <p:sp>
         <p:nvSpPr>
-          <p:cNvPr id="155" name="performance-strip-text">
-            <a:extLst xmlns:a="http://schemas.openxmlformats.org/drawingml/2006/main">
-              <a:ext uri="{FF2B5EF4-FFF2-40B4-BE49-F238E27FC236}">
-                <a16:creationId xmlns:a16="http://schemas.microsoft.com/office/drawing/2014/main" id="{CB5214C1-64F7-4D36-8648-0031A2D085CF}"/>
+          <p:cNvPr id="156" name="performance-strip-text">
+            <a:extLst xmlns:a="http://schemas.openxmlformats.org/drawingml/2006/main">
+              <a:ext uri="{FF2B5EF4-FFF2-40B4-BE49-F238E27FC236}">
+                <a16:creationId xmlns:a16="http://schemas.microsoft.com/office/drawing/2014/main" id="{60EA09A8-0B5F-47ED-9C79-02859963F87E}"/>
               </a:ext>
             </a:extLst>
           </p:cNvPr>
@@ -6951,17 +7001,17 @@
                   <a:srgbClr val="FFFFFF"/>
                 </a:solidFill>
               </a:rPr>
-              <a:t>AURORA-12 vs baseline C-index · Discovery 0.78 vs 0.68 · Internal 0.76 vs 0.67 · External A 0.75 vs 0.66 · External B 0.74 vs 0.65</a:t>
+              <a:t>External validation retained discrimination: C-index 0.75 / 0.74</a:t>
             </a:r>
           </a:p>
         </p:txBody>
       </p:sp>
       <p:sp>
         <p:nvSpPr>
-          <p:cNvPr id="156" name="biology-heading-title">
-            <a:extLst xmlns:a="http://schemas.openxmlformats.org/drawingml/2006/main">
-              <a:ext uri="{FF2B5EF4-FFF2-40B4-BE49-F238E27FC236}">
-                <a16:creationId xmlns:a16="http://schemas.microsoft.com/office/drawing/2014/main" id="{84A96EAB-01FA-40B7-9C82-349265FEA005}"/>
+          <p:cNvPr id="157" name="biology-heading-title">
+            <a:extLst xmlns:a="http://schemas.openxmlformats.org/drawingml/2006/main">
+              <a:ext uri="{FF2B5EF4-FFF2-40B4-BE49-F238E27FC236}">
+                <a16:creationId xmlns:a16="http://schemas.microsoft.com/office/drawing/2014/main" id="{F1F45718-75FB-4C5A-84D7-5CA86D21B116}"/>
               </a:ext>
             </a:extLst>
           </p:cNvPr>
@@ -7008,10 +7058,10 @@
       </p:sp>
       <p:sp>
         <p:nvSpPr>
-          <p:cNvPr id="157" name="biology-heading-rule">
-            <a:extLst xmlns:a="http://schemas.openxmlformats.org/drawingml/2006/main">
-              <a:ext uri="{FF2B5EF4-FFF2-40B4-BE49-F238E27FC236}">
-                <a16:creationId xmlns:a16="http://schemas.microsoft.com/office/drawing/2014/main" id="{71AECF77-1DB5-4F36-A5DF-B6EF1ECC8C53}"/>
+          <p:cNvPr id="158" name="biology-heading-rule">
+            <a:extLst xmlns:a="http://schemas.openxmlformats.org/drawingml/2006/main">
+              <a:ext uri="{FF2B5EF4-FFF2-40B4-BE49-F238E27FC236}">
+                <a16:creationId xmlns:a16="http://schemas.microsoft.com/office/drawing/2014/main" id="{B511BF15-D633-435A-93EA-197D9DA3DB1F}"/>
               </a:ext>
             </a:extLst>
           </p:cNvPr>
@@ -7041,10 +7091,10 @@
       </p:sp>
       <p:sp>
         <p:nvSpPr>
-          <p:cNvPr id="158" name="biology-1-value">
-            <a:extLst xmlns:a="http://schemas.openxmlformats.org/drawingml/2006/main">
-              <a:ext uri="{FF2B5EF4-FFF2-40B4-BE49-F238E27FC236}">
-                <a16:creationId xmlns:a16="http://schemas.microsoft.com/office/drawing/2014/main" id="{8A63F413-CEED-4B0F-9EDE-083D8E223AC6}"/>
+          <p:cNvPr id="159" name="biology-1-value">
+            <a:extLst xmlns:a="http://schemas.openxmlformats.org/drawingml/2006/main">
+              <a:ext uri="{FF2B5EF4-FFF2-40B4-BE49-F238E27FC236}">
+                <a16:creationId xmlns:a16="http://schemas.microsoft.com/office/drawing/2014/main" id="{16B53D42-B789-4E41-81A4-0BDBD9D4B5DD}"/>
               </a:ext>
             </a:extLst>
           </p:cNvPr>
@@ -7091,21 +7141,21 @@
       </p:sp>
       <p:sp>
         <p:nvSpPr>
-          <p:cNvPr id="159" name="biology-1-label">
-            <a:extLst xmlns:a="http://schemas.openxmlformats.org/drawingml/2006/main">
-              <a:ext uri="{FF2B5EF4-FFF2-40B4-BE49-F238E27FC236}">
-                <a16:creationId xmlns:a16="http://schemas.microsoft.com/office/drawing/2014/main" id="{FC021605-832B-4D06-B26F-73387DA2DA23}"/>
-              </a:ext>
-            </a:extLst>
-          </p:cNvPr>
-          <p:cNvSpPr>
-            <a:spLocks xmlns:a="http://schemas.openxmlformats.org/drawingml/2006/main" noGrp="1"/>
-          </p:cNvSpPr>
-          <p:nvPr/>
-        </p:nvSpPr>
-        <p:spPr>
-          <a:xfrm xmlns:a="http://schemas.openxmlformats.org/drawingml/2006/main">
-            <a:off x="19640883" y="5192878"/>
+          <p:cNvPr id="160" name="biology-1-label">
+            <a:extLst xmlns:a="http://schemas.openxmlformats.org/drawingml/2006/main">
+              <a:ext uri="{FF2B5EF4-FFF2-40B4-BE49-F238E27FC236}">
+                <a16:creationId xmlns:a16="http://schemas.microsoft.com/office/drawing/2014/main" id="{50BB53D2-9CF1-4910-8795-3B6D18D55901}"/>
+              </a:ext>
+            </a:extLst>
+          </p:cNvPr>
+          <p:cNvSpPr>
+            <a:spLocks xmlns:a="http://schemas.openxmlformats.org/drawingml/2006/main" noGrp="1"/>
+          </p:cNvSpPr>
+          <p:nvPr/>
+        </p:nvSpPr>
+        <p:spPr>
+          <a:xfrm xmlns:a="http://schemas.openxmlformats.org/drawingml/2006/main">
+            <a:off x="19640883" y="5165972"/>
             <a:ext cx="2829904" cy="591934"/>
           </a:xfrm>
           <a:prstGeom xmlns:a="http://schemas.openxmlformats.org/drawingml/2006/main" prst="rect">
@@ -7141,10 +7191,10 @@
       </p:sp>
       <p:sp>
         <p:nvSpPr>
-          <p:cNvPr id="160" name="biology-2-value">
-            <a:extLst xmlns:a="http://schemas.openxmlformats.org/drawingml/2006/main">
-              <a:ext uri="{FF2B5EF4-FFF2-40B4-BE49-F238E27FC236}">
-                <a16:creationId xmlns:a16="http://schemas.microsoft.com/office/drawing/2014/main" id="{02E6DF70-2687-4EBD-8F6D-B4D1291803E4}"/>
+          <p:cNvPr id="161" name="biology-2-value">
+            <a:extLst xmlns:a="http://schemas.openxmlformats.org/drawingml/2006/main">
+              <a:ext uri="{FF2B5EF4-FFF2-40B4-BE49-F238E27FC236}">
+                <a16:creationId xmlns:a16="http://schemas.microsoft.com/office/drawing/2014/main" id="{8BDA5066-52C9-4EEA-9BE1-1E23EC98D12B}"/>
               </a:ext>
             </a:extLst>
           </p:cNvPr>
@@ -7172,14 +7222,14 @@
           <a:lstStyle xmlns:a="http://schemas.openxmlformats.org/drawingml/2006/main"/>
           <a:p xmlns:a="http://schemas.openxmlformats.org/drawingml/2006/main">
             <a:pPr>
-              <a:defRPr sz="3231" b="1">
+              <a:defRPr sz="3602" b="1">
                 <a:solidFill>
                   <a:srgbClr val="487AA1"/>
                 </a:solidFill>
               </a:defRPr>
             </a:pPr>
             <a:r>
-              <a:rPr sz="3231" b="1">
+              <a:rPr sz="3602" b="1">
                 <a:solidFill>
                   <a:srgbClr val="487AA1"/>
                 </a:solidFill>
@@ -7191,21 +7241,21 @@
       </p:sp>
       <p:sp>
         <p:nvSpPr>
-          <p:cNvPr id="161" name="biology-2-label">
-            <a:extLst xmlns:a="http://schemas.openxmlformats.org/drawingml/2006/main">
-              <a:ext uri="{FF2B5EF4-FFF2-40B4-BE49-F238E27FC236}">
-                <a16:creationId xmlns:a16="http://schemas.microsoft.com/office/drawing/2014/main" id="{D76489C4-E389-4523-99C3-0B1401DD5A4A}"/>
-              </a:ext>
-            </a:extLst>
-          </p:cNvPr>
-          <p:cNvSpPr>
-            <a:spLocks xmlns:a="http://schemas.openxmlformats.org/drawingml/2006/main" noGrp="1"/>
-          </p:cNvSpPr>
-          <p:nvPr/>
-        </p:nvSpPr>
-        <p:spPr>
-          <a:xfrm xmlns:a="http://schemas.openxmlformats.org/drawingml/2006/main">
-            <a:off x="22841370" y="5192878"/>
+          <p:cNvPr id="162" name="biology-2-label">
+            <a:extLst xmlns:a="http://schemas.openxmlformats.org/drawingml/2006/main">
+              <a:ext uri="{FF2B5EF4-FFF2-40B4-BE49-F238E27FC236}">
+                <a16:creationId xmlns:a16="http://schemas.microsoft.com/office/drawing/2014/main" id="{46B31008-36AF-46B2-A167-83E227C08589}"/>
+              </a:ext>
+            </a:extLst>
+          </p:cNvPr>
+          <p:cNvSpPr>
+            <a:spLocks xmlns:a="http://schemas.openxmlformats.org/drawingml/2006/main" noGrp="1"/>
+          </p:cNvSpPr>
+          <p:nvPr/>
+        </p:nvSpPr>
+        <p:spPr>
+          <a:xfrm xmlns:a="http://schemas.openxmlformats.org/drawingml/2006/main">
+            <a:off x="22841370" y="5165972"/>
             <a:ext cx="2829904" cy="591934"/>
           </a:xfrm>
           <a:prstGeom xmlns:a="http://schemas.openxmlformats.org/drawingml/2006/main" prst="rect">
@@ -7241,10 +7291,10 @@
       </p:sp>
       <p:sp>
         <p:nvSpPr>
-          <p:cNvPr id="162" name="biology-3-value">
-            <a:extLst xmlns:a="http://schemas.openxmlformats.org/drawingml/2006/main">
-              <a:ext uri="{FF2B5EF4-FFF2-40B4-BE49-F238E27FC236}">
-                <a16:creationId xmlns:a16="http://schemas.microsoft.com/office/drawing/2014/main" id="{8F333866-13D7-457F-B81C-14BD9C30F63F}"/>
+          <p:cNvPr id="163" name="biology-3-value">
+            <a:extLst xmlns:a="http://schemas.openxmlformats.org/drawingml/2006/main">
+              <a:ext uri="{FF2B5EF4-FFF2-40B4-BE49-F238E27FC236}">
+                <a16:creationId xmlns:a16="http://schemas.microsoft.com/office/drawing/2014/main" id="{56DE1F02-2E30-4D02-801D-1D77A5D2B39A}"/>
               </a:ext>
             </a:extLst>
           </p:cNvPr>
@@ -7272,14 +7322,14 @@
           <a:lstStyle xmlns:a="http://schemas.openxmlformats.org/drawingml/2006/main"/>
           <a:p xmlns:a="http://schemas.openxmlformats.org/drawingml/2006/main">
             <a:pPr>
-              <a:defRPr sz="2754" b="1">
+              <a:defRPr sz="2913" b="1">
                 <a:solidFill>
                   <a:srgbClr val="E5BC6C"/>
                 </a:solidFill>
               </a:defRPr>
             </a:pPr>
             <a:r>
-              <a:rPr sz="2754" b="1">
+              <a:rPr sz="2913" b="1">
                 <a:solidFill>
                   <a:srgbClr val="E5BC6C"/>
                 </a:solidFill>
@@ -7291,21 +7341,21 @@
       </p:sp>
       <p:sp>
         <p:nvSpPr>
-          <p:cNvPr id="163" name="biology-3-label">
-            <a:extLst xmlns:a="http://schemas.openxmlformats.org/drawingml/2006/main">
-              <a:ext uri="{FF2B5EF4-FFF2-40B4-BE49-F238E27FC236}">
-                <a16:creationId xmlns:a16="http://schemas.microsoft.com/office/drawing/2014/main" id="{C807D76C-AF19-47F7-AD41-FD8A2CE3600E}"/>
-              </a:ext>
-            </a:extLst>
-          </p:cNvPr>
-          <p:cNvSpPr>
-            <a:spLocks xmlns:a="http://schemas.openxmlformats.org/drawingml/2006/main" noGrp="1"/>
-          </p:cNvSpPr>
-          <p:nvPr/>
-        </p:nvSpPr>
-        <p:spPr>
-          <a:xfrm xmlns:a="http://schemas.openxmlformats.org/drawingml/2006/main">
-            <a:off x="26041857" y="5192878"/>
+          <p:cNvPr id="164" name="biology-3-label">
+            <a:extLst xmlns:a="http://schemas.openxmlformats.org/drawingml/2006/main">
+              <a:ext uri="{FF2B5EF4-FFF2-40B4-BE49-F238E27FC236}">
+                <a16:creationId xmlns:a16="http://schemas.microsoft.com/office/drawing/2014/main" id="{5573219C-1D07-43D0-AEAE-43753B47B2D1}"/>
+              </a:ext>
+            </a:extLst>
+          </p:cNvPr>
+          <p:cNvSpPr>
+            <a:spLocks xmlns:a="http://schemas.openxmlformats.org/drawingml/2006/main" noGrp="1"/>
+          </p:cNvSpPr>
+          <p:nvPr/>
+        </p:nvSpPr>
+        <p:spPr>
+          <a:xfrm xmlns:a="http://schemas.openxmlformats.org/drawingml/2006/main">
+            <a:off x="26041857" y="5165972"/>
             <a:ext cx="2829904" cy="591934"/>
           </a:xfrm>
           <a:prstGeom xmlns:a="http://schemas.openxmlformats.org/drawingml/2006/main" prst="rect">
@@ -7341,10 +7391,10 @@
       </p:sp>
       <p:sp>
         <p:nvSpPr>
-          <p:cNvPr id="164" name="biology-evidence">
-            <a:extLst xmlns:a="http://schemas.openxmlformats.org/drawingml/2006/main">
-              <a:ext uri="{FF2B5EF4-FFF2-40B4-BE49-F238E27FC236}">
-                <a16:creationId xmlns:a16="http://schemas.microsoft.com/office/drawing/2014/main" id="{A2B1489D-E93A-4C78-98A7-4D6D0FC68CF7}"/>
+          <p:cNvPr id="165" name="biology-evidence">
+            <a:extLst xmlns:a="http://schemas.openxmlformats.org/drawingml/2006/main">
+              <a:ext uri="{FF2B5EF4-FFF2-40B4-BE49-F238E27FC236}">
+                <a16:creationId xmlns:a16="http://schemas.microsoft.com/office/drawing/2014/main" id="{251B3210-1281-4829-9D30-B5F6BFFDD060}"/>
               </a:ext>
             </a:extLst>
           </p:cNvPr>
@@ -7372,14 +7422,14 @@
           <a:lstStyle xmlns:a="http://schemas.openxmlformats.org/drawingml/2006/main"/>
           <a:p xmlns:a="http://schemas.openxmlformats.org/drawingml/2006/main">
             <a:pPr>
-              <a:defRPr sz="1324" i="1">
+              <a:defRPr sz="1324">
                 <a:solidFill>
                   <a:srgbClr val="487AA1"/>
                 </a:solidFill>
               </a:defRPr>
             </a:pPr>
             <a:r>
-              <a:rPr sz="1324" i="1">
+              <a:rPr sz="1324">
                 <a:solidFill>
                   <a:srgbClr val="487AA1"/>
                 </a:solidFill>
@@ -7391,10 +7441,10 @@
       </p:sp>
       <p:sp>
         <p:nvSpPr>
-          <p:cNvPr id="165" name="figure-three-frame">
-            <a:extLst xmlns:a="http://schemas.openxmlformats.org/drawingml/2006/main">
-              <a:ext uri="{FF2B5EF4-FFF2-40B4-BE49-F238E27FC236}">
-                <a16:creationId xmlns:a16="http://schemas.microsoft.com/office/drawing/2014/main" id="{2071BBFF-309C-44E8-8487-F9F9AD1BEBB0}"/>
+          <p:cNvPr id="166" name="figure-three-frame">
+            <a:extLst xmlns:a="http://schemas.openxmlformats.org/drawingml/2006/main">
+              <a:ext uri="{FF2B5EF4-FFF2-40B4-BE49-F238E27FC236}">
+                <a16:creationId xmlns:a16="http://schemas.microsoft.com/office/drawing/2014/main" id="{EFA20567-52DA-44BF-8D07-24584DF8A3C3}"/>
               </a:ext>
             </a:extLst>
           </p:cNvPr>
@@ -7426,17 +7476,17 @@
       </p:sp>
       <p:pic>
         <p:nvPicPr>
-          <p:cNvPr id="348" name=""/>
+          <p:cNvPr id="351" name=""/>
           <p:cNvPicPr>
             <a:picLocks xmlns:a="http://schemas.openxmlformats.org/drawingml/2006/main" noChangeAspect="1"/>
           </p:cNvPicPr>
           <p:nvPr/>
         </p:nvPicPr>
         <p:blipFill>
-          <a:blip xmlns:r="http://schemas.openxmlformats.org/officeDocument/2006/relationships" xmlns:a="http://schemas.openxmlformats.org/drawingml/2006/main" r:embed="R575c7ce3526947c1">
+          <a:blip xmlns:r="http://schemas.openxmlformats.org/officeDocument/2006/relationships" xmlns:a="http://schemas.openxmlformats.org/drawingml/2006/main" r:embed="Rce8294681876486d">
             <a:extLst>
               <a:ext uri="{96DAC541-7B7A-43D3-8B79-37D633B846F1}">
-                <asvg:svgBlip xmlns:asvg="http://schemas.microsoft.com/office/drawing/2016/SVG/main" r:embed="Rbdb3eb846a424065"/>
+                <asvg:svgBlip xmlns:asvg="http://schemas.microsoft.com/office/drawing/2016/SVG/main" r:embed="R798c564ec73e49ee"/>
               </a:ext>
             </a:extLst>
           </a:blip>
@@ -7454,10 +7504,10 @@
       </p:pic>
       <p:sp>
         <p:nvSpPr>
-          <p:cNvPr id="167" name="figure-three-caption">
-            <a:extLst xmlns:a="http://schemas.openxmlformats.org/drawingml/2006/main">
-              <a:ext uri="{FF2B5EF4-FFF2-40B4-BE49-F238E27FC236}">
-                <a16:creationId xmlns:a16="http://schemas.microsoft.com/office/drawing/2014/main" id="{8D093224-6371-4105-9721-1F42AD406D91}"/>
+          <p:cNvPr id="168" name="figure-three-caption">
+            <a:extLst xmlns:a="http://schemas.openxmlformats.org/drawingml/2006/main">
+              <a:ext uri="{FF2B5EF4-FFF2-40B4-BE49-F238E27FC236}">
+                <a16:creationId xmlns:a16="http://schemas.microsoft.com/office/drawing/2014/main" id="{F33A7A29-78ED-4BBA-BA77-E222454041AF}"/>
               </a:ext>
             </a:extLst>
           </p:cNvPr>
@@ -7469,7 +7519,7 @@
         <p:spPr>
           <a:xfrm xmlns:a="http://schemas.openxmlformats.org/drawingml/2006/main">
             <a:off x="19802592" y="10849886"/>
-            <a:ext cx="9372373" cy="282514"/>
+            <a:ext cx="9372373" cy="221975"/>
           </a:xfrm>
           <a:prstGeom xmlns:a="http://schemas.openxmlformats.org/drawingml/2006/main" prst="rect">
             <a:avLst/>
@@ -7504,21 +7554,21 @@
       </p:sp>
       <p:sp>
         <p:nvSpPr>
-          <p:cNvPr id="168" name="figure-three-source">
-            <a:extLst xmlns:a="http://schemas.openxmlformats.org/drawingml/2006/main">
-              <a:ext uri="{FF2B5EF4-FFF2-40B4-BE49-F238E27FC236}">
-                <a16:creationId xmlns:a16="http://schemas.microsoft.com/office/drawing/2014/main" id="{5403411C-B10F-4464-B2D6-AFCF1F978DBA}"/>
-              </a:ext>
-            </a:extLst>
-          </p:cNvPr>
-          <p:cNvSpPr>
-            <a:spLocks xmlns:a="http://schemas.openxmlformats.org/drawingml/2006/main" noGrp="1"/>
-          </p:cNvSpPr>
-          <p:nvPr/>
-        </p:nvSpPr>
-        <p:spPr>
-          <a:xfrm xmlns:a="http://schemas.openxmlformats.org/drawingml/2006/main">
-            <a:off x="19802592" y="11071861"/>
+          <p:cNvPr id="169" name="figure-three-source">
+            <a:extLst xmlns:a="http://schemas.openxmlformats.org/drawingml/2006/main">
+              <a:ext uri="{FF2B5EF4-FFF2-40B4-BE49-F238E27FC236}">
+                <a16:creationId xmlns:a16="http://schemas.microsoft.com/office/drawing/2014/main" id="{6A1A4555-0629-447C-99EF-0CB503AAEE02}"/>
+              </a:ext>
+            </a:extLst>
+          </p:cNvPr>
+          <p:cNvSpPr>
+            <a:spLocks xmlns:a="http://schemas.openxmlformats.org/drawingml/2006/main" noGrp="1"/>
+          </p:cNvSpPr>
+          <p:nvPr/>
+        </p:nvSpPr>
+        <p:spPr>
+          <a:xfrm xmlns:a="http://schemas.openxmlformats.org/drawingml/2006/main">
+            <a:off x="19802592" y="11078588"/>
             <a:ext cx="9372373" cy="255608"/>
           </a:xfrm>
           <a:prstGeom xmlns:a="http://schemas.openxmlformats.org/drawingml/2006/main" prst="rect">
@@ -7535,14 +7585,14 @@
           <a:lstStyle xmlns:a="http://schemas.openxmlformats.org/drawingml/2006/main"/>
           <a:p xmlns:a="http://schemas.openxmlformats.org/drawingml/2006/main">
             <a:pPr>
-              <a:defRPr sz="1324" i="1">
+              <a:defRPr sz="1324">
                 <a:solidFill>
                   <a:srgbClr val="487AA1"/>
                 </a:solidFill>
               </a:defRPr>
             </a:pPr>
             <a:r>
-              <a:rPr sz="1324" i="1">
+              <a:rPr sz="1324">
                 <a:solidFill>
                   <a:srgbClr val="487AA1"/>
                 </a:solidFill>
@@ -7554,10 +7604,10 @@
       </p:sp>
       <p:sp>
         <p:nvSpPr>
-          <p:cNvPr id="169" name="validation-visual-heading-title">
-            <a:extLst xmlns:a="http://schemas.openxmlformats.org/drawingml/2006/main">
-              <a:ext uri="{FF2B5EF4-FFF2-40B4-BE49-F238E27FC236}">
-                <a16:creationId xmlns:a16="http://schemas.microsoft.com/office/drawing/2014/main" id="{EAB314C3-1B83-4CEC-8AE8-424794F5B97C}"/>
+          <p:cNvPr id="170" name="validation-visual-heading-title">
+            <a:extLst xmlns:a="http://schemas.openxmlformats.org/drawingml/2006/main">
+              <a:ext uri="{FF2B5EF4-FFF2-40B4-BE49-F238E27FC236}">
+                <a16:creationId xmlns:a16="http://schemas.microsoft.com/office/drawing/2014/main" id="{0160D933-2C01-4EA2-A86F-8CA1CE649EB9}"/>
               </a:ext>
             </a:extLst>
           </p:cNvPr>
@@ -7604,10 +7654,10 @@
       </p:sp>
       <p:sp>
         <p:nvSpPr>
-          <p:cNvPr id="170" name="validation-visual-heading-rule">
-            <a:extLst xmlns:a="http://schemas.openxmlformats.org/drawingml/2006/main">
-              <a:ext uri="{FF2B5EF4-FFF2-40B4-BE49-F238E27FC236}">
-                <a16:creationId xmlns:a16="http://schemas.microsoft.com/office/drawing/2014/main" id="{31E458B0-CD93-4D1C-A9E5-BE05D468B122}"/>
+          <p:cNvPr id="171" name="validation-visual-heading-rule">
+            <a:extLst xmlns:a="http://schemas.openxmlformats.org/drawingml/2006/main">
+              <a:ext uri="{FF2B5EF4-FFF2-40B4-BE49-F238E27FC236}">
+                <a16:creationId xmlns:a16="http://schemas.microsoft.com/office/drawing/2014/main" id="{3653E4C1-4157-4EDA-85BC-CED0182F1690}"/>
               </a:ext>
             </a:extLst>
           </p:cNvPr>
@@ -7637,10 +7687,10 @@
       </p:sp>
       <p:sp>
         <p:nvSpPr>
-          <p:cNvPr id="171" name="figure-four-frame">
-            <a:extLst xmlns:a="http://schemas.openxmlformats.org/drawingml/2006/main">
-              <a:ext uri="{FF2B5EF4-FFF2-40B4-BE49-F238E27FC236}">
-                <a16:creationId xmlns:a16="http://schemas.microsoft.com/office/drawing/2014/main" id="{119F223E-434E-4B7B-8595-14461BF421FD}"/>
+          <p:cNvPr id="172" name="figure-four-frame">
+            <a:extLst xmlns:a="http://schemas.openxmlformats.org/drawingml/2006/main">
+              <a:ext uri="{FF2B5EF4-FFF2-40B4-BE49-F238E27FC236}">
+                <a16:creationId xmlns:a16="http://schemas.microsoft.com/office/drawing/2014/main" id="{8C216EFD-447B-4952-966B-AE9423F785D6}"/>
               </a:ext>
             </a:extLst>
           </p:cNvPr>
@@ -7672,17 +7722,17 @@
       </p:sp>
       <p:pic>
         <p:nvPicPr>
-          <p:cNvPr id="354" name=""/>
+          <p:cNvPr id="357" name=""/>
           <p:cNvPicPr>
             <a:picLocks xmlns:a="http://schemas.openxmlformats.org/drawingml/2006/main" noChangeAspect="1"/>
           </p:cNvPicPr>
           <p:nvPr/>
         </p:nvPicPr>
         <p:blipFill>
-          <a:blip xmlns:r="http://schemas.openxmlformats.org/officeDocument/2006/relationships" xmlns:a="http://schemas.openxmlformats.org/drawingml/2006/main" r:embed="R5fc966c12cff4ede">
+          <a:blip xmlns:r="http://schemas.openxmlformats.org/officeDocument/2006/relationships" xmlns:a="http://schemas.openxmlformats.org/drawingml/2006/main" r:embed="Rb99b67dda1e14bc1">
             <a:extLst>
               <a:ext uri="{96DAC541-7B7A-43D3-8B79-37D633B846F1}">
-                <asvg:svgBlip xmlns:asvg="http://schemas.microsoft.com/office/drawing/2016/SVG/main" r:embed="Rb6e6eb742ab34e52"/>
+                <asvg:svgBlip xmlns:asvg="http://schemas.microsoft.com/office/drawing/2016/SVG/main" r:embed="R2e7300e9fa594663"/>
               </a:ext>
             </a:extLst>
           </a:blip>
@@ -7700,10 +7750,10 @@
       </p:pic>
       <p:sp>
         <p:nvSpPr>
-          <p:cNvPr id="173" name="figure-four-caption">
-            <a:extLst xmlns:a="http://schemas.openxmlformats.org/drawingml/2006/main">
-              <a:ext uri="{FF2B5EF4-FFF2-40B4-BE49-F238E27FC236}">
-                <a16:creationId xmlns:a16="http://schemas.microsoft.com/office/drawing/2014/main" id="{F4861FB9-B2A3-4674-995F-3F1C969C412A}"/>
+          <p:cNvPr id="174" name="figure-four-caption">
+            <a:extLst xmlns:a="http://schemas.openxmlformats.org/drawingml/2006/main">
+              <a:ext uri="{FF2B5EF4-FFF2-40B4-BE49-F238E27FC236}">
+                <a16:creationId xmlns:a16="http://schemas.microsoft.com/office/drawing/2014/main" id="{EDF80D8C-6FC9-4DD4-B951-B23949D0B483}"/>
               </a:ext>
             </a:extLst>
           </p:cNvPr>
@@ -7715,7 +7765,7 @@
         <p:spPr>
           <a:xfrm xmlns:a="http://schemas.openxmlformats.org/drawingml/2006/main">
             <a:off x="19802592" y="16836494"/>
-            <a:ext cx="9372373" cy="282514"/>
+            <a:ext cx="9372373" cy="221975"/>
           </a:xfrm>
           <a:prstGeom xmlns:a="http://schemas.openxmlformats.org/drawingml/2006/main" prst="rect">
             <a:avLst/>
@@ -7750,21 +7800,21 @@
       </p:sp>
       <p:sp>
         <p:nvSpPr>
-          <p:cNvPr id="174" name="figure-four-source">
-            <a:extLst xmlns:a="http://schemas.openxmlformats.org/drawingml/2006/main">
-              <a:ext uri="{FF2B5EF4-FFF2-40B4-BE49-F238E27FC236}">
-                <a16:creationId xmlns:a16="http://schemas.microsoft.com/office/drawing/2014/main" id="{88F47524-7C2E-454B-9402-D7243582CEC7}"/>
-              </a:ext>
-            </a:extLst>
-          </p:cNvPr>
-          <p:cNvSpPr>
-            <a:spLocks xmlns:a="http://schemas.openxmlformats.org/drawingml/2006/main" noGrp="1"/>
-          </p:cNvSpPr>
-          <p:nvPr/>
-        </p:nvSpPr>
-        <p:spPr>
-          <a:xfrm xmlns:a="http://schemas.openxmlformats.org/drawingml/2006/main">
-            <a:off x="19802592" y="17058469"/>
+          <p:cNvPr id="175" name="figure-four-source">
+            <a:extLst xmlns:a="http://schemas.openxmlformats.org/drawingml/2006/main">
+              <a:ext uri="{FF2B5EF4-FFF2-40B4-BE49-F238E27FC236}">
+                <a16:creationId xmlns:a16="http://schemas.microsoft.com/office/drawing/2014/main" id="{CF526DB3-DC6D-4268-A807-FA5A1A591317}"/>
+              </a:ext>
+            </a:extLst>
+          </p:cNvPr>
+          <p:cNvSpPr>
+            <a:spLocks xmlns:a="http://schemas.openxmlformats.org/drawingml/2006/main" noGrp="1"/>
+          </p:cNvSpPr>
+          <p:nvPr/>
+        </p:nvSpPr>
+        <p:spPr>
+          <a:xfrm xmlns:a="http://schemas.openxmlformats.org/drawingml/2006/main">
+            <a:off x="19802592" y="17065196"/>
             <a:ext cx="9372373" cy="255608"/>
           </a:xfrm>
           <a:prstGeom xmlns:a="http://schemas.openxmlformats.org/drawingml/2006/main" prst="rect">
@@ -7781,14 +7831,14 @@
           <a:lstStyle xmlns:a="http://schemas.openxmlformats.org/drawingml/2006/main"/>
           <a:p xmlns:a="http://schemas.openxmlformats.org/drawingml/2006/main">
             <a:pPr>
-              <a:defRPr sz="1324" i="1">
+              <a:defRPr sz="1324">
                 <a:solidFill>
                   <a:srgbClr val="487AA1"/>
                 </a:solidFill>
               </a:defRPr>
             </a:pPr>
             <a:r>
-              <a:rPr sz="1324" i="1">
+              <a:rPr sz="1324">
                 <a:solidFill>
                   <a:srgbClr val="487AA1"/>
                 </a:solidFill>
@@ -7800,10 +7850,10 @@
       </p:sp>
       <p:sp>
         <p:nvSpPr>
-          <p:cNvPr id="175" name="conclusion-heading-title">
-            <a:extLst xmlns:a="http://schemas.openxmlformats.org/drawingml/2006/main">
-              <a:ext uri="{FF2B5EF4-FFF2-40B4-BE49-F238E27FC236}">
-                <a16:creationId xmlns:a16="http://schemas.microsoft.com/office/drawing/2014/main" id="{30B9408D-9161-47C0-99BD-2306C55BF568}"/>
+          <p:cNvPr id="176" name="conclusion-heading-title">
+            <a:extLst xmlns:a="http://schemas.openxmlformats.org/drawingml/2006/main">
+              <a:ext uri="{FF2B5EF4-FFF2-40B4-BE49-F238E27FC236}">
+                <a16:creationId xmlns:a16="http://schemas.microsoft.com/office/drawing/2014/main" id="{09B51A2A-0787-485A-AA94-2CAE0F909694}"/>
               </a:ext>
             </a:extLst>
           </p:cNvPr>
@@ -7850,10 +7900,10 @@
       </p:sp>
       <p:sp>
         <p:nvSpPr>
-          <p:cNvPr id="176" name="conclusion-heading-rule">
-            <a:extLst xmlns:a="http://schemas.openxmlformats.org/drawingml/2006/main">
-              <a:ext uri="{FF2B5EF4-FFF2-40B4-BE49-F238E27FC236}">
-                <a16:creationId xmlns:a16="http://schemas.microsoft.com/office/drawing/2014/main" id="{22973C74-5AE9-47C1-AFBA-DF8BEF5E5A92}"/>
+          <p:cNvPr id="177" name="conclusion-heading-rule">
+            <a:extLst xmlns:a="http://schemas.openxmlformats.org/drawingml/2006/main">
+              <a:ext uri="{FF2B5EF4-FFF2-40B4-BE49-F238E27FC236}">
+                <a16:creationId xmlns:a16="http://schemas.microsoft.com/office/drawing/2014/main" id="{EA880451-C6E6-474F-A9AC-85825A95502A}"/>
               </a:ext>
             </a:extLst>
           </p:cNvPr>
@@ -7883,10 +7933,10 @@
       </p:sp>
       <p:sp>
         <p:nvSpPr>
-          <p:cNvPr id="177" name="conclusion-panel">
-            <a:extLst xmlns:a="http://schemas.openxmlformats.org/drawingml/2006/main">
-              <a:ext uri="{FF2B5EF4-FFF2-40B4-BE49-F238E27FC236}">
-                <a16:creationId xmlns:a16="http://schemas.microsoft.com/office/drawing/2014/main" id="{802BC679-5E57-42C7-A087-3B592E7419FE}"/>
+          <p:cNvPr id="178" name="conclusion-panel">
+            <a:extLst xmlns:a="http://schemas.openxmlformats.org/drawingml/2006/main">
+              <a:ext uri="{FF2B5EF4-FFF2-40B4-BE49-F238E27FC236}">
+                <a16:creationId xmlns:a16="http://schemas.microsoft.com/office/drawing/2014/main" id="{F47531B0-9CF5-4032-AD05-BA3167C3B4A0}"/>
               </a:ext>
             </a:extLst>
           </p:cNvPr>
@@ -7918,10 +7968,10 @@
       </p:sp>
       <p:sp>
         <p:nvSpPr>
-          <p:cNvPr id="178" name="conclusion">
-            <a:extLst xmlns:a="http://schemas.openxmlformats.org/drawingml/2006/main">
-              <a:ext uri="{FF2B5EF4-FFF2-40B4-BE49-F238E27FC236}">
-                <a16:creationId xmlns:a16="http://schemas.microsoft.com/office/drawing/2014/main" id="{CB70AEF9-E241-4D4F-AB30-A81833F1E54F}"/>
+          <p:cNvPr id="179" name="conclusion-lead">
+            <a:extLst xmlns:a="http://schemas.openxmlformats.org/drawingml/2006/main">
+              <a:ext uri="{FF2B5EF4-FFF2-40B4-BE49-F238E27FC236}">
+                <a16:creationId xmlns:a16="http://schemas.microsoft.com/office/drawing/2014/main" id="{0B7905F0-3F27-4A1A-B753-5D9382F251DC}"/>
               </a:ext>
             </a:extLst>
           </p:cNvPr>
@@ -7933,7 +7983,57 @@
         <p:spPr>
           <a:xfrm xmlns:a="http://schemas.openxmlformats.org/drawingml/2006/main">
             <a:off x="19869970" y="18484492"/>
-            <a:ext cx="9237616" cy="1547101"/>
+            <a:ext cx="9237616" cy="430498"/>
+          </a:xfrm>
+          <a:prstGeom xmlns:a="http://schemas.openxmlformats.org/drawingml/2006/main" prst="rect">
+            <a:avLst/>
+          </a:prstGeom>
+          <a:noFill xmlns:a="http://schemas.openxmlformats.org/drawingml/2006/main"/>
+          <a:ln xmlns:a="http://schemas.openxmlformats.org/drawingml/2006/main" w="0">
+            <a:noFill/>
+            <a:prstDash val="solid"/>
+          </a:ln>
+        </p:spPr>
+        <p:txBody>
+          <a:bodyPr xmlns:a="http://schemas.openxmlformats.org/drawingml/2006/main"/>
+          <a:lstStyle xmlns:a="http://schemas.openxmlformats.org/drawingml/2006/main"/>
+          <a:p xmlns:a="http://schemas.openxmlformats.org/drawingml/2006/main">
+            <a:pPr>
+              <a:defRPr sz="2119" b="1">
+                <a:solidFill>
+                  <a:srgbClr val="293F55"/>
+                </a:solidFill>
+              </a:defRPr>
+            </a:pPr>
+            <a:r>
+              <a:rPr sz="2119" b="1">
+                <a:solidFill>
+                  <a:srgbClr val="293F55"/>
+                </a:solidFill>
+              </a:rPr>
+              <a:t>A rights-safe methodological test fixture</a:t>
+            </a:r>
+          </a:p>
+        </p:txBody>
+      </p:sp>
+      <p:sp>
+        <p:nvSpPr>
+          <p:cNvPr id="180" name="conclusion">
+            <a:extLst xmlns:a="http://schemas.openxmlformats.org/drawingml/2006/main">
+              <a:ext uri="{FF2B5EF4-FFF2-40B4-BE49-F238E27FC236}">
+                <a16:creationId xmlns:a16="http://schemas.microsoft.com/office/drawing/2014/main" id="{FD7BBAB5-596D-4718-8ADF-8E8572A1CEB8}"/>
+              </a:ext>
+            </a:extLst>
+          </p:cNvPr>
+          <p:cNvSpPr>
+            <a:spLocks xmlns:a="http://schemas.openxmlformats.org/drawingml/2006/main" noGrp="1"/>
+          </p:cNvSpPr>
+          <p:nvPr/>
+        </p:nvSpPr>
+        <p:spPr>
+          <a:xfrm xmlns:a="http://schemas.openxmlformats.org/drawingml/2006/main">
+            <a:off x="19869970" y="18968802"/>
+            <a:ext cx="9237616" cy="1062791"/>
           </a:xfrm>
           <a:prstGeom xmlns:a="http://schemas.openxmlformats.org/drawingml/2006/main" prst="rect">
             <a:avLst/>
@@ -7961,17 +8061,34 @@
                   <a:srgbClr val="293F55"/>
                 </a:solidFill>
               </a:rPr>
-              <a:t>AURORA-12 is a controlled, rights-safe fixture for testing evidence-linked scientific communication. It supports no inference about real biology, prognosis, treatment or clinical utility. Every number, cohort, feature, author and institution is fictional.</a:t>
+              <a:t>• No biological, prognostic or clinical inference</a:t>
+            </a:r>
+          </a:p>
+          <a:p xmlns:a="http://schemas.openxmlformats.org/drawingml/2006/main">
+            <a:pPr>
+              <a:defRPr sz="2013">
+                <a:solidFill>
+                  <a:srgbClr val="293F55"/>
+                </a:solidFill>
+              </a:defRPr>
+            </a:pPr>
+            <a:r>
+              <a:rPr sz="2013">
+                <a:solidFill>
+                  <a:srgbClr val="293F55"/>
+                </a:solidFill>
+              </a:rPr>
+              <a:t>• All cohorts, values and identities are fictional</a:t>
             </a:r>
           </a:p>
         </p:txBody>
       </p:sp>
       <p:sp>
         <p:nvSpPr>
-          <p:cNvPr id="179" name="conclusion-evidence">
-            <a:extLst xmlns:a="http://schemas.openxmlformats.org/drawingml/2006/main">
-              <a:ext uri="{FF2B5EF4-FFF2-40B4-BE49-F238E27FC236}">
-                <a16:creationId xmlns:a16="http://schemas.microsoft.com/office/drawing/2014/main" id="{964335A6-3D50-4A68-9FDE-00D7F0963E4B}"/>
+          <p:cNvPr id="181" name="conclusion-evidence">
+            <a:extLst xmlns:a="http://schemas.openxmlformats.org/drawingml/2006/main">
+              <a:ext uri="{FF2B5EF4-FFF2-40B4-BE49-F238E27FC236}">
+                <a16:creationId xmlns:a16="http://schemas.microsoft.com/office/drawing/2014/main" id="{0D1C8CD3-4520-4AA3-B9EA-EF9243505FC4}"/>
               </a:ext>
             </a:extLst>
           </p:cNvPr>
@@ -7999,14 +8116,14 @@
           <a:lstStyle xmlns:a="http://schemas.openxmlformats.org/drawingml/2006/main"/>
           <a:p xmlns:a="http://schemas.openxmlformats.org/drawingml/2006/main">
             <a:pPr>
-              <a:defRPr sz="1324" i="1">
+              <a:defRPr sz="1324">
                 <a:solidFill>
                   <a:srgbClr val="487AA1"/>
                 </a:solidFill>
               </a:defRPr>
             </a:pPr>
             <a:r>
-              <a:rPr sz="1324" i="1">
+              <a:rPr sz="1324">
                 <a:solidFill>
                   <a:srgbClr val="487AA1"/>
                 </a:solidFill>
@@ -8018,10 +8135,10 @@
       </p:sp>
       <p:sp>
         <p:nvSpPr>
-          <p:cNvPr id="180" name="footer-band">
-            <a:extLst xmlns:a="http://schemas.openxmlformats.org/drawingml/2006/main">
-              <a:ext uri="{FF2B5EF4-FFF2-40B4-BE49-F238E27FC236}">
-                <a16:creationId xmlns:a16="http://schemas.microsoft.com/office/drawing/2014/main" id="{759F4529-F3FE-4C8C-A17D-4B3C087A1CBB}"/>
+          <p:cNvPr id="182" name="footer-band">
+            <a:extLst xmlns:a="http://schemas.openxmlformats.org/drawingml/2006/main">
+              <a:ext uri="{FF2B5EF4-FFF2-40B4-BE49-F238E27FC236}">
+                <a16:creationId xmlns:a16="http://schemas.microsoft.com/office/drawing/2014/main" id="{BBA2E932-F0D2-41EF-8740-933386965254}"/>
               </a:ext>
             </a:extLst>
           </p:cNvPr>
@@ -8051,10 +8168,10 @@
       </p:sp>
       <p:sp>
         <p:nvSpPr>
-          <p:cNvPr id="181" name="footer-source">
-            <a:extLst xmlns:a="http://schemas.openxmlformats.org/drawingml/2006/main">
-              <a:ext uri="{FF2B5EF4-FFF2-40B4-BE49-F238E27FC236}">
-                <a16:creationId xmlns:a16="http://schemas.microsoft.com/office/drawing/2014/main" id="{80E9FDBC-35BA-48F8-9410-AAD38E1DBCC7}"/>
+          <p:cNvPr id="183" name="footer-source">
+            <a:extLst xmlns:a="http://schemas.openxmlformats.org/drawingml/2006/main">
+              <a:ext uri="{FF2B5EF4-FFF2-40B4-BE49-F238E27FC236}">
+                <a16:creationId xmlns:a16="http://schemas.microsoft.com/office/drawing/2014/main" id="{1F23422D-E201-4455-816D-B73AAF5DE00D}"/>
               </a:ext>
             </a:extLst>
           </p:cNvPr>
@@ -8066,7 +8183,7 @@
         <p:spPr>
           <a:xfrm xmlns:a="http://schemas.openxmlformats.org/drawingml/2006/main">
             <a:off x="943301" y="20899315"/>
-            <a:ext cx="20213601" cy="282514"/>
+            <a:ext cx="19944087" cy="282514"/>
           </a:xfrm>
           <a:prstGeom xmlns:a="http://schemas.openxmlformats.org/drawingml/2006/main" prst="rect">
             <a:avLst/>
@@ -8101,10 +8218,10 @@
       </p:sp>
       <p:sp>
         <p:nvSpPr>
-          <p:cNvPr id="182" name="footer-status">
-            <a:extLst xmlns:a="http://schemas.openxmlformats.org/drawingml/2006/main">
-              <a:ext uri="{FF2B5EF4-FFF2-40B4-BE49-F238E27FC236}">
-                <a16:creationId xmlns:a16="http://schemas.microsoft.com/office/drawing/2014/main" id="{F79395B2-312B-4F6D-8CA0-CA3CA57914AE}"/>
+          <p:cNvPr id="184" name="footer-status">
+            <a:extLst xmlns:a="http://schemas.openxmlformats.org/drawingml/2006/main">
+              <a:ext uri="{FF2B5EF4-FFF2-40B4-BE49-F238E27FC236}">
+                <a16:creationId xmlns:a16="http://schemas.microsoft.com/office/drawing/2014/main" id="{358BBB4D-1CD4-4F03-9CD4-12D0EC314BE2}"/>
               </a:ext>
             </a:extLst>
           </p:cNvPr>
@@ -8152,7 +8269,7 @@
     </p:spTree>
     <p:extLst>
       <p:ext uri="{BB962C8B-B14F-4D97-AF65-F5344CB8AC3E}">
-        <p14:creationId xmlns:p14="http://schemas.microsoft.com/office/powerpoint/2010/main" val="706451916"/>
+        <p14:creationId xmlns:p14="http://schemas.microsoft.com/office/powerpoint/2010/main" val="394906323"/>
       </p:ext>
     </p:extLst>
   </p:cSld>
